--- a/slides/apresentacao-t2p2.pptx
+++ b/slides/apresentacao-t2p2.pptx
@@ -12,25 +12,26 @@
     <p:sldId id="257" r:id="rId7"/>
     <p:sldId id="258" r:id="rId8"/>
     <p:sldId id="259" r:id="rId9"/>
+    <p:sldId id="260" r:id="rId10"/>
   </p:sldIdLst>
   <p:sldSz cy="5143500" cx="9144000"/>
   <p:notesSz cx="6858000" cy="9144000"/>
   <p:embeddedFontLst>
     <p:embeddedFont>
       <p:font typeface="Proxima Nova"/>
-      <p:regular r:id="rId10"/>
-      <p:bold r:id="rId11"/>
-      <p:italic r:id="rId12"/>
-      <p:boldItalic r:id="rId13"/>
+      <p:regular r:id="rId11"/>
+      <p:bold r:id="rId12"/>
+      <p:italic r:id="rId13"/>
+      <p:boldItalic r:id="rId14"/>
     </p:embeddedFont>
     <p:embeddedFont>
       <p:font typeface="Average"/>
-      <p:regular r:id="rId14"/>
+      <p:regular r:id="rId15"/>
     </p:embeddedFont>
     <p:embeddedFont>
       <p:font typeface="Oswald"/>
-      <p:regular r:id="rId15"/>
-      <p:bold r:id="rId16"/>
+      <p:regular r:id="rId16"/>
+      <p:bold r:id="rId17"/>
     </p:embeddedFont>
   </p:embeddedFontLst>
   <p:defaultTextStyle>
@@ -1059,6 +1060,105 @@
       <p:sp>
         <p:nvSpPr>
           <p:cNvPr id="85" name="Google Shape;85;g39a4272a991_0_72:notes"/>
+          <p:cNvSpPr txBox="1"/>
+          <p:nvPr>
+            <p:ph idx="1" type="body"/>
+          </p:nvPr>
+        </p:nvSpPr>
+        <p:spPr>
+          <a:xfrm>
+            <a:off x="685800" y="4343400"/>
+            <a:ext cx="5486400" cy="4114800"/>
+          </a:xfrm>
+          <a:prstGeom prst="rect">
+            <a:avLst/>
+          </a:prstGeom>
+        </p:spPr>
+        <p:txBody>
+          <a:bodyPr anchorCtr="0" anchor="t" bIns="91425" lIns="91425" spcFirstLastPara="1" rIns="91425" wrap="square" tIns="91425">
+            <a:noAutofit/>
+          </a:bodyPr>
+          <a:lstStyle/>
+          <a:p>
+            <a:pPr indent="0" lvl="0" marL="0" rtl="0" algn="l">
+              <a:spcBef>
+                <a:spcPts val="0"/>
+              </a:spcBef>
+              <a:spcAft>
+                <a:spcPts val="0"/>
+              </a:spcAft>
+              <a:buNone/>
+            </a:pPr>
+            <a:r>
+              <a:t/>
+            </a:r>
+            <a:endParaRPr/>
+          </a:p>
+        </p:txBody>
+      </p:sp>
+    </p:spTree>
+  </p:cSld>
+  <p:clrMapOvr>
+    <a:masterClrMapping/>
+  </p:clrMapOvr>
+</p:notes>
+</file>
+
+<file path=ppt/notesSlides/notesSlide5.xml><?xml version="1.0" encoding="utf-8"?>
+<p:notes xmlns:a="http://schemas.openxmlformats.org/drawingml/2006/main" xmlns:r="http://schemas.openxmlformats.org/officeDocument/2006/relationships" xmlns:mc="http://schemas.openxmlformats.org/markup-compatibility/2006" xmlns:mv="urn:schemas-microsoft-com:mac:vml" xmlns:p="http://schemas.openxmlformats.org/presentationml/2006/main" xmlns:c="http://schemas.openxmlformats.org/drawingml/2006/chart" xmlns:dgm="http://schemas.openxmlformats.org/drawingml/2006/diagram" xmlns:o="urn:schemas-microsoft-com:office:office" xmlns:v="urn:schemas-microsoft-com:vml" xmlns:pvml="urn:schemas-microsoft-com:office:powerpoint" xmlns:com="http://schemas.openxmlformats.org/drawingml/2006/compatibility" xmlns:p14="http://schemas.microsoft.com/office/powerpoint/2010/main" xmlns:p15="http://schemas.microsoft.com/office/powerpoint/2012/main" xmlns:ahyp="http://schemas.microsoft.com/office/drawing/2018/hyperlinkcolor" showMasterPhAnim="0" showMasterSp="0">
+  <p:cSld>
+    <p:spTree>
+      <p:nvGrpSpPr>
+        <p:cNvPr id="90" name="Shape 90"/>
+        <p:cNvGrpSpPr/>
+        <p:nvPr/>
+      </p:nvGrpSpPr>
+      <p:grpSpPr>
+        <a:xfrm>
+          <a:off x="0" y="0"/>
+          <a:ext cx="0" cy="0"/>
+          <a:chOff x="0" y="0"/>
+          <a:chExt cx="0" cy="0"/>
+        </a:xfrm>
+      </p:grpSpPr>
+      <p:sp>
+        <p:nvSpPr>
+          <p:cNvPr id="91" name="Google Shape;91;g39a4a3359d3_0_1:notes"/>
+          <p:cNvSpPr/>
+          <p:nvPr>
+            <p:ph idx="2" type="sldImg"/>
+          </p:nvPr>
+        </p:nvSpPr>
+        <p:spPr>
+          <a:xfrm>
+            <a:off x="381300" y="685800"/>
+            <a:ext cx="6096000" cy="3429000"/>
+          </a:xfrm>
+          <a:custGeom>
+            <a:rect b="b" l="l" r="r" t="t"/>
+            <a:pathLst>
+              <a:path extrusionOk="0" h="120000" w="120000">
+                <a:moveTo>
+                  <a:pt x="0" y="0"/>
+                </a:moveTo>
+                <a:lnTo>
+                  <a:pt x="120000" y="0"/>
+                </a:lnTo>
+                <a:lnTo>
+                  <a:pt x="120000" y="120000"/>
+                </a:lnTo>
+                <a:lnTo>
+                  <a:pt x="0" y="120000"/>
+                </a:lnTo>
+                <a:close/>
+              </a:path>
+            </a:pathLst>
+          </a:custGeom>
+        </p:spPr>
+      </p:sp>
+      <p:sp>
+        <p:nvSpPr>
+          <p:cNvPr id="92" name="Google Shape;92;g39a4a3359d3_0_1:notes"/>
           <p:cNvSpPr txBox="1"/>
           <p:nvPr>
             <p:ph idx="1" type="body"/>
@@ -6849,7 +6949,43 @@
                   <a:cs typeface="Proxima Nova"/>
                   <a:sym typeface="Proxima Nova"/>
                 </a:rPr>
-                <a:t>Técnicas e requisitos necessários para implementação de métodos de treinamento de dados específicos em LLM.</a:t>
+                <a:t>Uma </a:t>
+              </a:r>
+              <a:r>
+                <a:rPr b="1" lang="pt-BR">
+                  <a:latin typeface="Proxima Nova"/>
+                  <a:ea typeface="Proxima Nova"/>
+                  <a:cs typeface="Proxima Nova"/>
+                  <a:sym typeface="Proxima Nova"/>
+                </a:rPr>
+                <a:t>visão geral de técnicas</a:t>
+              </a:r>
+              <a:r>
+                <a:rPr lang="pt-BR">
+                  <a:latin typeface="Proxima Nova"/>
+                  <a:ea typeface="Proxima Nova"/>
+                  <a:cs typeface="Proxima Nova"/>
+                  <a:sym typeface="Proxima Nova"/>
+                </a:rPr>
+                <a:t> e requisitos necessários para implementação de métodos de treinamento de </a:t>
+              </a:r>
+              <a:r>
+                <a:rPr b="1" lang="pt-BR">
+                  <a:latin typeface="Proxima Nova"/>
+                  <a:ea typeface="Proxima Nova"/>
+                  <a:cs typeface="Proxima Nova"/>
+                  <a:sym typeface="Proxima Nova"/>
+                </a:rPr>
+                <a:t>dados específicos</a:t>
+              </a:r>
+              <a:r>
+                <a:rPr lang="pt-BR">
+                  <a:latin typeface="Proxima Nova"/>
+                  <a:ea typeface="Proxima Nova"/>
+                  <a:cs typeface="Proxima Nova"/>
+                  <a:sym typeface="Proxima Nova"/>
+                </a:rPr>
+                <a:t> em LLM. Qual método utilizar para uma dada natureza de dados ou tarefa?</a:t>
               </a:r>
               <a:endParaRPr>
                 <a:latin typeface="Proxima Nova"/>
@@ -6984,7 +7120,7 @@
                   <a:cs typeface="Proxima Nova"/>
                   <a:sym typeface="Proxima Nova"/>
                 </a:rPr>
-                <a:t>Fine-Tuning</a:t>
+                <a:t>Fine-Tuning e seus diversos métodos e variações.</a:t>
               </a:r>
               <a:endParaRPr>
                 <a:latin typeface="Proxima Nova"/>
@@ -7142,7 +7278,7 @@
           </a:bodyPr>
           <a:lstStyle/>
           <a:p>
-            <a:pPr indent="-342900" lvl="0" marL="457200" rtl="0" algn="l">
+            <a:pPr indent="-342900" lvl="0" marL="457200" rtl="0" algn="just">
               <a:spcBef>
                 <a:spcPts val="0"/>
               </a:spcBef>
@@ -7150,27 +7286,377 @@
                 <a:spcPts val="0"/>
               </a:spcAft>
               <a:buClr>
-                <a:srgbClr val="FF0000"/>
+                <a:schemeClr val="dk1"/>
               </a:buClr>
               <a:buSzPts val="1800"/>
               <a:buFont typeface="Proxima Nova"/>
-              <a:buChar char="-"/>
+              <a:buAutoNum type="arabicPeriod"/>
             </a:pPr>
             <a:r>
-              <a:rPr i="1" lang="pt-BR">
-                <a:solidFill>
-                  <a:srgbClr val="FF0000"/>
+              <a:rPr lang="pt-BR">
+                <a:solidFill>
+                  <a:schemeClr val="dk1"/>
                 </a:solidFill>
                 <a:latin typeface="Proxima Nova"/>
                 <a:ea typeface="Proxima Nova"/>
                 <a:cs typeface="Proxima Nova"/>
                 <a:sym typeface="Proxima Nova"/>
               </a:rPr>
-              <a:t>Apresentar evidências da evolução do trabalho (artigos, grafo, queries, etc)</a:t>
+              <a:t>Coletar um </a:t>
             </a:r>
-            <a:endParaRPr i="1">
+            <a:r>
+              <a:rPr b="1" lang="pt-BR">
+                <a:solidFill>
+                  <a:schemeClr val="dk1"/>
+                </a:solidFill>
+                <a:latin typeface="Proxima Nova"/>
+                <a:ea typeface="Proxima Nova"/>
+                <a:cs typeface="Proxima Nova"/>
+                <a:sym typeface="Proxima Nova"/>
+              </a:rPr>
+              <a:t>acervo de materiais</a:t>
+            </a:r>
+            <a:r>
+              <a:rPr lang="pt-BR">
+                <a:solidFill>
+                  <a:schemeClr val="dk1"/>
+                </a:solidFill>
+                <a:latin typeface="Proxima Nova"/>
+                <a:ea typeface="Proxima Nova"/>
+                <a:cs typeface="Proxima Nova"/>
+                <a:sym typeface="Proxima Nova"/>
+              </a:rPr>
+              <a:t> relacionados ao </a:t>
+            </a:r>
+            <a:r>
+              <a:rPr b="1" lang="pt-BR">
+                <a:solidFill>
+                  <a:schemeClr val="dk1"/>
+                </a:solidFill>
+                <a:latin typeface="Proxima Nova"/>
+                <a:ea typeface="Proxima Nova"/>
+                <a:cs typeface="Proxima Nova"/>
+                <a:sym typeface="Proxima Nova"/>
+              </a:rPr>
+              <a:t>tema de </a:t>
+            </a:r>
+            <a:r>
+              <a:rPr b="1" i="1" lang="pt-BR">
+                <a:solidFill>
+                  <a:schemeClr val="dk1"/>
+                </a:solidFill>
+                <a:latin typeface="Proxima Nova"/>
+                <a:ea typeface="Proxima Nova"/>
+                <a:cs typeface="Proxima Nova"/>
+                <a:sym typeface="Proxima Nova"/>
+              </a:rPr>
+              <a:t>Fine-Tuning </a:t>
+            </a:r>
+            <a:r>
+              <a:rPr b="1" lang="pt-BR">
+                <a:solidFill>
+                  <a:schemeClr val="dk1"/>
+                </a:solidFill>
+                <a:latin typeface="Proxima Nova"/>
+                <a:ea typeface="Proxima Nova"/>
+                <a:cs typeface="Proxima Nova"/>
+                <a:sym typeface="Proxima Nova"/>
+              </a:rPr>
+              <a:t>(FT)</a:t>
+            </a:r>
+            <a:r>
+              <a:rPr lang="pt-BR">
+                <a:solidFill>
+                  <a:schemeClr val="dk1"/>
+                </a:solidFill>
+                <a:latin typeface="Proxima Nova"/>
+                <a:ea typeface="Proxima Nova"/>
+                <a:cs typeface="Proxima Nova"/>
+                <a:sym typeface="Proxima Nova"/>
+              </a:rPr>
+              <a:t> e detalhamento e aplicações de seus métodos;</a:t>
+            </a:r>
+            <a:endParaRPr>
               <a:solidFill>
-                <a:srgbClr val="FF0000"/>
+                <a:schemeClr val="dk1"/>
+              </a:solidFill>
+              <a:latin typeface="Proxima Nova"/>
+              <a:ea typeface="Proxima Nova"/>
+              <a:cs typeface="Proxima Nova"/>
+              <a:sym typeface="Proxima Nova"/>
+            </a:endParaRPr>
+          </a:p>
+          <a:p>
+            <a:pPr indent="-342900" lvl="0" marL="457200" rtl="0" algn="just">
+              <a:spcBef>
+                <a:spcPts val="0"/>
+              </a:spcBef>
+              <a:spcAft>
+                <a:spcPts val="0"/>
+              </a:spcAft>
+              <a:buClr>
+                <a:schemeClr val="dk1"/>
+              </a:buClr>
+              <a:buSzPts val="1800"/>
+              <a:buFont typeface="Proxima Nova"/>
+              <a:buAutoNum type="arabicPeriod"/>
+            </a:pPr>
+            <a:r>
+              <a:rPr lang="pt-BR">
+                <a:solidFill>
+                  <a:schemeClr val="dk1"/>
+                </a:solidFill>
+                <a:latin typeface="Proxima Nova"/>
+                <a:ea typeface="Proxima Nova"/>
+                <a:cs typeface="Proxima Nova"/>
+                <a:sym typeface="Proxima Nova"/>
+              </a:rPr>
+              <a:t>Injetar acervo em ferramenta de </a:t>
+            </a:r>
+            <a:r>
+              <a:rPr b="1" lang="pt-BR">
+                <a:solidFill>
+                  <a:schemeClr val="dk1"/>
+                </a:solidFill>
+                <a:latin typeface="Proxima Nova"/>
+                <a:ea typeface="Proxima Nova"/>
+                <a:cs typeface="Proxima Nova"/>
+                <a:sym typeface="Proxima Nova"/>
+              </a:rPr>
+              <a:t>GraphRAG (EdgeQuake)</a:t>
+            </a:r>
+            <a:r>
+              <a:rPr lang="pt-BR">
+                <a:solidFill>
+                  <a:schemeClr val="dk1"/>
+                </a:solidFill>
+                <a:latin typeface="Proxima Nova"/>
+                <a:ea typeface="Proxima Nova"/>
+                <a:cs typeface="Proxima Nova"/>
+                <a:sym typeface="Proxima Nova"/>
+              </a:rPr>
+              <a:t> para </a:t>
+            </a:r>
+            <a:r>
+              <a:rPr b="1" lang="pt-BR">
+                <a:solidFill>
+                  <a:schemeClr val="dk1"/>
+                </a:solidFill>
+                <a:latin typeface="Proxima Nova"/>
+                <a:ea typeface="Proxima Nova"/>
+                <a:cs typeface="Proxima Nova"/>
+                <a:sym typeface="Proxima Nova"/>
+              </a:rPr>
+              <a:t>visão geral</a:t>
+            </a:r>
+            <a:r>
+              <a:rPr lang="pt-BR">
+                <a:solidFill>
+                  <a:schemeClr val="dk1"/>
+                </a:solidFill>
+                <a:latin typeface="Proxima Nova"/>
+                <a:ea typeface="Proxima Nova"/>
+                <a:cs typeface="Proxima Nova"/>
+                <a:sym typeface="Proxima Nova"/>
+              </a:rPr>
+              <a:t> do tema e facilidade de </a:t>
+            </a:r>
+            <a:r>
+              <a:rPr b="1" lang="pt-BR">
+                <a:solidFill>
+                  <a:schemeClr val="dk1"/>
+                </a:solidFill>
+                <a:latin typeface="Proxima Nova"/>
+                <a:ea typeface="Proxima Nova"/>
+                <a:cs typeface="Proxima Nova"/>
+                <a:sym typeface="Proxima Nova"/>
+              </a:rPr>
+              <a:t>parametrização de métodos</a:t>
+            </a:r>
+            <a:r>
+              <a:rPr lang="pt-BR">
+                <a:solidFill>
+                  <a:schemeClr val="dk1"/>
+                </a:solidFill>
+                <a:latin typeface="Proxima Nova"/>
+                <a:ea typeface="Proxima Nova"/>
+                <a:cs typeface="Proxima Nova"/>
+                <a:sym typeface="Proxima Nova"/>
+              </a:rPr>
+              <a:t> e seus </a:t>
+            </a:r>
+            <a:r>
+              <a:rPr b="1" lang="pt-BR">
+                <a:solidFill>
+                  <a:schemeClr val="dk1"/>
+                </a:solidFill>
+                <a:latin typeface="Proxima Nova"/>
+                <a:ea typeface="Proxima Nova"/>
+                <a:cs typeface="Proxima Nova"/>
+                <a:sym typeface="Proxima Nova"/>
+              </a:rPr>
+              <a:t>relacionamentos</a:t>
+            </a:r>
+            <a:r>
+              <a:rPr lang="pt-BR">
+                <a:solidFill>
+                  <a:schemeClr val="dk1"/>
+                </a:solidFill>
+                <a:latin typeface="Proxima Nova"/>
+                <a:ea typeface="Proxima Nova"/>
+                <a:cs typeface="Proxima Nova"/>
+                <a:sym typeface="Proxima Nova"/>
+              </a:rPr>
+              <a:t>;</a:t>
+            </a:r>
+            <a:endParaRPr>
+              <a:solidFill>
+                <a:schemeClr val="dk1"/>
+              </a:solidFill>
+              <a:latin typeface="Proxima Nova"/>
+              <a:ea typeface="Proxima Nova"/>
+              <a:cs typeface="Proxima Nova"/>
+              <a:sym typeface="Proxima Nova"/>
+            </a:endParaRPr>
+          </a:p>
+          <a:p>
+            <a:pPr indent="-342900" lvl="0" marL="457200" rtl="0" algn="just">
+              <a:spcBef>
+                <a:spcPts val="0"/>
+              </a:spcBef>
+              <a:spcAft>
+                <a:spcPts val="0"/>
+              </a:spcAft>
+              <a:buClr>
+                <a:schemeClr val="dk1"/>
+              </a:buClr>
+              <a:buSzPts val="1800"/>
+              <a:buFont typeface="Proxima Nova"/>
+              <a:buAutoNum type="arabicPeriod"/>
+            </a:pPr>
+            <a:r>
+              <a:rPr lang="pt-BR">
+                <a:solidFill>
+                  <a:schemeClr val="dk1"/>
+                </a:solidFill>
+                <a:latin typeface="Proxima Nova"/>
+                <a:ea typeface="Proxima Nova"/>
+                <a:cs typeface="Proxima Nova"/>
+                <a:sym typeface="Proxima Nova"/>
+              </a:rPr>
+              <a:t>Utilizar </a:t>
+            </a:r>
+            <a:r>
+              <a:rPr b="1" lang="pt-BR">
+                <a:solidFill>
+                  <a:schemeClr val="dk1"/>
+                </a:solidFill>
+                <a:latin typeface="Proxima Nova"/>
+                <a:ea typeface="Proxima Nova"/>
+                <a:cs typeface="Proxima Nova"/>
+                <a:sym typeface="Proxima Nova"/>
+              </a:rPr>
+              <a:t>GraphRAG + LLM</a:t>
+            </a:r>
+            <a:r>
+              <a:rPr lang="pt-BR">
+                <a:solidFill>
+                  <a:schemeClr val="dk1"/>
+                </a:solidFill>
+                <a:latin typeface="Proxima Nova"/>
+                <a:ea typeface="Proxima Nova"/>
+                <a:cs typeface="Proxima Nova"/>
+                <a:sym typeface="Proxima Nova"/>
+              </a:rPr>
+              <a:t> para esclarecimentos e geração de </a:t>
+            </a:r>
+            <a:r>
+              <a:rPr b="1" lang="pt-BR">
+                <a:solidFill>
+                  <a:schemeClr val="dk1"/>
+                </a:solidFill>
+                <a:latin typeface="Proxima Nova"/>
+                <a:ea typeface="Proxima Nova"/>
+                <a:cs typeface="Proxima Nova"/>
+                <a:sym typeface="Proxima Nova"/>
+              </a:rPr>
+              <a:t>informações agregadas</a:t>
+            </a:r>
+            <a:r>
+              <a:rPr lang="pt-BR">
+                <a:solidFill>
+                  <a:schemeClr val="dk1"/>
+                </a:solidFill>
+                <a:latin typeface="Proxima Nova"/>
+                <a:ea typeface="Proxima Nova"/>
+                <a:cs typeface="Proxima Nova"/>
+                <a:sym typeface="Proxima Nova"/>
+              </a:rPr>
+              <a:t> sobre o tema.</a:t>
+            </a:r>
+            <a:endParaRPr>
+              <a:solidFill>
+                <a:schemeClr val="dk1"/>
+              </a:solidFill>
+              <a:latin typeface="Proxima Nova"/>
+              <a:ea typeface="Proxima Nova"/>
+              <a:cs typeface="Proxima Nova"/>
+              <a:sym typeface="Proxima Nova"/>
+            </a:endParaRPr>
+          </a:p>
+          <a:p>
+            <a:pPr indent="0" lvl="0" marL="0" rtl="0" algn="just">
+              <a:spcBef>
+                <a:spcPts val="1200"/>
+              </a:spcBef>
+              <a:spcAft>
+                <a:spcPts val="0"/>
+              </a:spcAft>
+              <a:buNone/>
+            </a:pPr>
+            <a:r>
+              <a:t/>
+            </a:r>
+            <a:endParaRPr>
+              <a:solidFill>
+                <a:schemeClr val="dk1"/>
+              </a:solidFill>
+              <a:latin typeface="Proxima Nova"/>
+              <a:ea typeface="Proxima Nova"/>
+              <a:cs typeface="Proxima Nova"/>
+              <a:sym typeface="Proxima Nova"/>
+            </a:endParaRPr>
+          </a:p>
+          <a:p>
+            <a:pPr indent="-317500" lvl="0" marL="457200" rtl="0" algn="just">
+              <a:spcBef>
+                <a:spcPts val="1200"/>
+              </a:spcBef>
+              <a:spcAft>
+                <a:spcPts val="0"/>
+              </a:spcAft>
+              <a:buClr>
+                <a:schemeClr val="dk1"/>
+              </a:buClr>
+              <a:buSzPts val="1400"/>
+              <a:buFont typeface="Proxima Nova"/>
+              <a:buChar char="●"/>
+            </a:pPr>
+            <a:r>
+              <a:rPr i="1" lang="pt-BR" sz="1400">
+                <a:solidFill>
+                  <a:schemeClr val="dk1"/>
+                </a:solidFill>
+                <a:latin typeface="Proxima Nova"/>
+                <a:ea typeface="Proxima Nova"/>
+                <a:cs typeface="Proxima Nova"/>
+                <a:sym typeface="Proxima Nova"/>
+              </a:rPr>
+              <a:t>Avaliar aplicabilidade de métodos de FT em natureza de dados e tarefa específicas.</a:t>
+            </a:r>
+            <a:endParaRPr i="1" sz="1400">
+              <a:solidFill>
+                <a:schemeClr val="dk1"/>
               </a:solidFill>
               <a:latin typeface="Proxima Nova"/>
               <a:ea typeface="Proxima Nova"/>
@@ -7256,7 +7742,7 @@
         <p:spPr>
           <a:xfrm>
             <a:off x="311700" y="1152475"/>
-            <a:ext cx="8520600" cy="3416400"/>
+            <a:ext cx="4260300" cy="3416400"/>
           </a:xfrm>
           <a:prstGeom prst="rect">
             <a:avLst/>
@@ -7276,27 +7762,358 @@
                 <a:spcPts val="0"/>
               </a:spcAft>
               <a:buClr>
-                <a:srgbClr val="FF0000"/>
+                <a:schemeClr val="dk1"/>
               </a:buClr>
               <a:buSzPts val="1800"/>
               <a:buFont typeface="Proxima Nova"/>
-              <a:buChar char="-"/>
+              <a:buChar char="●"/>
             </a:pPr>
             <a:r>
-              <a:rPr i="1" lang="pt-BR">
-                <a:solidFill>
-                  <a:srgbClr val="FF0000"/>
+              <a:rPr lang="pt-BR">
+                <a:solidFill>
+                  <a:schemeClr val="dk1"/>
                 </a:solidFill>
                 <a:latin typeface="Proxima Nova"/>
                 <a:ea typeface="Proxima Nova"/>
                 <a:cs typeface="Proxima Nova"/>
                 <a:sym typeface="Proxima Nova"/>
               </a:rPr>
-              <a:t>Apresentar resultados gerados, insights em geral</a:t>
+              <a:t>Acervo com 12 documentos (artigos e sites);</a:t>
             </a:r>
-            <a:endParaRPr i="1">
+            <a:endParaRPr>
               <a:solidFill>
-                <a:srgbClr val="FF0000"/>
+                <a:schemeClr val="dk1"/>
+              </a:solidFill>
+              <a:latin typeface="Proxima Nova"/>
+              <a:ea typeface="Proxima Nova"/>
+              <a:cs typeface="Proxima Nova"/>
+              <a:sym typeface="Proxima Nova"/>
+            </a:endParaRPr>
+          </a:p>
+          <a:p>
+            <a:pPr indent="-342900" lvl="0" marL="457200" rtl="0" algn="l">
+              <a:spcBef>
+                <a:spcPts val="0"/>
+              </a:spcBef>
+              <a:spcAft>
+                <a:spcPts val="0"/>
+              </a:spcAft>
+              <a:buClr>
+                <a:schemeClr val="dk1"/>
+              </a:buClr>
+              <a:buSzPts val="1800"/>
+              <a:buFont typeface="Proxima Nova"/>
+              <a:buChar char="●"/>
+            </a:pPr>
+            <a:r>
+              <a:rPr lang="pt-BR">
+                <a:solidFill>
+                  <a:schemeClr val="dk1"/>
+                </a:solidFill>
+                <a:latin typeface="Proxima Nova"/>
+                <a:ea typeface="Proxima Nova"/>
+                <a:cs typeface="Proxima Nova"/>
+                <a:sym typeface="Proxima Nova"/>
+              </a:rPr>
+              <a:t>3k+ entidades;</a:t>
+            </a:r>
+            <a:endParaRPr>
+              <a:solidFill>
+                <a:schemeClr val="dk1"/>
+              </a:solidFill>
+              <a:latin typeface="Proxima Nova"/>
+              <a:ea typeface="Proxima Nova"/>
+              <a:cs typeface="Proxima Nova"/>
+              <a:sym typeface="Proxima Nova"/>
+            </a:endParaRPr>
+          </a:p>
+          <a:p>
+            <a:pPr indent="-342900" lvl="0" marL="457200" rtl="0" algn="l">
+              <a:spcBef>
+                <a:spcPts val="0"/>
+              </a:spcBef>
+              <a:spcAft>
+                <a:spcPts val="0"/>
+              </a:spcAft>
+              <a:buClr>
+                <a:schemeClr val="dk1"/>
+              </a:buClr>
+              <a:buSzPts val="1800"/>
+              <a:buFont typeface="Proxima Nova"/>
+              <a:buChar char="●"/>
+            </a:pPr>
+            <a:r>
+              <a:rPr lang="pt-BR">
+                <a:solidFill>
+                  <a:schemeClr val="dk1"/>
+                </a:solidFill>
+                <a:latin typeface="Proxima Nova"/>
+                <a:ea typeface="Proxima Nova"/>
+                <a:cs typeface="Proxima Nova"/>
+                <a:sym typeface="Proxima Nova"/>
+              </a:rPr>
+              <a:t>4k+ relacionamentos;</a:t>
+            </a:r>
+            <a:endParaRPr>
+              <a:solidFill>
+                <a:schemeClr val="dk1"/>
+              </a:solidFill>
+              <a:latin typeface="Proxima Nova"/>
+              <a:ea typeface="Proxima Nova"/>
+              <a:cs typeface="Proxima Nova"/>
+              <a:sym typeface="Proxima Nova"/>
+            </a:endParaRPr>
+          </a:p>
+          <a:p>
+            <a:pPr indent="-342900" lvl="0" marL="457200" rtl="0" algn="l">
+              <a:spcBef>
+                <a:spcPts val="0"/>
+              </a:spcBef>
+              <a:spcAft>
+                <a:spcPts val="0"/>
+              </a:spcAft>
+              <a:buClr>
+                <a:schemeClr val="dk1"/>
+              </a:buClr>
+              <a:buSzPts val="1800"/>
+              <a:buFont typeface="Proxima Nova"/>
+              <a:buChar char="●"/>
+            </a:pPr>
+            <a:r>
+              <a:rPr lang="pt-BR">
+                <a:solidFill>
+                  <a:schemeClr val="dk1"/>
+                </a:solidFill>
+                <a:latin typeface="Proxima Nova"/>
+                <a:ea typeface="Proxima Nova"/>
+                <a:cs typeface="Proxima Nova"/>
+                <a:sym typeface="Proxima Nova"/>
+              </a:rPr>
+              <a:t>Principais entidades extraída: LoRA, QLoRA, PEFT etc;</a:t>
+            </a:r>
+            <a:endParaRPr>
+              <a:solidFill>
+                <a:schemeClr val="dk1"/>
+              </a:solidFill>
+              <a:latin typeface="Proxima Nova"/>
+              <a:ea typeface="Proxima Nova"/>
+              <a:cs typeface="Proxima Nova"/>
+              <a:sym typeface="Proxima Nova"/>
+            </a:endParaRPr>
+          </a:p>
+        </p:txBody>
+      </p:sp>
+      <p:pic>
+        <p:nvPicPr>
+          <p:cNvPr id="89" name="Google Shape;89;p16"/>
+          <p:cNvPicPr preferRelativeResize="0"/>
+          <p:nvPr/>
+        </p:nvPicPr>
+        <p:blipFill rotWithShape="1">
+          <a:blip r:embed="rId3">
+            <a:alphaModFix/>
+          </a:blip>
+          <a:srcRect b="0" l="30405" r="21697" t="12603"/>
+          <a:stretch/>
+        </p:blipFill>
+        <p:spPr>
+          <a:xfrm>
+            <a:off x="4917355" y="1152475"/>
+            <a:ext cx="3914944" cy="3416400"/>
+          </a:xfrm>
+          <a:prstGeom prst="rect">
+            <a:avLst/>
+          </a:prstGeom>
+          <a:noFill/>
+          <a:ln>
+            <a:noFill/>
+          </a:ln>
+        </p:spPr>
+      </p:pic>
+    </p:spTree>
+  </p:cSld>
+  <p:clrMapOvr>
+    <a:masterClrMapping/>
+  </p:clrMapOvr>
+</p:sld>
+</file>
+
+<file path=ppt/slides/slide5.xml><?xml version="1.0" encoding="utf-8"?>
+<p:sld xmlns:a="http://schemas.openxmlformats.org/drawingml/2006/main" xmlns:r="http://schemas.openxmlformats.org/officeDocument/2006/relationships" xmlns:mc="http://schemas.openxmlformats.org/markup-compatibility/2006" xmlns:mv="urn:schemas-microsoft-com:mac:vml" xmlns:p="http://schemas.openxmlformats.org/presentationml/2006/main" xmlns:c="http://schemas.openxmlformats.org/drawingml/2006/chart" xmlns:dgm="http://schemas.openxmlformats.org/drawingml/2006/diagram" xmlns:o="urn:schemas-microsoft-com:office:office" xmlns:v="urn:schemas-microsoft-com:vml" xmlns:pvml="urn:schemas-microsoft-com:office:powerpoint" xmlns:com="http://schemas.openxmlformats.org/drawingml/2006/compatibility" xmlns:p14="http://schemas.microsoft.com/office/powerpoint/2010/main" xmlns:p15="http://schemas.microsoft.com/office/powerpoint/2012/main" xmlns:ahyp="http://schemas.microsoft.com/office/drawing/2018/hyperlinkcolor">
+  <p:cSld>
+    <p:spTree>
+      <p:nvGrpSpPr>
+        <p:cNvPr id="93" name="Shape 93"/>
+        <p:cNvGrpSpPr/>
+        <p:nvPr/>
+      </p:nvGrpSpPr>
+      <p:grpSpPr>
+        <a:xfrm>
+          <a:off x="0" y="0"/>
+          <a:ext cx="0" cy="0"/>
+          <a:chOff x="0" y="0"/>
+          <a:chExt cx="0" cy="0"/>
+        </a:xfrm>
+      </p:grpSpPr>
+      <p:sp>
+        <p:nvSpPr>
+          <p:cNvPr id="94" name="Google Shape;94;p17"/>
+          <p:cNvSpPr txBox="1"/>
+          <p:nvPr>
+            <p:ph type="title"/>
+          </p:nvPr>
+        </p:nvSpPr>
+        <p:spPr>
+          <a:xfrm>
+            <a:off x="311700" y="445025"/>
+            <a:ext cx="8520600" cy="572700"/>
+          </a:xfrm>
+          <a:prstGeom prst="rect">
+            <a:avLst/>
+          </a:prstGeom>
+        </p:spPr>
+        <p:txBody>
+          <a:bodyPr anchorCtr="0" anchor="t" bIns="91425" lIns="91425" spcFirstLastPara="1" rIns="91425" wrap="square" tIns="91425">
+            <a:normAutofit fontScale="90000"/>
+          </a:bodyPr>
+          <a:lstStyle/>
+          <a:p>
+            <a:pPr indent="0" lvl="0" marL="0" rtl="0" algn="l">
+              <a:spcBef>
+                <a:spcPts val="0"/>
+              </a:spcBef>
+              <a:spcAft>
+                <a:spcPts val="0"/>
+              </a:spcAft>
+              <a:buNone/>
+            </a:pPr>
+            <a:r>
+              <a:rPr lang="pt-BR"/>
+              <a:t>Considerações gerais</a:t>
+            </a:r>
+            <a:endParaRPr/>
+          </a:p>
+        </p:txBody>
+      </p:sp>
+      <p:pic>
+        <p:nvPicPr>
+          <p:cNvPr id="95" name="Google Shape;95;p17"/>
+          <p:cNvPicPr preferRelativeResize="0"/>
+          <p:nvPr/>
+        </p:nvPicPr>
+        <p:blipFill>
+          <a:blip r:embed="rId3">
+            <a:alphaModFix/>
+          </a:blip>
+          <a:stretch>
+            <a:fillRect/>
+          </a:stretch>
+        </p:blipFill>
+        <p:spPr>
+          <a:xfrm>
+            <a:off x="1292064" y="1017725"/>
+            <a:ext cx="6559874" cy="2890300"/>
+          </a:xfrm>
+          <a:prstGeom prst="rect">
+            <a:avLst/>
+          </a:prstGeom>
+          <a:noFill/>
+          <a:ln>
+            <a:noFill/>
+          </a:ln>
+        </p:spPr>
+      </p:pic>
+      <p:sp>
+        <p:nvSpPr>
+          <p:cNvPr id="96" name="Google Shape;96;p17"/>
+          <p:cNvSpPr txBox="1"/>
+          <p:nvPr/>
+        </p:nvSpPr>
+        <p:spPr>
+          <a:xfrm>
+            <a:off x="311700" y="4068500"/>
+            <a:ext cx="8520600" cy="646500"/>
+          </a:xfrm>
+          <a:prstGeom prst="rect">
+            <a:avLst/>
+          </a:prstGeom>
+          <a:noFill/>
+          <a:ln>
+            <a:noFill/>
+          </a:ln>
+        </p:spPr>
+        <p:txBody>
+          <a:bodyPr anchorCtr="0" anchor="t" bIns="91425" lIns="91425" spcFirstLastPara="1" rIns="91425" wrap="square" tIns="91425">
+            <a:spAutoFit/>
+          </a:bodyPr>
+          <a:lstStyle/>
+          <a:p>
+            <a:pPr indent="-323850" lvl="0" marL="457200" rtl="0" algn="l">
+              <a:spcBef>
+                <a:spcPts val="0"/>
+              </a:spcBef>
+              <a:spcAft>
+                <a:spcPts val="0"/>
+              </a:spcAft>
+              <a:buClr>
+                <a:schemeClr val="dk1"/>
+              </a:buClr>
+              <a:buSzPts val="1500"/>
+              <a:buFont typeface="Proxima Nova"/>
+              <a:buChar char="●"/>
+            </a:pPr>
+            <a:r>
+              <a:rPr lang="pt-BR" sz="1500">
+                <a:solidFill>
+                  <a:schemeClr val="dk1"/>
+                </a:solidFill>
+                <a:latin typeface="Proxima Nova"/>
+                <a:ea typeface="Proxima Nova"/>
+                <a:cs typeface="Proxima Nova"/>
+                <a:sym typeface="Proxima Nova"/>
+              </a:rPr>
+              <a:t>PEFT, LoRA, QLoRA e IA³ maior aderência para treinamento em geração de código;</a:t>
+            </a:r>
+            <a:endParaRPr sz="1500">
+              <a:solidFill>
+                <a:schemeClr val="dk1"/>
+              </a:solidFill>
+              <a:latin typeface="Proxima Nova"/>
+              <a:ea typeface="Proxima Nova"/>
+              <a:cs typeface="Proxima Nova"/>
+              <a:sym typeface="Proxima Nova"/>
+            </a:endParaRPr>
+          </a:p>
+          <a:p>
+            <a:pPr indent="-323850" lvl="0" marL="457200" rtl="0" algn="l">
+              <a:spcBef>
+                <a:spcPts val="0"/>
+              </a:spcBef>
+              <a:spcAft>
+                <a:spcPts val="0"/>
+              </a:spcAft>
+              <a:buClr>
+                <a:schemeClr val="dk1"/>
+              </a:buClr>
+              <a:buSzPts val="1500"/>
+              <a:buFont typeface="Proxima Nova"/>
+              <a:buChar char="●"/>
+            </a:pPr>
+            <a:r>
+              <a:rPr lang="pt-BR" sz="1500">
+                <a:solidFill>
+                  <a:schemeClr val="dk1"/>
+                </a:solidFill>
+                <a:latin typeface="Proxima Nova"/>
+                <a:ea typeface="Proxima Nova"/>
+                <a:cs typeface="Proxima Nova"/>
+                <a:sym typeface="Proxima Nova"/>
+              </a:rPr>
+              <a:t>Há métodos destinados a: segurança/privacidade, limitações de hardware, etc.</a:t>
+            </a:r>
+            <a:endParaRPr sz="1500">
+              <a:solidFill>
+                <a:schemeClr val="dk1"/>
               </a:solidFill>
               <a:latin typeface="Proxima Nova"/>
               <a:ea typeface="Proxima Nova"/>
@@ -7315,6 +8132,285 @@
 </file>
 
 <file path=ppt/theme/theme1.xml><?xml version="1.0" encoding="utf-8"?>
+<a:theme xmlns:a="http://schemas.openxmlformats.org/drawingml/2006/main" xmlns:r="http://schemas.openxmlformats.org/officeDocument/2006/relationships" name="Slate">
+  <a:themeElements>
+    <a:clrScheme name="Slate">
+      <a:dk1>
+        <a:srgbClr val="FFFFFF"/>
+      </a:dk1>
+      <a:lt1>
+        <a:srgbClr val="37474F"/>
+      </a:lt1>
+      <a:dk2>
+        <a:srgbClr val="9E9E9E"/>
+      </a:dk2>
+      <a:lt2>
+        <a:srgbClr val="E0E0E0"/>
+      </a:lt2>
+      <a:accent1>
+        <a:srgbClr val="616161"/>
+      </a:accent1>
+      <a:accent2>
+        <a:srgbClr val="78909C"/>
+      </a:accent2>
+      <a:accent3>
+        <a:srgbClr val="CACACA"/>
+      </a:accent3>
+      <a:accent4>
+        <a:srgbClr val="64FFDA"/>
+      </a:accent4>
+      <a:accent5>
+        <a:srgbClr val="FFD966"/>
+      </a:accent5>
+      <a:accent6>
+        <a:srgbClr val="F5F5F5"/>
+      </a:accent6>
+      <a:hlink>
+        <a:srgbClr val="FFD966"/>
+      </a:hlink>
+      <a:folHlink>
+        <a:srgbClr val="FFD966"/>
+      </a:folHlink>
+    </a:clrScheme>
+    <a:fontScheme name="Office">
+      <a:majorFont>
+        <a:latin typeface="Arial"/>
+        <a:ea typeface=""/>
+        <a:cs typeface=""/>
+        <a:font script="Jpan" typeface="ＭＳ Ｐゴシック"/>
+        <a:font script="Hang" typeface="맑은 고딕"/>
+        <a:font script="Hans" typeface="宋体"/>
+        <a:font script="Hant" typeface="新細明體"/>
+        <a:font script="Arab" typeface="Times New Roman"/>
+        <a:font script="Hebr" typeface="Times New Roman"/>
+        <a:font script="Thai" typeface="Angsana New"/>
+        <a:font script="Ethi" typeface="Nyala"/>
+        <a:font script="Beng" typeface="Vrinda"/>
+        <a:font script="Gujr" typeface="Shruti"/>
+        <a:font script="Khmr" typeface="MoolBoran"/>
+        <a:font script="Knda" typeface="Tunga"/>
+        <a:font script="Guru" typeface="Raavi"/>
+        <a:font script="Cans" typeface="Euphemia"/>
+        <a:font script="Cher" typeface="Plantagenet Cherokee"/>
+        <a:font script="Yiii" typeface="Microsoft Yi Baiti"/>
+        <a:font script="Tibt" typeface="Microsoft Himalaya"/>
+        <a:font script="Thaa" typeface="MV Boli"/>
+        <a:font script="Deva" typeface="Mangal"/>
+        <a:font script="Telu" typeface="Gautami"/>
+        <a:font script="Taml" typeface="Latha"/>
+        <a:font script="Syrc" typeface="Estrangelo Edessa"/>
+        <a:font script="Orya" typeface="Kalinga"/>
+        <a:font script="Mlym" typeface="Kartika"/>
+        <a:font script="Laoo" typeface="DokChampa"/>
+        <a:font script="Sinh" typeface="Iskoola Pota"/>
+        <a:font script="Mong" typeface="Mongolian Baiti"/>
+        <a:font script="Viet" typeface="Times New Roman"/>
+        <a:font script="Uigh" typeface="Microsoft Uighur"/>
+        <a:font script="Geor" typeface="Sylfaen"/>
+      </a:majorFont>
+      <a:minorFont>
+        <a:latin typeface="Arial"/>
+        <a:ea typeface=""/>
+        <a:cs typeface=""/>
+        <a:font script="Jpan" typeface="ＭＳ Ｐゴシック"/>
+        <a:font script="Hang" typeface="맑은 고딕"/>
+        <a:font script="Hans" typeface="宋体"/>
+        <a:font script="Hant" typeface="新細明體"/>
+        <a:font script="Arab" typeface="Arial"/>
+        <a:font script="Hebr" typeface="Arial"/>
+        <a:font script="Thai" typeface="Cordia New"/>
+        <a:font script="Ethi" typeface="Nyala"/>
+        <a:font script="Beng" typeface="Vrinda"/>
+        <a:font script="Gujr" typeface="Shruti"/>
+        <a:font script="Khmr" typeface="DaunPenh"/>
+        <a:font script="Knda" typeface="Tunga"/>
+        <a:font script="Guru" typeface="Raavi"/>
+        <a:font script="Cans" typeface="Euphemia"/>
+        <a:font script="Cher" typeface="Plantagenet Cherokee"/>
+        <a:font script="Yiii" typeface="Microsoft Yi Baiti"/>
+        <a:font script="Tibt" typeface="Microsoft Himalaya"/>
+        <a:font script="Thaa" typeface="MV Boli"/>
+        <a:font script="Deva" typeface="Mangal"/>
+        <a:font script="Telu" typeface="Gautami"/>
+        <a:font script="Taml" typeface="Latha"/>
+        <a:font script="Syrc" typeface="Estrangelo Edessa"/>
+        <a:font script="Orya" typeface="Kalinga"/>
+        <a:font script="Mlym" typeface="Kartika"/>
+        <a:font script="Laoo" typeface="DokChampa"/>
+        <a:font script="Sinh" typeface="Iskoola Pota"/>
+        <a:font script="Mong" typeface="Mongolian Baiti"/>
+        <a:font script="Viet" typeface="Arial"/>
+        <a:font script="Uigh" typeface="Microsoft Uighur"/>
+        <a:font script="Geor" typeface="Sylfaen"/>
+      </a:minorFont>
+    </a:fontScheme>
+    <a:fmtScheme name="Office">
+      <a:fillStyleLst>
+        <a:solidFill>
+          <a:schemeClr val="phClr"/>
+        </a:solidFill>
+        <a:gradFill rotWithShape="1">
+          <a:gsLst>
+            <a:gs pos="0">
+              <a:schemeClr val="phClr">
+                <a:tint val="50000"/>
+                <a:satMod val="300000"/>
+              </a:schemeClr>
+            </a:gs>
+            <a:gs pos="35000">
+              <a:schemeClr val="phClr">
+                <a:tint val="37000"/>
+                <a:satMod val="300000"/>
+              </a:schemeClr>
+            </a:gs>
+            <a:gs pos="100000">
+              <a:schemeClr val="phClr">
+                <a:tint val="15000"/>
+                <a:satMod val="350000"/>
+              </a:schemeClr>
+            </a:gs>
+          </a:gsLst>
+          <a:lin ang="16200000" scaled="1"/>
+        </a:gradFill>
+        <a:gradFill rotWithShape="1">
+          <a:gsLst>
+            <a:gs pos="0">
+              <a:schemeClr val="phClr">
+                <a:tint val="100000"/>
+                <a:shade val="100000"/>
+                <a:satMod val="130000"/>
+              </a:schemeClr>
+            </a:gs>
+            <a:gs pos="100000">
+              <a:schemeClr val="phClr">
+                <a:tint val="50000"/>
+                <a:shade val="100000"/>
+                <a:satMod val="350000"/>
+              </a:schemeClr>
+            </a:gs>
+          </a:gsLst>
+          <a:lin ang="16200000" scaled="0"/>
+        </a:gradFill>
+      </a:fillStyleLst>
+      <a:lnStyleLst>
+        <a:ln w="9525" cap="flat" cmpd="sng" algn="ctr">
+          <a:solidFill>
+            <a:schemeClr val="phClr">
+              <a:shade val="95000"/>
+              <a:satMod val="105000"/>
+            </a:schemeClr>
+          </a:solidFill>
+          <a:prstDash val="solid"/>
+        </a:ln>
+        <a:ln w="25400" cap="flat" cmpd="sng" algn="ctr">
+          <a:solidFill>
+            <a:schemeClr val="phClr"/>
+          </a:solidFill>
+          <a:prstDash val="solid"/>
+        </a:ln>
+        <a:ln w="38100" cap="flat" cmpd="sng" algn="ctr">
+          <a:solidFill>
+            <a:schemeClr val="phClr"/>
+          </a:solidFill>
+          <a:prstDash val="solid"/>
+        </a:ln>
+      </a:lnStyleLst>
+      <a:effectStyleLst>
+        <a:effectStyle>
+          <a:effectLst>
+            <a:outerShdw blurRad="40000" dist="20000" dir="5400000" rotWithShape="0">
+              <a:srgbClr val="000000">
+                <a:alpha val="38000"/>
+              </a:srgbClr>
+            </a:outerShdw>
+          </a:effectLst>
+        </a:effectStyle>
+        <a:effectStyle>
+          <a:effectLst>
+            <a:outerShdw blurRad="40000" dist="23000" dir="5400000" rotWithShape="0">
+              <a:srgbClr val="000000">
+                <a:alpha val="35000"/>
+              </a:srgbClr>
+            </a:outerShdw>
+          </a:effectLst>
+        </a:effectStyle>
+        <a:effectStyle>
+          <a:effectLst>
+            <a:outerShdw blurRad="40000" dist="23000" dir="5400000" rotWithShape="0">
+              <a:srgbClr val="000000">
+                <a:alpha val="35000"/>
+              </a:srgbClr>
+            </a:outerShdw>
+          </a:effectLst>
+          <a:scene3d>
+            <a:camera prst="orthographicFront">
+              <a:rot lat="0" lon="0" rev="0"/>
+            </a:camera>
+            <a:lightRig rig="threePt" dir="t">
+              <a:rot lat="0" lon="0" rev="1200000"/>
+            </a:lightRig>
+          </a:scene3d>
+          <a:sp3d>
+            <a:bevelT w="63500" h="25400"/>
+          </a:sp3d>
+        </a:effectStyle>
+      </a:effectStyleLst>
+      <a:bgFillStyleLst>
+        <a:solidFill>
+          <a:schemeClr val="phClr"/>
+        </a:solidFill>
+        <a:gradFill rotWithShape="1">
+          <a:gsLst>
+            <a:gs pos="0">
+              <a:schemeClr val="phClr">
+                <a:tint val="40000"/>
+                <a:satMod val="350000"/>
+              </a:schemeClr>
+            </a:gs>
+            <a:gs pos="40000">
+              <a:schemeClr val="phClr">
+                <a:tint val="45000"/>
+                <a:shade val="99000"/>
+                <a:satMod val="350000"/>
+              </a:schemeClr>
+            </a:gs>
+            <a:gs pos="100000">
+              <a:schemeClr val="phClr">
+                <a:shade val="20000"/>
+                <a:satMod val="255000"/>
+              </a:schemeClr>
+            </a:gs>
+          </a:gsLst>
+          <a:path path="circle">
+            <a:fillToRect l="50000" t="-80000" r="50000" b="180000"/>
+          </a:path>
+        </a:gradFill>
+        <a:gradFill rotWithShape="1">
+          <a:gsLst>
+            <a:gs pos="0">
+              <a:schemeClr val="phClr">
+                <a:tint val="80000"/>
+                <a:satMod val="300000"/>
+              </a:schemeClr>
+            </a:gs>
+            <a:gs pos="100000">
+              <a:schemeClr val="phClr">
+                <a:shade val="30000"/>
+                <a:satMod val="200000"/>
+              </a:schemeClr>
+            </a:gs>
+          </a:gsLst>
+          <a:path path="circle">
+            <a:fillToRect l="50000" t="50000" r="50000" b="50000"/>
+          </a:path>
+        </a:gradFill>
+      </a:bgFillStyleLst>
+    </a:fmtScheme>
+  </a:themeElements>
+</a:theme>
+</file>
+
+<file path=ppt/theme/theme2.xml><?xml version="1.0" encoding="utf-8"?>
 <a:theme xmlns:a="http://schemas.openxmlformats.org/drawingml/2006/main" xmlns:r="http://schemas.openxmlformats.org/officeDocument/2006/relationships">
   <a:themeElements>
     <a:clrScheme name="Default">
@@ -7591,283 +8687,4 @@
     </a:fmtScheme>
   </a:themeElements>
 </a:theme>
-</file>
-
-<file path=ppt/theme/theme2.xml><?xml version="1.0" encoding="utf-8"?>
-<a:theme xmlns:a="http://schemas.openxmlformats.org/drawingml/2006/main" xmlns:r="http://schemas.openxmlformats.org/officeDocument/2006/relationships" name="Slate">
-  <a:themeElements>
-    <a:clrScheme name="Slate">
-      <a:dk1>
-        <a:srgbClr val="FFFFFF"/>
-      </a:dk1>
-      <a:lt1>
-        <a:srgbClr val="37474F"/>
-      </a:lt1>
-      <a:dk2>
-        <a:srgbClr val="9E9E9E"/>
-      </a:dk2>
-      <a:lt2>
-        <a:srgbClr val="E0E0E0"/>
-      </a:lt2>
-      <a:accent1>
-        <a:srgbClr val="616161"/>
-      </a:accent1>
-      <a:accent2>
-        <a:srgbClr val="78909C"/>
-      </a:accent2>
-      <a:accent3>
-        <a:srgbClr val="CACACA"/>
-      </a:accent3>
-      <a:accent4>
-        <a:srgbClr val="64FFDA"/>
-      </a:accent4>
-      <a:accent5>
-        <a:srgbClr val="FFD966"/>
-      </a:accent5>
-      <a:accent6>
-        <a:srgbClr val="F5F5F5"/>
-      </a:accent6>
-      <a:hlink>
-        <a:srgbClr val="FFD966"/>
-      </a:hlink>
-      <a:folHlink>
-        <a:srgbClr val="FFD966"/>
-      </a:folHlink>
-    </a:clrScheme>
-    <a:fontScheme name="Office">
-      <a:majorFont>
-        <a:latin typeface="Arial"/>
-        <a:ea typeface=""/>
-        <a:cs typeface=""/>
-        <a:font script="Jpan" typeface="ＭＳ Ｐゴシック"/>
-        <a:font script="Hang" typeface="맑은 고딕"/>
-        <a:font script="Hans" typeface="宋体"/>
-        <a:font script="Hant" typeface="新細明體"/>
-        <a:font script="Arab" typeface="Times New Roman"/>
-        <a:font script="Hebr" typeface="Times New Roman"/>
-        <a:font script="Thai" typeface="Angsana New"/>
-        <a:font script="Ethi" typeface="Nyala"/>
-        <a:font script="Beng" typeface="Vrinda"/>
-        <a:font script="Gujr" typeface="Shruti"/>
-        <a:font script="Khmr" typeface="MoolBoran"/>
-        <a:font script="Knda" typeface="Tunga"/>
-        <a:font script="Guru" typeface="Raavi"/>
-        <a:font script="Cans" typeface="Euphemia"/>
-        <a:font script="Cher" typeface="Plantagenet Cherokee"/>
-        <a:font script="Yiii" typeface="Microsoft Yi Baiti"/>
-        <a:font script="Tibt" typeface="Microsoft Himalaya"/>
-        <a:font script="Thaa" typeface="MV Boli"/>
-        <a:font script="Deva" typeface="Mangal"/>
-        <a:font script="Telu" typeface="Gautami"/>
-        <a:font script="Taml" typeface="Latha"/>
-        <a:font script="Syrc" typeface="Estrangelo Edessa"/>
-        <a:font script="Orya" typeface="Kalinga"/>
-        <a:font script="Mlym" typeface="Kartika"/>
-        <a:font script="Laoo" typeface="DokChampa"/>
-        <a:font script="Sinh" typeface="Iskoola Pota"/>
-        <a:font script="Mong" typeface="Mongolian Baiti"/>
-        <a:font script="Viet" typeface="Times New Roman"/>
-        <a:font script="Uigh" typeface="Microsoft Uighur"/>
-        <a:font script="Geor" typeface="Sylfaen"/>
-      </a:majorFont>
-      <a:minorFont>
-        <a:latin typeface="Arial"/>
-        <a:ea typeface=""/>
-        <a:cs typeface=""/>
-        <a:font script="Jpan" typeface="ＭＳ Ｐゴシック"/>
-        <a:font script="Hang" typeface="맑은 고딕"/>
-        <a:font script="Hans" typeface="宋体"/>
-        <a:font script="Hant" typeface="新細明體"/>
-        <a:font script="Arab" typeface="Arial"/>
-        <a:font script="Hebr" typeface="Arial"/>
-        <a:font script="Thai" typeface="Cordia New"/>
-        <a:font script="Ethi" typeface="Nyala"/>
-        <a:font script="Beng" typeface="Vrinda"/>
-        <a:font script="Gujr" typeface="Shruti"/>
-        <a:font script="Khmr" typeface="DaunPenh"/>
-        <a:font script="Knda" typeface="Tunga"/>
-        <a:font script="Guru" typeface="Raavi"/>
-        <a:font script="Cans" typeface="Euphemia"/>
-        <a:font script="Cher" typeface="Plantagenet Cherokee"/>
-        <a:font script="Yiii" typeface="Microsoft Yi Baiti"/>
-        <a:font script="Tibt" typeface="Microsoft Himalaya"/>
-        <a:font script="Thaa" typeface="MV Boli"/>
-        <a:font script="Deva" typeface="Mangal"/>
-        <a:font script="Telu" typeface="Gautami"/>
-        <a:font script="Taml" typeface="Latha"/>
-        <a:font script="Syrc" typeface="Estrangelo Edessa"/>
-        <a:font script="Orya" typeface="Kalinga"/>
-        <a:font script="Mlym" typeface="Kartika"/>
-        <a:font script="Laoo" typeface="DokChampa"/>
-        <a:font script="Sinh" typeface="Iskoola Pota"/>
-        <a:font script="Mong" typeface="Mongolian Baiti"/>
-        <a:font script="Viet" typeface="Arial"/>
-        <a:font script="Uigh" typeface="Microsoft Uighur"/>
-        <a:font script="Geor" typeface="Sylfaen"/>
-      </a:minorFont>
-    </a:fontScheme>
-    <a:fmtScheme name="Office">
-      <a:fillStyleLst>
-        <a:solidFill>
-          <a:schemeClr val="phClr"/>
-        </a:solidFill>
-        <a:gradFill rotWithShape="1">
-          <a:gsLst>
-            <a:gs pos="0">
-              <a:schemeClr val="phClr">
-                <a:tint val="50000"/>
-                <a:satMod val="300000"/>
-              </a:schemeClr>
-            </a:gs>
-            <a:gs pos="35000">
-              <a:schemeClr val="phClr">
-                <a:tint val="37000"/>
-                <a:satMod val="300000"/>
-              </a:schemeClr>
-            </a:gs>
-            <a:gs pos="100000">
-              <a:schemeClr val="phClr">
-                <a:tint val="15000"/>
-                <a:satMod val="350000"/>
-              </a:schemeClr>
-            </a:gs>
-          </a:gsLst>
-          <a:lin ang="16200000" scaled="1"/>
-        </a:gradFill>
-        <a:gradFill rotWithShape="1">
-          <a:gsLst>
-            <a:gs pos="0">
-              <a:schemeClr val="phClr">
-                <a:tint val="100000"/>
-                <a:shade val="100000"/>
-                <a:satMod val="130000"/>
-              </a:schemeClr>
-            </a:gs>
-            <a:gs pos="100000">
-              <a:schemeClr val="phClr">
-                <a:tint val="50000"/>
-                <a:shade val="100000"/>
-                <a:satMod val="350000"/>
-              </a:schemeClr>
-            </a:gs>
-          </a:gsLst>
-          <a:lin ang="16200000" scaled="0"/>
-        </a:gradFill>
-      </a:fillStyleLst>
-      <a:lnStyleLst>
-        <a:ln w="9525" cap="flat" cmpd="sng" algn="ctr">
-          <a:solidFill>
-            <a:schemeClr val="phClr">
-              <a:shade val="95000"/>
-              <a:satMod val="105000"/>
-            </a:schemeClr>
-          </a:solidFill>
-          <a:prstDash val="solid"/>
-        </a:ln>
-        <a:ln w="25400" cap="flat" cmpd="sng" algn="ctr">
-          <a:solidFill>
-            <a:schemeClr val="phClr"/>
-          </a:solidFill>
-          <a:prstDash val="solid"/>
-        </a:ln>
-        <a:ln w="38100" cap="flat" cmpd="sng" algn="ctr">
-          <a:solidFill>
-            <a:schemeClr val="phClr"/>
-          </a:solidFill>
-          <a:prstDash val="solid"/>
-        </a:ln>
-      </a:lnStyleLst>
-      <a:effectStyleLst>
-        <a:effectStyle>
-          <a:effectLst>
-            <a:outerShdw blurRad="40000" dist="20000" dir="5400000" rotWithShape="0">
-              <a:srgbClr val="000000">
-                <a:alpha val="38000"/>
-              </a:srgbClr>
-            </a:outerShdw>
-          </a:effectLst>
-        </a:effectStyle>
-        <a:effectStyle>
-          <a:effectLst>
-            <a:outerShdw blurRad="40000" dist="23000" dir="5400000" rotWithShape="0">
-              <a:srgbClr val="000000">
-                <a:alpha val="35000"/>
-              </a:srgbClr>
-            </a:outerShdw>
-          </a:effectLst>
-        </a:effectStyle>
-        <a:effectStyle>
-          <a:effectLst>
-            <a:outerShdw blurRad="40000" dist="23000" dir="5400000" rotWithShape="0">
-              <a:srgbClr val="000000">
-                <a:alpha val="35000"/>
-              </a:srgbClr>
-            </a:outerShdw>
-          </a:effectLst>
-          <a:scene3d>
-            <a:camera prst="orthographicFront">
-              <a:rot lat="0" lon="0" rev="0"/>
-            </a:camera>
-            <a:lightRig rig="threePt" dir="t">
-              <a:rot lat="0" lon="0" rev="1200000"/>
-            </a:lightRig>
-          </a:scene3d>
-          <a:sp3d>
-            <a:bevelT w="63500" h="25400"/>
-          </a:sp3d>
-        </a:effectStyle>
-      </a:effectStyleLst>
-      <a:bgFillStyleLst>
-        <a:solidFill>
-          <a:schemeClr val="phClr"/>
-        </a:solidFill>
-        <a:gradFill rotWithShape="1">
-          <a:gsLst>
-            <a:gs pos="0">
-              <a:schemeClr val="phClr">
-                <a:tint val="40000"/>
-                <a:satMod val="350000"/>
-              </a:schemeClr>
-            </a:gs>
-            <a:gs pos="40000">
-              <a:schemeClr val="phClr">
-                <a:tint val="45000"/>
-                <a:shade val="99000"/>
-                <a:satMod val="350000"/>
-              </a:schemeClr>
-            </a:gs>
-            <a:gs pos="100000">
-              <a:schemeClr val="phClr">
-                <a:shade val="20000"/>
-                <a:satMod val="255000"/>
-              </a:schemeClr>
-            </a:gs>
-          </a:gsLst>
-          <a:path path="circle">
-            <a:fillToRect l="50000" t="-80000" r="50000" b="180000"/>
-          </a:path>
-        </a:gradFill>
-        <a:gradFill rotWithShape="1">
-          <a:gsLst>
-            <a:gs pos="0">
-              <a:schemeClr val="phClr">
-                <a:tint val="80000"/>
-                <a:satMod val="300000"/>
-              </a:schemeClr>
-            </a:gs>
-            <a:gs pos="100000">
-              <a:schemeClr val="phClr">
-                <a:shade val="30000"/>
-                <a:satMod val="200000"/>
-              </a:schemeClr>
-            </a:gs>
-          </a:gsLst>
-          <a:path path="circle">
-            <a:fillToRect l="50000" t="50000" r="50000" b="50000"/>
-          </a:path>
-        </a:gradFill>
-      </a:bgFillStyleLst>
-    </a:fmtScheme>
-  </a:themeElements>
-</a:theme>
 </file>
--- a/slides/apresentacao-t2p2.pptx
+++ b/slides/apresentacao-t2p2.pptx
@@ -13,25 +13,32 @@
     <p:sldId id="258" r:id="rId8"/>
     <p:sldId id="259" r:id="rId9"/>
     <p:sldId id="260" r:id="rId10"/>
+    <p:sldId id="261" r:id="rId11"/>
+    <p:sldId id="262" r:id="rId12"/>
+    <p:sldId id="263" r:id="rId13"/>
+    <p:sldId id="264" r:id="rId14"/>
+    <p:sldId id="265" r:id="rId15"/>
+    <p:sldId id="266" r:id="rId16"/>
+    <p:sldId id="267" r:id="rId17"/>
   </p:sldIdLst>
   <p:sldSz cy="5143500" cx="9144000"/>
   <p:notesSz cx="6858000" cy="9144000"/>
   <p:embeddedFontLst>
     <p:embeddedFont>
       <p:font typeface="Proxima Nova"/>
-      <p:regular r:id="rId11"/>
-      <p:bold r:id="rId12"/>
-      <p:italic r:id="rId13"/>
-      <p:boldItalic r:id="rId14"/>
+      <p:regular r:id="rId18"/>
+      <p:bold r:id="rId19"/>
+      <p:italic r:id="rId20"/>
+      <p:boldItalic r:id="rId21"/>
     </p:embeddedFont>
     <p:embeddedFont>
       <p:font typeface="Average"/>
-      <p:regular r:id="rId15"/>
+      <p:regular r:id="rId22"/>
     </p:embeddedFont>
     <p:embeddedFont>
       <p:font typeface="Oswald"/>
-      <p:regular r:id="rId16"/>
-      <p:bold r:id="rId17"/>
+      <p:regular r:id="rId23"/>
+      <p:bold r:id="rId24"/>
     </p:embeddedFont>
   </p:embeddedFontLst>
   <p:defaultTextStyle>
@@ -807,6 +814,303 @@
 </p:notes>
 </file>
 
+<file path=ppt/notesSlides/notesSlide10.xml><?xml version="1.0" encoding="utf-8"?>
+<p:notes xmlns:a="http://schemas.openxmlformats.org/drawingml/2006/main" xmlns:r="http://schemas.openxmlformats.org/officeDocument/2006/relationships" xmlns:mc="http://schemas.openxmlformats.org/markup-compatibility/2006" xmlns:mv="urn:schemas-microsoft-com:mac:vml" xmlns:p="http://schemas.openxmlformats.org/presentationml/2006/main" xmlns:c="http://schemas.openxmlformats.org/drawingml/2006/chart" xmlns:dgm="http://schemas.openxmlformats.org/drawingml/2006/diagram" xmlns:o="urn:schemas-microsoft-com:office:office" xmlns:v="urn:schemas-microsoft-com:vml" xmlns:pvml="urn:schemas-microsoft-com:office:powerpoint" xmlns:com="http://schemas.openxmlformats.org/drawingml/2006/compatibility" xmlns:p14="http://schemas.microsoft.com/office/powerpoint/2010/main" xmlns:p15="http://schemas.microsoft.com/office/powerpoint/2012/main" xmlns:ahyp="http://schemas.microsoft.com/office/drawing/2018/hyperlinkcolor" showMasterPhAnim="0" showMasterSp="0">
+  <p:cSld>
+    <p:spTree>
+      <p:nvGrpSpPr>
+        <p:cNvPr id="138" name="Shape 138"/>
+        <p:cNvGrpSpPr/>
+        <p:nvPr/>
+      </p:nvGrpSpPr>
+      <p:grpSpPr>
+        <a:xfrm>
+          <a:off x="0" y="0"/>
+          <a:ext cx="0" cy="0"/>
+          <a:chOff x="0" y="0"/>
+          <a:chExt cx="0" cy="0"/>
+        </a:xfrm>
+      </p:grpSpPr>
+      <p:sp>
+        <p:nvSpPr>
+          <p:cNvPr id="139" name="Google Shape;139;g3db0e77aa17_0_49:notes"/>
+          <p:cNvSpPr/>
+          <p:nvPr>
+            <p:ph idx="2" type="sldImg"/>
+          </p:nvPr>
+        </p:nvSpPr>
+        <p:spPr>
+          <a:xfrm>
+            <a:off x="381300" y="685800"/>
+            <a:ext cx="6096000" cy="3429000"/>
+          </a:xfrm>
+          <a:custGeom>
+            <a:rect b="b" l="l" r="r" t="t"/>
+            <a:pathLst>
+              <a:path extrusionOk="0" h="120000" w="120000">
+                <a:moveTo>
+                  <a:pt x="0" y="0"/>
+                </a:moveTo>
+                <a:lnTo>
+                  <a:pt x="120000" y="0"/>
+                </a:lnTo>
+                <a:lnTo>
+                  <a:pt x="120000" y="120000"/>
+                </a:lnTo>
+                <a:lnTo>
+                  <a:pt x="0" y="120000"/>
+                </a:lnTo>
+                <a:close/>
+              </a:path>
+            </a:pathLst>
+          </a:custGeom>
+        </p:spPr>
+      </p:sp>
+      <p:sp>
+        <p:nvSpPr>
+          <p:cNvPr id="140" name="Google Shape;140;g3db0e77aa17_0_49:notes"/>
+          <p:cNvSpPr txBox="1"/>
+          <p:nvPr>
+            <p:ph idx="1" type="body"/>
+          </p:nvPr>
+        </p:nvSpPr>
+        <p:spPr>
+          <a:xfrm>
+            <a:off x="685800" y="4343400"/>
+            <a:ext cx="5486400" cy="4114800"/>
+          </a:xfrm>
+          <a:prstGeom prst="rect">
+            <a:avLst/>
+          </a:prstGeom>
+        </p:spPr>
+        <p:txBody>
+          <a:bodyPr anchorCtr="0" anchor="t" bIns="91425" lIns="91425" spcFirstLastPara="1" rIns="91425" wrap="square" tIns="91425">
+            <a:noAutofit/>
+          </a:bodyPr>
+          <a:lstStyle/>
+          <a:p>
+            <a:pPr indent="0" lvl="0" marL="0" rtl="0" algn="l">
+              <a:spcBef>
+                <a:spcPts val="0"/>
+              </a:spcBef>
+              <a:spcAft>
+                <a:spcPts val="0"/>
+              </a:spcAft>
+              <a:buNone/>
+            </a:pPr>
+            <a:r>
+              <a:t/>
+            </a:r>
+            <a:endParaRPr/>
+          </a:p>
+        </p:txBody>
+      </p:sp>
+    </p:spTree>
+  </p:cSld>
+  <p:clrMapOvr>
+    <a:masterClrMapping/>
+  </p:clrMapOvr>
+</p:notes>
+</file>
+
+<file path=ppt/notesSlides/notesSlide11.xml><?xml version="1.0" encoding="utf-8"?>
+<p:notes xmlns:a="http://schemas.openxmlformats.org/drawingml/2006/main" xmlns:r="http://schemas.openxmlformats.org/officeDocument/2006/relationships" xmlns:mc="http://schemas.openxmlformats.org/markup-compatibility/2006" xmlns:mv="urn:schemas-microsoft-com:mac:vml" xmlns:p="http://schemas.openxmlformats.org/presentationml/2006/main" xmlns:c="http://schemas.openxmlformats.org/drawingml/2006/chart" xmlns:dgm="http://schemas.openxmlformats.org/drawingml/2006/diagram" xmlns:o="urn:schemas-microsoft-com:office:office" xmlns:v="urn:schemas-microsoft-com:vml" xmlns:pvml="urn:schemas-microsoft-com:office:powerpoint" xmlns:com="http://schemas.openxmlformats.org/drawingml/2006/compatibility" xmlns:p14="http://schemas.microsoft.com/office/powerpoint/2010/main" xmlns:p15="http://schemas.microsoft.com/office/powerpoint/2012/main" xmlns:ahyp="http://schemas.microsoft.com/office/drawing/2018/hyperlinkcolor" showMasterPhAnim="0" showMasterSp="0">
+  <p:cSld>
+    <p:spTree>
+      <p:nvGrpSpPr>
+        <p:cNvPr id="149" name="Shape 149"/>
+        <p:cNvGrpSpPr/>
+        <p:nvPr/>
+      </p:nvGrpSpPr>
+      <p:grpSpPr>
+        <a:xfrm>
+          <a:off x="0" y="0"/>
+          <a:ext cx="0" cy="0"/>
+          <a:chOff x="0" y="0"/>
+          <a:chExt cx="0" cy="0"/>
+        </a:xfrm>
+      </p:grpSpPr>
+      <p:sp>
+        <p:nvSpPr>
+          <p:cNvPr id="150" name="Google Shape;150;g3db0e77aa17_0_71:notes"/>
+          <p:cNvSpPr/>
+          <p:nvPr>
+            <p:ph idx="2" type="sldImg"/>
+          </p:nvPr>
+        </p:nvSpPr>
+        <p:spPr>
+          <a:xfrm>
+            <a:off x="381300" y="685800"/>
+            <a:ext cx="6096000" cy="3429000"/>
+          </a:xfrm>
+          <a:custGeom>
+            <a:rect b="b" l="l" r="r" t="t"/>
+            <a:pathLst>
+              <a:path extrusionOk="0" h="120000" w="120000">
+                <a:moveTo>
+                  <a:pt x="0" y="0"/>
+                </a:moveTo>
+                <a:lnTo>
+                  <a:pt x="120000" y="0"/>
+                </a:lnTo>
+                <a:lnTo>
+                  <a:pt x="120000" y="120000"/>
+                </a:lnTo>
+                <a:lnTo>
+                  <a:pt x="0" y="120000"/>
+                </a:lnTo>
+                <a:close/>
+              </a:path>
+            </a:pathLst>
+          </a:custGeom>
+        </p:spPr>
+      </p:sp>
+      <p:sp>
+        <p:nvSpPr>
+          <p:cNvPr id="151" name="Google Shape;151;g3db0e77aa17_0_71:notes"/>
+          <p:cNvSpPr txBox="1"/>
+          <p:nvPr>
+            <p:ph idx="1" type="body"/>
+          </p:nvPr>
+        </p:nvSpPr>
+        <p:spPr>
+          <a:xfrm>
+            <a:off x="685800" y="4343400"/>
+            <a:ext cx="5486400" cy="4114800"/>
+          </a:xfrm>
+          <a:prstGeom prst="rect">
+            <a:avLst/>
+          </a:prstGeom>
+        </p:spPr>
+        <p:txBody>
+          <a:bodyPr anchorCtr="0" anchor="t" bIns="91425" lIns="91425" spcFirstLastPara="1" rIns="91425" wrap="square" tIns="91425">
+            <a:noAutofit/>
+          </a:bodyPr>
+          <a:lstStyle/>
+          <a:p>
+            <a:pPr indent="0" lvl="0" marL="0" rtl="0" algn="l">
+              <a:spcBef>
+                <a:spcPts val="0"/>
+              </a:spcBef>
+              <a:spcAft>
+                <a:spcPts val="0"/>
+              </a:spcAft>
+              <a:buNone/>
+            </a:pPr>
+            <a:r>
+              <a:t/>
+            </a:r>
+            <a:endParaRPr/>
+          </a:p>
+        </p:txBody>
+      </p:sp>
+    </p:spTree>
+  </p:cSld>
+  <p:clrMapOvr>
+    <a:masterClrMapping/>
+  </p:clrMapOvr>
+</p:notes>
+</file>
+
+<file path=ppt/notesSlides/notesSlide12.xml><?xml version="1.0" encoding="utf-8"?>
+<p:notes xmlns:a="http://schemas.openxmlformats.org/drawingml/2006/main" xmlns:r="http://schemas.openxmlformats.org/officeDocument/2006/relationships" xmlns:mc="http://schemas.openxmlformats.org/markup-compatibility/2006" xmlns:mv="urn:schemas-microsoft-com:mac:vml" xmlns:p="http://schemas.openxmlformats.org/presentationml/2006/main" xmlns:c="http://schemas.openxmlformats.org/drawingml/2006/chart" xmlns:dgm="http://schemas.openxmlformats.org/drawingml/2006/diagram" xmlns:o="urn:schemas-microsoft-com:office:office" xmlns:v="urn:schemas-microsoft-com:vml" xmlns:pvml="urn:schemas-microsoft-com:office:powerpoint" xmlns:com="http://schemas.openxmlformats.org/drawingml/2006/compatibility" xmlns:p14="http://schemas.microsoft.com/office/powerpoint/2010/main" xmlns:p15="http://schemas.microsoft.com/office/powerpoint/2012/main" xmlns:ahyp="http://schemas.microsoft.com/office/drawing/2018/hyperlinkcolor" showMasterPhAnim="0" showMasterSp="0">
+  <p:cSld>
+    <p:spTree>
+      <p:nvGrpSpPr>
+        <p:cNvPr id="163" name="Shape 163"/>
+        <p:cNvGrpSpPr/>
+        <p:nvPr/>
+      </p:nvGrpSpPr>
+      <p:grpSpPr>
+        <a:xfrm>
+          <a:off x="0" y="0"/>
+          <a:ext cx="0" cy="0"/>
+          <a:chOff x="0" y="0"/>
+          <a:chExt cx="0" cy="0"/>
+        </a:xfrm>
+      </p:grpSpPr>
+      <p:sp>
+        <p:nvSpPr>
+          <p:cNvPr id="164" name="Google Shape;164;g3db0e77aa17_0_84:notes"/>
+          <p:cNvSpPr/>
+          <p:nvPr>
+            <p:ph idx="2" type="sldImg"/>
+          </p:nvPr>
+        </p:nvSpPr>
+        <p:spPr>
+          <a:xfrm>
+            <a:off x="381300" y="685800"/>
+            <a:ext cx="6096000" cy="3429000"/>
+          </a:xfrm>
+          <a:custGeom>
+            <a:rect b="b" l="l" r="r" t="t"/>
+            <a:pathLst>
+              <a:path extrusionOk="0" h="120000" w="120000">
+                <a:moveTo>
+                  <a:pt x="0" y="0"/>
+                </a:moveTo>
+                <a:lnTo>
+                  <a:pt x="120000" y="0"/>
+                </a:lnTo>
+                <a:lnTo>
+                  <a:pt x="120000" y="120000"/>
+                </a:lnTo>
+                <a:lnTo>
+                  <a:pt x="0" y="120000"/>
+                </a:lnTo>
+                <a:close/>
+              </a:path>
+            </a:pathLst>
+          </a:custGeom>
+        </p:spPr>
+      </p:sp>
+      <p:sp>
+        <p:nvSpPr>
+          <p:cNvPr id="165" name="Google Shape;165;g3db0e77aa17_0_84:notes"/>
+          <p:cNvSpPr txBox="1"/>
+          <p:nvPr>
+            <p:ph idx="1" type="body"/>
+          </p:nvPr>
+        </p:nvSpPr>
+        <p:spPr>
+          <a:xfrm>
+            <a:off x="685800" y="4343400"/>
+            <a:ext cx="5486400" cy="4114800"/>
+          </a:xfrm>
+          <a:prstGeom prst="rect">
+            <a:avLst/>
+          </a:prstGeom>
+        </p:spPr>
+        <p:txBody>
+          <a:bodyPr anchorCtr="0" anchor="t" bIns="91425" lIns="91425" spcFirstLastPara="1" rIns="91425" wrap="square" tIns="91425">
+            <a:noAutofit/>
+          </a:bodyPr>
+          <a:lstStyle/>
+          <a:p>
+            <a:pPr indent="0" lvl="0" marL="0" rtl="0" algn="l">
+              <a:spcBef>
+                <a:spcPts val="0"/>
+              </a:spcBef>
+              <a:spcAft>
+                <a:spcPts val="0"/>
+              </a:spcAft>
+              <a:buNone/>
+            </a:pPr>
+            <a:r>
+              <a:t/>
+            </a:r>
+            <a:endParaRPr/>
+          </a:p>
+        </p:txBody>
+      </p:sp>
+    </p:spTree>
+  </p:cSld>
+  <p:clrMapOvr>
+    <a:masterClrMapping/>
+  </p:clrMapOvr>
+</p:notes>
+</file>
+
 <file path=ppt/notesSlides/notesSlide2.xml><?xml version="1.0" encoding="utf-8"?>
 <p:notes xmlns:a="http://schemas.openxmlformats.org/drawingml/2006/main" xmlns:r="http://schemas.openxmlformats.org/officeDocument/2006/relationships" xmlns:mc="http://schemas.openxmlformats.org/markup-compatibility/2006" xmlns:mv="urn:schemas-microsoft-com:mac:vml" xmlns:p="http://schemas.openxmlformats.org/presentationml/2006/main" xmlns:c="http://schemas.openxmlformats.org/drawingml/2006/chart" xmlns:dgm="http://schemas.openxmlformats.org/drawingml/2006/diagram" xmlns:o="urn:schemas-microsoft-com:office:office" xmlns:v="urn:schemas-microsoft-com:vml" xmlns:pvml="urn:schemas-microsoft-com:office:powerpoint" xmlns:com="http://schemas.openxmlformats.org/drawingml/2006/compatibility" xmlns:p14="http://schemas.microsoft.com/office/powerpoint/2010/main" xmlns:p15="http://schemas.microsoft.com/office/powerpoint/2012/main" xmlns:ahyp="http://schemas.microsoft.com/office/drawing/2018/hyperlinkcolor" showMasterPhAnim="0" showMasterSp="0">
   <p:cSld>
@@ -911,7 +1215,7 @@
   <p:cSld>
     <p:spTree>
       <p:nvGrpSpPr>
-        <p:cNvPr id="77" name="Shape 77"/>
+        <p:cNvPr id="80" name="Shape 80"/>
         <p:cNvGrpSpPr/>
         <p:nvPr/>
       </p:nvGrpSpPr>
@@ -925,7 +1229,7 @@
       </p:grpSpPr>
       <p:sp>
         <p:nvSpPr>
-          <p:cNvPr id="78" name="Google Shape;78;g39a4272a991_0_67:notes"/>
+          <p:cNvPr id="81" name="Google Shape;81;g39a4272a991_0_67:notes"/>
           <p:cNvSpPr/>
           <p:nvPr>
             <p:ph idx="2" type="sldImg"/>
@@ -960,7 +1264,7 @@
       </p:sp>
       <p:sp>
         <p:nvSpPr>
-          <p:cNvPr id="79" name="Google Shape;79;g39a4272a991_0_67:notes"/>
+          <p:cNvPr id="82" name="Google Shape;82;g39a4272a991_0_67:notes"/>
           <p:cNvSpPr txBox="1"/>
           <p:nvPr>
             <p:ph idx="1" type="body"/>
@@ -1010,7 +1314,7 @@
   <p:cSld>
     <p:spTree>
       <p:nvGrpSpPr>
-        <p:cNvPr id="83" name="Shape 83"/>
+        <p:cNvPr id="86" name="Shape 86"/>
         <p:cNvGrpSpPr/>
         <p:nvPr/>
       </p:nvGrpSpPr>
@@ -1024,7 +1328,7 @@
       </p:grpSpPr>
       <p:sp>
         <p:nvSpPr>
-          <p:cNvPr id="84" name="Google Shape;84;g39a4272a991_0_72:notes"/>
+          <p:cNvPr id="87" name="Google Shape;87;g39a4272a991_0_72:notes"/>
           <p:cNvSpPr/>
           <p:nvPr>
             <p:ph idx="2" type="sldImg"/>
@@ -1059,7 +1363,7 @@
       </p:sp>
       <p:sp>
         <p:nvSpPr>
-          <p:cNvPr id="85" name="Google Shape;85;g39a4272a991_0_72:notes"/>
+          <p:cNvPr id="88" name="Google Shape;88;g39a4272a991_0_72:notes"/>
           <p:cNvSpPr txBox="1"/>
           <p:nvPr>
             <p:ph idx="1" type="body"/>
@@ -1109,7 +1413,7 @@
   <p:cSld>
     <p:spTree>
       <p:nvGrpSpPr>
-        <p:cNvPr id="90" name="Shape 90"/>
+        <p:cNvPr id="93" name="Shape 93"/>
         <p:cNvGrpSpPr/>
         <p:nvPr/>
       </p:nvGrpSpPr>
@@ -1123,7 +1427,7 @@
       </p:grpSpPr>
       <p:sp>
         <p:nvSpPr>
-          <p:cNvPr id="91" name="Google Shape;91;g39a4a3359d3_0_1:notes"/>
+          <p:cNvPr id="94" name="Google Shape;94;g39a4a3359d3_0_1:notes"/>
           <p:cNvSpPr/>
           <p:nvPr>
             <p:ph idx="2" type="sldImg"/>
@@ -1158,7 +1462,403 @@
       </p:sp>
       <p:sp>
         <p:nvSpPr>
-          <p:cNvPr id="92" name="Google Shape;92;g39a4a3359d3_0_1:notes"/>
+          <p:cNvPr id="95" name="Google Shape;95;g39a4a3359d3_0_1:notes"/>
+          <p:cNvSpPr txBox="1"/>
+          <p:nvPr>
+            <p:ph idx="1" type="body"/>
+          </p:nvPr>
+        </p:nvSpPr>
+        <p:spPr>
+          <a:xfrm>
+            <a:off x="685800" y="4343400"/>
+            <a:ext cx="5486400" cy="4114800"/>
+          </a:xfrm>
+          <a:prstGeom prst="rect">
+            <a:avLst/>
+          </a:prstGeom>
+        </p:spPr>
+        <p:txBody>
+          <a:bodyPr anchorCtr="0" anchor="t" bIns="91425" lIns="91425" spcFirstLastPara="1" rIns="91425" wrap="square" tIns="91425">
+            <a:noAutofit/>
+          </a:bodyPr>
+          <a:lstStyle/>
+          <a:p>
+            <a:pPr indent="0" lvl="0" marL="0" rtl="0" algn="l">
+              <a:spcBef>
+                <a:spcPts val="0"/>
+              </a:spcBef>
+              <a:spcAft>
+                <a:spcPts val="0"/>
+              </a:spcAft>
+              <a:buNone/>
+            </a:pPr>
+            <a:r>
+              <a:t/>
+            </a:r>
+            <a:endParaRPr/>
+          </a:p>
+        </p:txBody>
+      </p:sp>
+    </p:spTree>
+  </p:cSld>
+  <p:clrMapOvr>
+    <a:masterClrMapping/>
+  </p:clrMapOvr>
+</p:notes>
+</file>
+
+<file path=ppt/notesSlides/notesSlide6.xml><?xml version="1.0" encoding="utf-8"?>
+<p:notes xmlns:a="http://schemas.openxmlformats.org/drawingml/2006/main" xmlns:r="http://schemas.openxmlformats.org/officeDocument/2006/relationships" xmlns:mc="http://schemas.openxmlformats.org/markup-compatibility/2006" xmlns:mv="urn:schemas-microsoft-com:mac:vml" xmlns:p="http://schemas.openxmlformats.org/presentationml/2006/main" xmlns:c="http://schemas.openxmlformats.org/drawingml/2006/chart" xmlns:dgm="http://schemas.openxmlformats.org/drawingml/2006/diagram" xmlns:o="urn:schemas-microsoft-com:office:office" xmlns:v="urn:schemas-microsoft-com:vml" xmlns:pvml="urn:schemas-microsoft-com:office:powerpoint" xmlns:com="http://schemas.openxmlformats.org/drawingml/2006/compatibility" xmlns:p14="http://schemas.microsoft.com/office/powerpoint/2010/main" xmlns:p15="http://schemas.microsoft.com/office/powerpoint/2012/main" xmlns:ahyp="http://schemas.microsoft.com/office/drawing/2018/hyperlinkcolor" showMasterPhAnim="0" showMasterSp="0">
+  <p:cSld>
+    <p:spTree>
+      <p:nvGrpSpPr>
+        <p:cNvPr id="104" name="Shape 104"/>
+        <p:cNvGrpSpPr/>
+        <p:nvPr/>
+      </p:nvGrpSpPr>
+      <p:grpSpPr>
+        <a:xfrm>
+          <a:off x="0" y="0"/>
+          <a:ext cx="0" cy="0"/>
+          <a:chOff x="0" y="0"/>
+          <a:chExt cx="0" cy="0"/>
+        </a:xfrm>
+      </p:grpSpPr>
+      <p:sp>
+        <p:nvSpPr>
+          <p:cNvPr id="105" name="Google Shape;105;g3db0e77aa17_0_0:notes"/>
+          <p:cNvSpPr/>
+          <p:nvPr>
+            <p:ph idx="2" type="sldImg"/>
+          </p:nvPr>
+        </p:nvSpPr>
+        <p:spPr>
+          <a:xfrm>
+            <a:off x="381300" y="685800"/>
+            <a:ext cx="6096000" cy="3429000"/>
+          </a:xfrm>
+          <a:custGeom>
+            <a:rect b="b" l="l" r="r" t="t"/>
+            <a:pathLst>
+              <a:path extrusionOk="0" h="120000" w="120000">
+                <a:moveTo>
+                  <a:pt x="0" y="0"/>
+                </a:moveTo>
+                <a:lnTo>
+                  <a:pt x="120000" y="0"/>
+                </a:lnTo>
+                <a:lnTo>
+                  <a:pt x="120000" y="120000"/>
+                </a:lnTo>
+                <a:lnTo>
+                  <a:pt x="0" y="120000"/>
+                </a:lnTo>
+                <a:close/>
+              </a:path>
+            </a:pathLst>
+          </a:custGeom>
+        </p:spPr>
+      </p:sp>
+      <p:sp>
+        <p:nvSpPr>
+          <p:cNvPr id="106" name="Google Shape;106;g3db0e77aa17_0_0:notes"/>
+          <p:cNvSpPr txBox="1"/>
+          <p:nvPr>
+            <p:ph idx="1" type="body"/>
+          </p:nvPr>
+        </p:nvSpPr>
+        <p:spPr>
+          <a:xfrm>
+            <a:off x="685800" y="4343400"/>
+            <a:ext cx="5486400" cy="4114800"/>
+          </a:xfrm>
+          <a:prstGeom prst="rect">
+            <a:avLst/>
+          </a:prstGeom>
+        </p:spPr>
+        <p:txBody>
+          <a:bodyPr anchorCtr="0" anchor="t" bIns="91425" lIns="91425" spcFirstLastPara="1" rIns="91425" wrap="square" tIns="91425">
+            <a:noAutofit/>
+          </a:bodyPr>
+          <a:lstStyle/>
+          <a:p>
+            <a:pPr indent="0" lvl="0" marL="0" rtl="0" algn="l">
+              <a:spcBef>
+                <a:spcPts val="0"/>
+              </a:spcBef>
+              <a:spcAft>
+                <a:spcPts val="0"/>
+              </a:spcAft>
+              <a:buNone/>
+            </a:pPr>
+            <a:r>
+              <a:t/>
+            </a:r>
+            <a:endParaRPr/>
+          </a:p>
+        </p:txBody>
+      </p:sp>
+    </p:spTree>
+  </p:cSld>
+  <p:clrMapOvr>
+    <a:masterClrMapping/>
+  </p:clrMapOvr>
+</p:notes>
+</file>
+
+<file path=ppt/notesSlides/notesSlide7.xml><?xml version="1.0" encoding="utf-8"?>
+<p:notes xmlns:a="http://schemas.openxmlformats.org/drawingml/2006/main" xmlns:r="http://schemas.openxmlformats.org/officeDocument/2006/relationships" xmlns:mc="http://schemas.openxmlformats.org/markup-compatibility/2006" xmlns:mv="urn:schemas-microsoft-com:mac:vml" xmlns:p="http://schemas.openxmlformats.org/presentationml/2006/main" xmlns:c="http://schemas.openxmlformats.org/drawingml/2006/chart" xmlns:dgm="http://schemas.openxmlformats.org/drawingml/2006/diagram" xmlns:o="urn:schemas-microsoft-com:office:office" xmlns:v="urn:schemas-microsoft-com:vml" xmlns:pvml="urn:schemas-microsoft-com:office:powerpoint" xmlns:com="http://schemas.openxmlformats.org/drawingml/2006/compatibility" xmlns:p14="http://schemas.microsoft.com/office/powerpoint/2010/main" xmlns:p15="http://schemas.microsoft.com/office/powerpoint/2012/main" xmlns:ahyp="http://schemas.microsoft.com/office/drawing/2018/hyperlinkcolor" showMasterPhAnim="0" showMasterSp="0">
+  <p:cSld>
+    <p:spTree>
+      <p:nvGrpSpPr>
+        <p:cNvPr id="111" name="Shape 111"/>
+        <p:cNvGrpSpPr/>
+        <p:nvPr/>
+      </p:nvGrpSpPr>
+      <p:grpSpPr>
+        <a:xfrm>
+          <a:off x="0" y="0"/>
+          <a:ext cx="0" cy="0"/>
+          <a:chOff x="0" y="0"/>
+          <a:chExt cx="0" cy="0"/>
+        </a:xfrm>
+      </p:grpSpPr>
+      <p:sp>
+        <p:nvSpPr>
+          <p:cNvPr id="112" name="Google Shape;112;g39a658c259d_2_0:notes"/>
+          <p:cNvSpPr/>
+          <p:nvPr>
+            <p:ph idx="2" type="sldImg"/>
+          </p:nvPr>
+        </p:nvSpPr>
+        <p:spPr>
+          <a:xfrm>
+            <a:off x="381300" y="685800"/>
+            <a:ext cx="6096000" cy="3429000"/>
+          </a:xfrm>
+          <a:custGeom>
+            <a:rect b="b" l="l" r="r" t="t"/>
+            <a:pathLst>
+              <a:path extrusionOk="0" h="120000" w="120000">
+                <a:moveTo>
+                  <a:pt x="0" y="0"/>
+                </a:moveTo>
+                <a:lnTo>
+                  <a:pt x="120000" y="0"/>
+                </a:lnTo>
+                <a:lnTo>
+                  <a:pt x="120000" y="120000"/>
+                </a:lnTo>
+                <a:lnTo>
+                  <a:pt x="0" y="120000"/>
+                </a:lnTo>
+                <a:close/>
+              </a:path>
+            </a:pathLst>
+          </a:custGeom>
+        </p:spPr>
+      </p:sp>
+      <p:sp>
+        <p:nvSpPr>
+          <p:cNvPr id="113" name="Google Shape;113;g39a658c259d_2_0:notes"/>
+          <p:cNvSpPr txBox="1"/>
+          <p:nvPr>
+            <p:ph idx="1" type="body"/>
+          </p:nvPr>
+        </p:nvSpPr>
+        <p:spPr>
+          <a:xfrm>
+            <a:off x="685800" y="4343400"/>
+            <a:ext cx="5486400" cy="4114800"/>
+          </a:xfrm>
+          <a:prstGeom prst="rect">
+            <a:avLst/>
+          </a:prstGeom>
+        </p:spPr>
+        <p:txBody>
+          <a:bodyPr anchorCtr="0" anchor="t" bIns="91425" lIns="91425" spcFirstLastPara="1" rIns="91425" wrap="square" tIns="91425">
+            <a:noAutofit/>
+          </a:bodyPr>
+          <a:lstStyle/>
+          <a:p>
+            <a:pPr indent="0" lvl="0" marL="0" rtl="0" algn="l">
+              <a:spcBef>
+                <a:spcPts val="0"/>
+              </a:spcBef>
+              <a:spcAft>
+                <a:spcPts val="0"/>
+              </a:spcAft>
+              <a:buNone/>
+            </a:pPr>
+            <a:r>
+              <a:t/>
+            </a:r>
+            <a:endParaRPr/>
+          </a:p>
+        </p:txBody>
+      </p:sp>
+    </p:spTree>
+  </p:cSld>
+  <p:clrMapOvr>
+    <a:masterClrMapping/>
+  </p:clrMapOvr>
+</p:notes>
+</file>
+
+<file path=ppt/notesSlides/notesSlide8.xml><?xml version="1.0" encoding="utf-8"?>
+<p:notes xmlns:a="http://schemas.openxmlformats.org/drawingml/2006/main" xmlns:r="http://schemas.openxmlformats.org/officeDocument/2006/relationships" xmlns:mc="http://schemas.openxmlformats.org/markup-compatibility/2006" xmlns:mv="urn:schemas-microsoft-com:mac:vml" xmlns:p="http://schemas.openxmlformats.org/presentationml/2006/main" xmlns:c="http://schemas.openxmlformats.org/drawingml/2006/chart" xmlns:dgm="http://schemas.openxmlformats.org/drawingml/2006/diagram" xmlns:o="urn:schemas-microsoft-com:office:office" xmlns:v="urn:schemas-microsoft-com:vml" xmlns:pvml="urn:schemas-microsoft-com:office:powerpoint" xmlns:com="http://schemas.openxmlformats.org/drawingml/2006/compatibility" xmlns:p14="http://schemas.microsoft.com/office/powerpoint/2010/main" xmlns:p15="http://schemas.microsoft.com/office/powerpoint/2012/main" xmlns:ahyp="http://schemas.microsoft.com/office/drawing/2018/hyperlinkcolor" showMasterPhAnim="0" showMasterSp="0">
+  <p:cSld>
+    <p:spTree>
+      <p:nvGrpSpPr>
+        <p:cNvPr id="118" name="Shape 118"/>
+        <p:cNvGrpSpPr/>
+        <p:nvPr/>
+      </p:nvGrpSpPr>
+      <p:grpSpPr>
+        <a:xfrm>
+          <a:off x="0" y="0"/>
+          <a:ext cx="0" cy="0"/>
+          <a:chOff x="0" y="0"/>
+          <a:chExt cx="0" cy="0"/>
+        </a:xfrm>
+      </p:grpSpPr>
+      <p:sp>
+        <p:nvSpPr>
+          <p:cNvPr id="119" name="Google Shape;119;g3db0e77aa17_0_20:notes"/>
+          <p:cNvSpPr/>
+          <p:nvPr>
+            <p:ph idx="2" type="sldImg"/>
+          </p:nvPr>
+        </p:nvSpPr>
+        <p:spPr>
+          <a:xfrm>
+            <a:off x="381300" y="685800"/>
+            <a:ext cx="6096000" cy="3429000"/>
+          </a:xfrm>
+          <a:custGeom>
+            <a:rect b="b" l="l" r="r" t="t"/>
+            <a:pathLst>
+              <a:path extrusionOk="0" h="120000" w="120000">
+                <a:moveTo>
+                  <a:pt x="0" y="0"/>
+                </a:moveTo>
+                <a:lnTo>
+                  <a:pt x="120000" y="0"/>
+                </a:lnTo>
+                <a:lnTo>
+                  <a:pt x="120000" y="120000"/>
+                </a:lnTo>
+                <a:lnTo>
+                  <a:pt x="0" y="120000"/>
+                </a:lnTo>
+                <a:close/>
+              </a:path>
+            </a:pathLst>
+          </a:custGeom>
+        </p:spPr>
+      </p:sp>
+      <p:sp>
+        <p:nvSpPr>
+          <p:cNvPr id="120" name="Google Shape;120;g3db0e77aa17_0_20:notes"/>
+          <p:cNvSpPr txBox="1"/>
+          <p:nvPr>
+            <p:ph idx="1" type="body"/>
+          </p:nvPr>
+        </p:nvSpPr>
+        <p:spPr>
+          <a:xfrm>
+            <a:off x="685800" y="4343400"/>
+            <a:ext cx="5486400" cy="4114800"/>
+          </a:xfrm>
+          <a:prstGeom prst="rect">
+            <a:avLst/>
+          </a:prstGeom>
+        </p:spPr>
+        <p:txBody>
+          <a:bodyPr anchorCtr="0" anchor="t" bIns="91425" lIns="91425" spcFirstLastPara="1" rIns="91425" wrap="square" tIns="91425">
+            <a:noAutofit/>
+          </a:bodyPr>
+          <a:lstStyle/>
+          <a:p>
+            <a:pPr indent="0" lvl="0" marL="0" rtl="0" algn="l">
+              <a:spcBef>
+                <a:spcPts val="0"/>
+              </a:spcBef>
+              <a:spcAft>
+                <a:spcPts val="0"/>
+              </a:spcAft>
+              <a:buNone/>
+            </a:pPr>
+            <a:r>
+              <a:t/>
+            </a:r>
+            <a:endParaRPr/>
+          </a:p>
+        </p:txBody>
+      </p:sp>
+    </p:spTree>
+  </p:cSld>
+  <p:clrMapOvr>
+    <a:masterClrMapping/>
+  </p:clrMapOvr>
+</p:notes>
+</file>
+
+<file path=ppt/notesSlides/notesSlide9.xml><?xml version="1.0" encoding="utf-8"?>
+<p:notes xmlns:a="http://schemas.openxmlformats.org/drawingml/2006/main" xmlns:r="http://schemas.openxmlformats.org/officeDocument/2006/relationships" xmlns:mc="http://schemas.openxmlformats.org/markup-compatibility/2006" xmlns:mv="urn:schemas-microsoft-com:mac:vml" xmlns:p="http://schemas.openxmlformats.org/presentationml/2006/main" xmlns:c="http://schemas.openxmlformats.org/drawingml/2006/chart" xmlns:dgm="http://schemas.openxmlformats.org/drawingml/2006/diagram" xmlns:o="urn:schemas-microsoft-com:office:office" xmlns:v="urn:schemas-microsoft-com:vml" xmlns:pvml="urn:schemas-microsoft-com:office:powerpoint" xmlns:com="http://schemas.openxmlformats.org/drawingml/2006/compatibility" xmlns:p14="http://schemas.microsoft.com/office/powerpoint/2010/main" xmlns:p15="http://schemas.microsoft.com/office/powerpoint/2012/main" xmlns:ahyp="http://schemas.microsoft.com/office/drawing/2018/hyperlinkcolor" showMasterPhAnim="0" showMasterSp="0">
+  <p:cSld>
+    <p:spTree>
+      <p:nvGrpSpPr>
+        <p:cNvPr id="124" name="Shape 124"/>
+        <p:cNvGrpSpPr/>
+        <p:nvPr/>
+      </p:nvGrpSpPr>
+      <p:grpSpPr>
+        <a:xfrm>
+          <a:off x="0" y="0"/>
+          <a:ext cx="0" cy="0"/>
+          <a:chOff x="0" y="0"/>
+          <a:chExt cx="0" cy="0"/>
+        </a:xfrm>
+      </p:grpSpPr>
+      <p:sp>
+        <p:nvSpPr>
+          <p:cNvPr id="125" name="Google Shape;125;g3db0e77aa17_0_27:notes"/>
+          <p:cNvSpPr/>
+          <p:nvPr>
+            <p:ph idx="2" type="sldImg"/>
+          </p:nvPr>
+        </p:nvSpPr>
+        <p:spPr>
+          <a:xfrm>
+            <a:off x="381300" y="685800"/>
+            <a:ext cx="6096000" cy="3429000"/>
+          </a:xfrm>
+          <a:custGeom>
+            <a:rect b="b" l="l" r="r" t="t"/>
+            <a:pathLst>
+              <a:path extrusionOk="0" h="120000" w="120000">
+                <a:moveTo>
+                  <a:pt x="0" y="0"/>
+                </a:moveTo>
+                <a:lnTo>
+                  <a:pt x="120000" y="0"/>
+                </a:lnTo>
+                <a:lnTo>
+                  <a:pt x="120000" y="120000"/>
+                </a:lnTo>
+                <a:lnTo>
+                  <a:pt x="0" y="120000"/>
+                </a:lnTo>
+                <a:close/>
+              </a:path>
+            </a:pathLst>
+          </a:custGeom>
+        </p:spPr>
+      </p:sp>
+      <p:sp>
+        <p:nvSpPr>
+          <p:cNvPr id="126" name="Google Shape;126;g3db0e77aa17_0_27:notes"/>
           <p:cNvSpPr txBox="1"/>
           <p:nvPr>
             <p:ph idx="1" type="body"/>
@@ -6479,7 +7179,7 @@
             </a:pPr>
             <a:r>
               <a:rPr lang="pt-BR"/>
-              <a:t>Exploração em Fine-Tuning através de GraphRAG</a:t>
+              <a:t>Exploração do Fine-Tuning através de GraphRAG</a:t>
             </a:r>
             <a:endParaRPr/>
           </a:p>
@@ -6507,7 +7207,7 @@
         </p:spPr>
         <p:txBody>
           <a:bodyPr anchorCtr="0" anchor="t" bIns="91425" lIns="91425" spcFirstLastPara="1" rIns="91425" wrap="square" tIns="91425">
-            <a:normAutofit fontScale="77500"/>
+            <a:normAutofit fontScale="77500" lnSpcReduction="20000"/>
           </a:bodyPr>
           <a:lstStyle/>
           <a:p>
@@ -6527,7 +7227,7 @@
                 <a:cs typeface="Proxima Nova"/>
                 <a:sym typeface="Proxima Nova"/>
               </a:rPr>
-              <a:t>Um estudo de caso prático de definições, exploração e consolidação de conhecimento sobre métodos de Fine-Tuning através de ferramentas de GraphRAG.</a:t>
+              <a:t>Um estudo de caso prático da exploração de conceitos e consolidação de conhecimento sobre métodos de Fine-Tuning assistido por ferramentas de GraphRAG.</a:t>
             </a:r>
             <a:endParaRPr>
               <a:latin typeface="Proxima Nova"/>
@@ -6827,6 +7527,2151 @@
 </p:sld>
 </file>
 
+<file path=ppt/slides/slide10.xml><?xml version="1.0" encoding="utf-8"?>
+<p:sld xmlns:a="http://schemas.openxmlformats.org/drawingml/2006/main" xmlns:r="http://schemas.openxmlformats.org/officeDocument/2006/relationships" xmlns:mc="http://schemas.openxmlformats.org/markup-compatibility/2006" xmlns:mv="urn:schemas-microsoft-com:mac:vml" xmlns:p="http://schemas.openxmlformats.org/presentationml/2006/main" xmlns:c="http://schemas.openxmlformats.org/drawingml/2006/chart" xmlns:dgm="http://schemas.openxmlformats.org/drawingml/2006/diagram" xmlns:o="urn:schemas-microsoft-com:office:office" xmlns:v="urn:schemas-microsoft-com:vml" xmlns:pvml="urn:schemas-microsoft-com:office:powerpoint" xmlns:com="http://schemas.openxmlformats.org/drawingml/2006/compatibility" xmlns:p14="http://schemas.microsoft.com/office/powerpoint/2010/main" xmlns:p15="http://schemas.microsoft.com/office/powerpoint/2012/main" xmlns:ahyp="http://schemas.microsoft.com/office/drawing/2018/hyperlinkcolor">
+  <p:cSld>
+    <p:spTree>
+      <p:nvGrpSpPr>
+        <p:cNvPr id="141" name="Shape 141"/>
+        <p:cNvGrpSpPr/>
+        <p:nvPr/>
+      </p:nvGrpSpPr>
+      <p:grpSpPr>
+        <a:xfrm>
+          <a:off x="0" y="0"/>
+          <a:ext cx="0" cy="0"/>
+          <a:chOff x="0" y="0"/>
+          <a:chExt cx="0" cy="0"/>
+        </a:xfrm>
+      </p:grpSpPr>
+      <p:sp>
+        <p:nvSpPr>
+          <p:cNvPr id="142" name="Google Shape;142;p22"/>
+          <p:cNvSpPr txBox="1"/>
+          <p:nvPr>
+            <p:ph type="title"/>
+          </p:nvPr>
+        </p:nvSpPr>
+        <p:spPr>
+          <a:xfrm>
+            <a:off x="311700" y="445025"/>
+            <a:ext cx="8520600" cy="572700"/>
+          </a:xfrm>
+          <a:prstGeom prst="rect">
+            <a:avLst/>
+          </a:prstGeom>
+        </p:spPr>
+        <p:txBody>
+          <a:bodyPr anchorCtr="0" anchor="t" bIns="91425" lIns="91425" spcFirstLastPara="1" rIns="91425" wrap="square" tIns="91425">
+            <a:normAutofit fontScale="90000"/>
+          </a:bodyPr>
+          <a:lstStyle/>
+          <a:p>
+            <a:pPr indent="0" lvl="0" marL="0" rtl="0" algn="l">
+              <a:spcBef>
+                <a:spcPts val="0"/>
+              </a:spcBef>
+              <a:spcAft>
+                <a:spcPts val="0"/>
+              </a:spcAft>
+              <a:buNone/>
+            </a:pPr>
+            <a:r>
+              <a:rPr lang="pt-BR"/>
+              <a:t>Segundo Teste: Construção de Timeline das técnicas</a:t>
+            </a:r>
+            <a:endParaRPr/>
+          </a:p>
+        </p:txBody>
+      </p:sp>
+      <p:grpSp>
+        <p:nvGrpSpPr>
+          <p:cNvPr id="143" name="Google Shape;143;p22"/>
+          <p:cNvGrpSpPr/>
+          <p:nvPr/>
+        </p:nvGrpSpPr>
+        <p:grpSpPr>
+          <a:xfrm>
+            <a:off x="5247649" y="1590600"/>
+            <a:ext cx="2702579" cy="2311434"/>
+            <a:chOff x="945914" y="1590632"/>
+            <a:chExt cx="2955900" cy="2528092"/>
+          </a:xfrm>
+        </p:grpSpPr>
+        <p:sp>
+          <p:nvSpPr>
+            <p:cNvPr id="144" name="Google Shape;144;p22"/>
+            <p:cNvSpPr/>
+            <p:nvPr/>
+          </p:nvSpPr>
+          <p:spPr>
+            <a:xfrm>
+              <a:off x="945914" y="2052324"/>
+              <a:ext cx="2955900" cy="2066400"/>
+            </a:xfrm>
+            <a:prstGeom prst="roundRect">
+              <a:avLst>
+                <a:gd fmla="val 16667" name="adj"/>
+              </a:avLst>
+            </a:prstGeom>
+            <a:solidFill>
+              <a:schemeClr val="lt2"/>
+            </a:solidFill>
+            <a:ln cap="flat" cmpd="sng" w="8700">
+              <a:solidFill>
+                <a:schemeClr val="dk2"/>
+              </a:solidFill>
+              <a:prstDash val="solid"/>
+              <a:round/>
+              <a:headEnd len="sm" w="sm" type="none"/>
+              <a:tailEnd len="sm" w="sm" type="none"/>
+            </a:ln>
+          </p:spPr>
+          <p:txBody>
+            <a:bodyPr anchorCtr="0" anchor="ctr" bIns="83600" lIns="83600" spcFirstLastPara="1" rIns="83600" wrap="square" tIns="83600">
+              <a:noAutofit/>
+            </a:bodyPr>
+            <a:lstStyle/>
+            <a:p>
+              <a:pPr indent="-304800" lvl="0" marL="457200" rtl="0" algn="l">
+                <a:spcBef>
+                  <a:spcPts val="0"/>
+                </a:spcBef>
+                <a:spcAft>
+                  <a:spcPts val="0"/>
+                </a:spcAft>
+                <a:buSzPts val="1200"/>
+                <a:buFont typeface="Proxima Nova"/>
+                <a:buChar char="●"/>
+              </a:pPr>
+              <a:r>
+                <a:rPr lang="pt-BR" sz="1200">
+                  <a:latin typeface="Proxima Nova"/>
+                  <a:ea typeface="Proxima Nova"/>
+                  <a:cs typeface="Proxima Nova"/>
+                  <a:sym typeface="Proxima Nova"/>
+                </a:rPr>
+                <a:t>Atendimento aos 3 requisitos;</a:t>
+              </a:r>
+              <a:endParaRPr sz="1200">
+                <a:latin typeface="Proxima Nova"/>
+                <a:ea typeface="Proxima Nova"/>
+                <a:cs typeface="Proxima Nova"/>
+                <a:sym typeface="Proxima Nova"/>
+              </a:endParaRPr>
+            </a:p>
+            <a:p>
+              <a:pPr indent="-304800" lvl="0" marL="457200" rtl="0" algn="l">
+                <a:spcBef>
+                  <a:spcPts val="0"/>
+                </a:spcBef>
+                <a:spcAft>
+                  <a:spcPts val="0"/>
+                </a:spcAft>
+                <a:buSzPts val="1200"/>
+                <a:buFont typeface="Proxima Nova"/>
+                <a:buChar char="●"/>
+              </a:pPr>
+              <a:r>
+                <a:rPr lang="pt-BR" sz="1200">
+                  <a:latin typeface="Proxima Nova"/>
+                  <a:ea typeface="Proxima Nova"/>
+                  <a:cs typeface="Proxima Nova"/>
+                  <a:sym typeface="Proxima Nova"/>
+                </a:rPr>
+                <a:t>Fundamentar as afirmações com base nas referências fornecidas.</a:t>
+              </a:r>
+              <a:endParaRPr sz="1200">
+                <a:latin typeface="Proxima Nova"/>
+                <a:ea typeface="Proxima Nova"/>
+                <a:cs typeface="Proxima Nova"/>
+                <a:sym typeface="Proxima Nova"/>
+              </a:endParaRPr>
+            </a:p>
+          </p:txBody>
+        </p:sp>
+        <p:sp>
+          <p:nvSpPr>
+            <p:cNvPr id="145" name="Google Shape;145;p22"/>
+            <p:cNvSpPr txBox="1"/>
+            <p:nvPr/>
+          </p:nvSpPr>
+          <p:spPr>
+            <a:xfrm>
+              <a:off x="1322857" y="1590632"/>
+              <a:ext cx="2202000" cy="461700"/>
+            </a:xfrm>
+            <a:prstGeom prst="rect">
+              <a:avLst/>
+            </a:prstGeom>
+            <a:noFill/>
+            <a:ln>
+              <a:noFill/>
+            </a:ln>
+          </p:spPr>
+          <p:txBody>
+            <a:bodyPr anchorCtr="0" anchor="t" bIns="83600" lIns="83600" spcFirstLastPara="1" rIns="83600" wrap="square" tIns="83600">
+              <a:spAutoFit/>
+            </a:bodyPr>
+            <a:lstStyle/>
+            <a:p>
+              <a:pPr indent="0" lvl="0" marL="0" rtl="0" algn="ctr">
+                <a:spcBef>
+                  <a:spcPts val="0"/>
+                </a:spcBef>
+                <a:spcAft>
+                  <a:spcPts val="0"/>
+                </a:spcAft>
+                <a:buNone/>
+              </a:pPr>
+              <a:r>
+                <a:rPr lang="pt-BR" sz="1646">
+                  <a:solidFill>
+                    <a:schemeClr val="accent3"/>
+                  </a:solidFill>
+                  <a:latin typeface="Proxima Nova"/>
+                  <a:ea typeface="Proxima Nova"/>
+                  <a:cs typeface="Proxima Nova"/>
+                  <a:sym typeface="Proxima Nova"/>
+                </a:rPr>
+                <a:t>Resultado Esperado</a:t>
+              </a:r>
+              <a:endParaRPr sz="1646">
+                <a:solidFill>
+                  <a:schemeClr val="accent3"/>
+                </a:solidFill>
+                <a:latin typeface="Proxima Nova"/>
+                <a:ea typeface="Proxima Nova"/>
+                <a:cs typeface="Proxima Nova"/>
+                <a:sym typeface="Proxima Nova"/>
+              </a:endParaRPr>
+            </a:p>
+          </p:txBody>
+        </p:sp>
+      </p:grpSp>
+      <p:grpSp>
+        <p:nvGrpSpPr>
+          <p:cNvPr id="146" name="Google Shape;146;p22"/>
+          <p:cNvGrpSpPr/>
+          <p:nvPr/>
+        </p:nvGrpSpPr>
+        <p:grpSpPr>
+          <a:xfrm>
+            <a:off x="1287035" y="1590604"/>
+            <a:ext cx="2702700" cy="2311675"/>
+            <a:chOff x="5076300" y="1590450"/>
+            <a:chExt cx="2702700" cy="2311675"/>
+          </a:xfrm>
+        </p:grpSpPr>
+        <p:sp>
+          <p:nvSpPr>
+            <p:cNvPr id="147" name="Google Shape;147;p22"/>
+            <p:cNvSpPr/>
+            <p:nvPr/>
+          </p:nvSpPr>
+          <p:spPr>
+            <a:xfrm>
+              <a:off x="5076300" y="2052325"/>
+              <a:ext cx="2702700" cy="1849800"/>
+            </a:xfrm>
+            <a:prstGeom prst="roundRect">
+              <a:avLst>
+                <a:gd fmla="val 16667" name="adj"/>
+              </a:avLst>
+            </a:prstGeom>
+            <a:solidFill>
+              <a:schemeClr val="lt2"/>
+            </a:solidFill>
+            <a:ln cap="flat" cmpd="sng" w="9525">
+              <a:solidFill>
+                <a:schemeClr val="dk2"/>
+              </a:solidFill>
+              <a:prstDash val="solid"/>
+              <a:round/>
+              <a:headEnd len="sm" w="sm" type="none"/>
+              <a:tailEnd len="sm" w="sm" type="none"/>
+            </a:ln>
+          </p:spPr>
+          <p:txBody>
+            <a:bodyPr anchorCtr="0" anchor="ctr" bIns="91425" lIns="91425" spcFirstLastPara="1" rIns="91425" wrap="square" tIns="91425">
+              <a:noAutofit/>
+            </a:bodyPr>
+            <a:lstStyle/>
+            <a:p>
+              <a:pPr indent="0" lvl="0" marL="0" rtl="0" algn="l">
+                <a:spcBef>
+                  <a:spcPts val="0"/>
+                </a:spcBef>
+                <a:spcAft>
+                  <a:spcPts val="0"/>
+                </a:spcAft>
+                <a:buNone/>
+              </a:pPr>
+              <a:r>
+                <a:rPr lang="pt-BR" sz="900">
+                  <a:latin typeface="Proxima Nova"/>
+                  <a:ea typeface="Proxima Nova"/>
+                  <a:cs typeface="Proxima Nova"/>
+                  <a:sym typeface="Proxima Nova"/>
+                </a:rPr>
+                <a:t>“</a:t>
+              </a:r>
+              <a:r>
+                <a:rPr lang="pt-BR" sz="900">
+                  <a:latin typeface="Proxima Nova"/>
+                  <a:ea typeface="Proxima Nova"/>
+                  <a:cs typeface="Proxima Nova"/>
+                  <a:sym typeface="Proxima Nova"/>
+                </a:rPr>
+                <a:t>Explique detalhadamente todas as técnicas de fine-tuning abordadas pelas fontes. Apresente-as em ordem cronológica de surgimento e evidencie para cada uma:</a:t>
+              </a:r>
+              <a:endParaRPr sz="900">
+                <a:latin typeface="Proxima Nova"/>
+                <a:ea typeface="Proxima Nova"/>
+                <a:cs typeface="Proxima Nova"/>
+                <a:sym typeface="Proxima Nova"/>
+              </a:endParaRPr>
+            </a:p>
+            <a:p>
+              <a:pPr indent="0" lvl="0" marL="0" rtl="0" algn="l">
+                <a:spcBef>
+                  <a:spcPts val="0"/>
+                </a:spcBef>
+                <a:spcAft>
+                  <a:spcPts val="0"/>
+                </a:spcAft>
+                <a:buNone/>
+              </a:pPr>
+              <a:r>
+                <a:t/>
+              </a:r>
+              <a:endParaRPr sz="900">
+                <a:latin typeface="Proxima Nova"/>
+                <a:ea typeface="Proxima Nova"/>
+                <a:cs typeface="Proxima Nova"/>
+                <a:sym typeface="Proxima Nova"/>
+              </a:endParaRPr>
+            </a:p>
+            <a:p>
+              <a:pPr indent="-285750" lvl="0" marL="457200" rtl="0" algn="l">
+                <a:spcBef>
+                  <a:spcPts val="0"/>
+                </a:spcBef>
+                <a:spcAft>
+                  <a:spcPts val="0"/>
+                </a:spcAft>
+                <a:buSzPts val="900"/>
+                <a:buFont typeface="Proxima Nova"/>
+                <a:buChar char="●"/>
+              </a:pPr>
+              <a:r>
+                <a:rPr lang="pt-BR" sz="900">
+                  <a:latin typeface="Proxima Nova"/>
+                  <a:ea typeface="Proxima Nova"/>
+                  <a:cs typeface="Proxima Nova"/>
+                  <a:sym typeface="Proxima Nova"/>
+                </a:rPr>
+                <a:t>As técnicas e conceitos que as inspiraram;</a:t>
+              </a:r>
+              <a:endParaRPr sz="900">
+                <a:latin typeface="Proxima Nova"/>
+                <a:ea typeface="Proxima Nova"/>
+                <a:cs typeface="Proxima Nova"/>
+                <a:sym typeface="Proxima Nova"/>
+              </a:endParaRPr>
+            </a:p>
+            <a:p>
+              <a:pPr indent="-285750" lvl="0" marL="457200" rtl="0" algn="l">
+                <a:spcBef>
+                  <a:spcPts val="0"/>
+                </a:spcBef>
+                <a:spcAft>
+                  <a:spcPts val="0"/>
+                </a:spcAft>
+                <a:buSzPts val="900"/>
+                <a:buFont typeface="Proxima Nova"/>
+                <a:buChar char="●"/>
+              </a:pPr>
+              <a:r>
+                <a:rPr lang="pt-BR" sz="900">
+                  <a:latin typeface="Proxima Nova"/>
+                  <a:ea typeface="Proxima Nova"/>
+                  <a:cs typeface="Proxima Nova"/>
+                  <a:sym typeface="Proxima Nova"/>
+                </a:rPr>
+                <a:t>Vantagens e desvantagens em relação às suas antecessoras;</a:t>
+              </a:r>
+              <a:endParaRPr sz="900">
+                <a:latin typeface="Proxima Nova"/>
+                <a:ea typeface="Proxima Nova"/>
+                <a:cs typeface="Proxima Nova"/>
+                <a:sym typeface="Proxima Nova"/>
+              </a:endParaRPr>
+            </a:p>
+            <a:p>
+              <a:pPr indent="-285750" lvl="0" marL="457200" rtl="0" algn="l">
+                <a:spcBef>
+                  <a:spcPts val="0"/>
+                </a:spcBef>
+                <a:spcAft>
+                  <a:spcPts val="0"/>
+                </a:spcAft>
+                <a:buSzPts val="900"/>
+                <a:buFont typeface="Proxima Nova"/>
+                <a:buChar char="●"/>
+              </a:pPr>
+              <a:r>
+                <a:rPr lang="pt-BR" sz="900">
+                  <a:latin typeface="Proxima Nova"/>
+                  <a:ea typeface="Proxima Nova"/>
+                  <a:cs typeface="Proxima Nova"/>
+                  <a:sym typeface="Proxima Nova"/>
+                </a:rPr>
+                <a:t>Pontos importantes para a utilização delas na prática.”</a:t>
+              </a:r>
+              <a:endParaRPr sz="900">
+                <a:latin typeface="Proxima Nova"/>
+                <a:ea typeface="Proxima Nova"/>
+                <a:cs typeface="Proxima Nova"/>
+                <a:sym typeface="Proxima Nova"/>
+              </a:endParaRPr>
+            </a:p>
+            <a:p>
+              <a:pPr indent="0" lvl="0" marL="0" rtl="0" algn="ctr">
+                <a:spcBef>
+                  <a:spcPts val="0"/>
+                </a:spcBef>
+                <a:spcAft>
+                  <a:spcPts val="0"/>
+                </a:spcAft>
+                <a:buNone/>
+              </a:pPr>
+              <a:r>
+                <a:t/>
+              </a:r>
+              <a:endParaRPr sz="900">
+                <a:latin typeface="Proxima Nova"/>
+                <a:ea typeface="Proxima Nova"/>
+                <a:cs typeface="Proxima Nova"/>
+                <a:sym typeface="Proxima Nova"/>
+              </a:endParaRPr>
+            </a:p>
+          </p:txBody>
+        </p:sp>
+        <p:sp>
+          <p:nvSpPr>
+            <p:cNvPr id="148" name="Google Shape;148;p22"/>
+            <p:cNvSpPr txBox="1"/>
+            <p:nvPr/>
+          </p:nvSpPr>
+          <p:spPr>
+            <a:xfrm>
+              <a:off x="5587350" y="1590450"/>
+              <a:ext cx="1680600" cy="461700"/>
+            </a:xfrm>
+            <a:prstGeom prst="rect">
+              <a:avLst/>
+            </a:prstGeom>
+            <a:noFill/>
+            <a:ln>
+              <a:noFill/>
+            </a:ln>
+          </p:spPr>
+          <p:txBody>
+            <a:bodyPr anchorCtr="0" anchor="t" bIns="91425" lIns="91425" spcFirstLastPara="1" rIns="91425" wrap="square" tIns="91425">
+              <a:spAutoFit/>
+            </a:bodyPr>
+            <a:lstStyle/>
+            <a:p>
+              <a:pPr indent="0" lvl="0" marL="0" rtl="0" algn="ctr">
+                <a:spcBef>
+                  <a:spcPts val="0"/>
+                </a:spcBef>
+                <a:spcAft>
+                  <a:spcPts val="0"/>
+                </a:spcAft>
+                <a:buNone/>
+              </a:pPr>
+              <a:r>
+                <a:rPr lang="pt-BR" sz="1800">
+                  <a:solidFill>
+                    <a:schemeClr val="accent3"/>
+                  </a:solidFill>
+                  <a:latin typeface="Proxima Nova"/>
+                  <a:ea typeface="Proxima Nova"/>
+                  <a:cs typeface="Proxima Nova"/>
+                  <a:sym typeface="Proxima Nova"/>
+                </a:rPr>
+                <a:t>Prompt</a:t>
+              </a:r>
+              <a:endParaRPr sz="1800">
+                <a:solidFill>
+                  <a:schemeClr val="accent3"/>
+                </a:solidFill>
+                <a:latin typeface="Proxima Nova"/>
+                <a:ea typeface="Proxima Nova"/>
+                <a:cs typeface="Proxima Nova"/>
+                <a:sym typeface="Proxima Nova"/>
+              </a:endParaRPr>
+            </a:p>
+          </p:txBody>
+        </p:sp>
+      </p:grpSp>
+    </p:spTree>
+  </p:cSld>
+  <p:clrMapOvr>
+    <a:masterClrMapping/>
+  </p:clrMapOvr>
+</p:sld>
+</file>
+
+<file path=ppt/slides/slide11.xml><?xml version="1.0" encoding="utf-8"?>
+<p:sld xmlns:a="http://schemas.openxmlformats.org/drawingml/2006/main" xmlns:r="http://schemas.openxmlformats.org/officeDocument/2006/relationships" xmlns:mc="http://schemas.openxmlformats.org/markup-compatibility/2006" xmlns:mv="urn:schemas-microsoft-com:mac:vml" xmlns:p="http://schemas.openxmlformats.org/presentationml/2006/main" xmlns:c="http://schemas.openxmlformats.org/drawingml/2006/chart" xmlns:dgm="http://schemas.openxmlformats.org/drawingml/2006/diagram" xmlns:o="urn:schemas-microsoft-com:office:office" xmlns:v="urn:schemas-microsoft-com:vml" xmlns:pvml="urn:schemas-microsoft-com:office:powerpoint" xmlns:com="http://schemas.openxmlformats.org/drawingml/2006/compatibility" xmlns:p14="http://schemas.microsoft.com/office/powerpoint/2010/main" xmlns:p15="http://schemas.microsoft.com/office/powerpoint/2012/main" xmlns:ahyp="http://schemas.microsoft.com/office/drawing/2018/hyperlinkcolor">
+  <p:cSld>
+    <p:spTree>
+      <p:nvGrpSpPr>
+        <p:cNvPr id="152" name="Shape 152"/>
+        <p:cNvGrpSpPr/>
+        <p:nvPr/>
+      </p:nvGrpSpPr>
+      <p:grpSpPr>
+        <a:xfrm>
+          <a:off x="0" y="0"/>
+          <a:ext cx="0" cy="0"/>
+          <a:chOff x="0" y="0"/>
+          <a:chExt cx="0" cy="0"/>
+        </a:xfrm>
+      </p:grpSpPr>
+      <p:sp>
+        <p:nvSpPr>
+          <p:cNvPr id="153" name="Google Shape;153;p23"/>
+          <p:cNvSpPr txBox="1"/>
+          <p:nvPr>
+            <p:ph type="title"/>
+          </p:nvPr>
+        </p:nvSpPr>
+        <p:spPr>
+          <a:xfrm>
+            <a:off x="311700" y="445025"/>
+            <a:ext cx="8520600" cy="572700"/>
+          </a:xfrm>
+          <a:prstGeom prst="rect">
+            <a:avLst/>
+          </a:prstGeom>
+        </p:spPr>
+        <p:txBody>
+          <a:bodyPr anchorCtr="0" anchor="t" bIns="91425" lIns="91425" spcFirstLastPara="1" rIns="91425" wrap="square" tIns="91425">
+            <a:normAutofit fontScale="90000"/>
+          </a:bodyPr>
+          <a:lstStyle/>
+          <a:p>
+            <a:pPr indent="0" lvl="0" marL="0" rtl="0" algn="l">
+              <a:spcBef>
+                <a:spcPts val="0"/>
+              </a:spcBef>
+              <a:spcAft>
+                <a:spcPts val="0"/>
+              </a:spcAft>
+              <a:buNone/>
+            </a:pPr>
+            <a:r>
+              <a:rPr lang="pt-BR"/>
+              <a:t>Segundo Teste: Resultados</a:t>
+            </a:r>
+            <a:endParaRPr/>
+          </a:p>
+        </p:txBody>
+      </p:sp>
+      <p:grpSp>
+        <p:nvGrpSpPr>
+          <p:cNvPr id="154" name="Google Shape;154;p23"/>
+          <p:cNvGrpSpPr/>
+          <p:nvPr/>
+        </p:nvGrpSpPr>
+        <p:grpSpPr>
+          <a:xfrm>
+            <a:off x="3463986" y="1624064"/>
+            <a:ext cx="2216038" cy="1895310"/>
+            <a:chOff x="945914" y="1590632"/>
+            <a:chExt cx="2955900" cy="2528092"/>
+          </a:xfrm>
+        </p:grpSpPr>
+        <p:sp>
+          <p:nvSpPr>
+            <p:cNvPr id="155" name="Google Shape;155;p23"/>
+            <p:cNvSpPr/>
+            <p:nvPr/>
+          </p:nvSpPr>
+          <p:spPr>
+            <a:xfrm>
+              <a:off x="945914" y="2052324"/>
+              <a:ext cx="2955900" cy="2066400"/>
+            </a:xfrm>
+            <a:prstGeom prst="roundRect">
+              <a:avLst>
+                <a:gd fmla="val 16667" name="adj"/>
+              </a:avLst>
+            </a:prstGeom>
+            <a:solidFill>
+              <a:schemeClr val="lt2"/>
+            </a:solidFill>
+            <a:ln cap="flat" cmpd="sng" w="7125">
+              <a:solidFill>
+                <a:schemeClr val="dk2"/>
+              </a:solidFill>
+              <a:prstDash val="solid"/>
+              <a:round/>
+              <a:headEnd len="sm" w="sm" type="none"/>
+              <a:tailEnd len="sm" w="sm" type="none"/>
+            </a:ln>
+          </p:spPr>
+          <p:txBody>
+            <a:bodyPr anchorCtr="0" anchor="ctr" bIns="68550" lIns="68550" spcFirstLastPara="1" rIns="68550" wrap="square" tIns="68550">
+              <a:noAutofit/>
+            </a:bodyPr>
+            <a:lstStyle/>
+            <a:p>
+              <a:pPr indent="-244561" lvl="0" marL="374871" rtl="0" algn="l">
+                <a:spcBef>
+                  <a:spcPts val="0"/>
+                </a:spcBef>
+                <a:spcAft>
+                  <a:spcPts val="0"/>
+                </a:spcAft>
+                <a:buSzPts val="900"/>
+                <a:buFont typeface="Proxima Nova"/>
+                <a:buChar char="●"/>
+              </a:pPr>
+              <a:r>
+                <a:rPr lang="pt-BR" sz="900">
+                  <a:latin typeface="Proxima Nova"/>
+                  <a:ea typeface="Proxima Nova"/>
+                  <a:cs typeface="Proxima Nova"/>
+                  <a:sym typeface="Proxima Nova"/>
+                </a:rPr>
+                <a:t>Trouxe as técnicas na sequência correta de publicação;</a:t>
+              </a:r>
+              <a:endParaRPr sz="900">
+                <a:latin typeface="Proxima Nova"/>
+                <a:ea typeface="Proxima Nova"/>
+                <a:cs typeface="Proxima Nova"/>
+                <a:sym typeface="Proxima Nova"/>
+              </a:endParaRPr>
+            </a:p>
+            <a:p>
+              <a:pPr indent="-244561" lvl="0" marL="374871" rtl="0" algn="l">
+                <a:spcBef>
+                  <a:spcPts val="0"/>
+                </a:spcBef>
+                <a:spcAft>
+                  <a:spcPts val="0"/>
+                </a:spcAft>
+                <a:buSzPts val="900"/>
+                <a:buFont typeface="Proxima Nova"/>
+                <a:buChar char="●"/>
+              </a:pPr>
+              <a:r>
+                <a:rPr lang="pt-BR" sz="900">
+                  <a:latin typeface="Proxima Nova"/>
+                  <a:ea typeface="Proxima Nova"/>
+                  <a:cs typeface="Proxima Nova"/>
+                  <a:sym typeface="Proxima Nova"/>
+                </a:rPr>
+                <a:t>Citou os anos de publicação de cada técnica;</a:t>
+              </a:r>
+              <a:endParaRPr sz="900">
+                <a:latin typeface="Proxima Nova"/>
+                <a:ea typeface="Proxima Nova"/>
+                <a:cs typeface="Proxima Nova"/>
+                <a:sym typeface="Proxima Nova"/>
+              </a:endParaRPr>
+            </a:p>
+            <a:p>
+              <a:pPr indent="-244561" lvl="0" marL="374871" rtl="0" algn="l">
+                <a:spcBef>
+                  <a:spcPts val="0"/>
+                </a:spcBef>
+                <a:spcAft>
+                  <a:spcPts val="0"/>
+                </a:spcAft>
+                <a:buSzPts val="900"/>
+                <a:buFont typeface="Proxima Nova"/>
+                <a:buChar char="●"/>
+              </a:pPr>
+              <a:r>
+                <a:rPr lang="pt-BR" sz="900">
+                  <a:latin typeface="Proxima Nova"/>
+                  <a:ea typeface="Proxima Nova"/>
+                  <a:cs typeface="Proxima Nova"/>
+                  <a:sym typeface="Proxima Nova"/>
+                </a:rPr>
+                <a:t>Criou analogias e pseudocódigo para facilitar a compreensão;</a:t>
+              </a:r>
+              <a:endParaRPr sz="900">
+                <a:latin typeface="Proxima Nova"/>
+                <a:ea typeface="Proxima Nova"/>
+                <a:cs typeface="Proxima Nova"/>
+                <a:sym typeface="Proxima Nova"/>
+              </a:endParaRPr>
+            </a:p>
+            <a:p>
+              <a:pPr indent="-244561" lvl="0" marL="374871" rtl="0" algn="l">
+                <a:spcBef>
+                  <a:spcPts val="0"/>
+                </a:spcBef>
+                <a:spcAft>
+                  <a:spcPts val="0"/>
+                </a:spcAft>
+                <a:buSzPts val="900"/>
+                <a:buFont typeface="Proxima Nova"/>
+                <a:buChar char="●"/>
+              </a:pPr>
+              <a:r>
+                <a:rPr lang="pt-BR" sz="900">
+                  <a:latin typeface="Proxima Nova"/>
+                  <a:ea typeface="Proxima Nova"/>
+                  <a:cs typeface="Proxima Nova"/>
+                  <a:sym typeface="Proxima Nova"/>
+                </a:rPr>
+                <a:t>Citou fontes de forma esporádica;</a:t>
+              </a:r>
+              <a:endParaRPr sz="900">
+                <a:latin typeface="Proxima Nova"/>
+                <a:ea typeface="Proxima Nova"/>
+                <a:cs typeface="Proxima Nova"/>
+                <a:sym typeface="Proxima Nova"/>
+              </a:endParaRPr>
+            </a:p>
+            <a:p>
+              <a:pPr indent="-244561" lvl="0" marL="374871" rtl="0" algn="l">
+                <a:spcBef>
+                  <a:spcPts val="0"/>
+                </a:spcBef>
+                <a:spcAft>
+                  <a:spcPts val="0"/>
+                </a:spcAft>
+                <a:buSzPts val="900"/>
+                <a:buFont typeface="Proxima Nova"/>
+                <a:buChar char="●"/>
+              </a:pPr>
+              <a:r>
+                <a:rPr lang="pt-BR" sz="900">
+                  <a:latin typeface="Proxima Nova"/>
+                  <a:ea typeface="Proxima Nova"/>
+                  <a:cs typeface="Proxima Nova"/>
+                  <a:sym typeface="Proxima Nova"/>
+                </a:rPr>
+                <a:t>Deu uma recomendação final.</a:t>
+              </a:r>
+              <a:endParaRPr sz="900">
+                <a:latin typeface="Proxima Nova"/>
+                <a:ea typeface="Proxima Nova"/>
+                <a:cs typeface="Proxima Nova"/>
+                <a:sym typeface="Proxima Nova"/>
+              </a:endParaRPr>
+            </a:p>
+          </p:txBody>
+        </p:sp>
+        <p:sp>
+          <p:nvSpPr>
+            <p:cNvPr id="156" name="Google Shape;156;p23"/>
+            <p:cNvSpPr txBox="1"/>
+            <p:nvPr/>
+          </p:nvSpPr>
+          <p:spPr>
+            <a:xfrm>
+              <a:off x="1322857" y="1590632"/>
+              <a:ext cx="2202000" cy="461700"/>
+            </a:xfrm>
+            <a:prstGeom prst="rect">
+              <a:avLst/>
+            </a:prstGeom>
+            <a:noFill/>
+            <a:ln>
+              <a:noFill/>
+            </a:ln>
+          </p:spPr>
+          <p:txBody>
+            <a:bodyPr anchorCtr="0" anchor="t" bIns="68550" lIns="68550" spcFirstLastPara="1" rIns="68550" wrap="square" tIns="68550">
+              <a:spAutoFit/>
+            </a:bodyPr>
+            <a:lstStyle/>
+            <a:p>
+              <a:pPr indent="0" lvl="0" marL="0" rtl="0" algn="ctr">
+                <a:spcBef>
+                  <a:spcPts val="0"/>
+                </a:spcBef>
+                <a:spcAft>
+                  <a:spcPts val="0"/>
+                </a:spcAft>
+                <a:buNone/>
+              </a:pPr>
+              <a:r>
+                <a:rPr lang="pt-BR" sz="1349">
+                  <a:solidFill>
+                    <a:schemeClr val="accent3"/>
+                  </a:solidFill>
+                  <a:latin typeface="Proxima Nova"/>
+                  <a:ea typeface="Proxima Nova"/>
+                  <a:cs typeface="Proxima Nova"/>
+                  <a:sym typeface="Proxima Nova"/>
+                </a:rPr>
+                <a:t>Graphify</a:t>
+              </a:r>
+              <a:endParaRPr sz="1349">
+                <a:solidFill>
+                  <a:schemeClr val="accent3"/>
+                </a:solidFill>
+                <a:latin typeface="Proxima Nova"/>
+                <a:ea typeface="Proxima Nova"/>
+                <a:cs typeface="Proxima Nova"/>
+                <a:sym typeface="Proxima Nova"/>
+              </a:endParaRPr>
+            </a:p>
+          </p:txBody>
+        </p:sp>
+      </p:grpSp>
+      <p:grpSp>
+        <p:nvGrpSpPr>
+          <p:cNvPr id="157" name="Google Shape;157;p23"/>
+          <p:cNvGrpSpPr/>
+          <p:nvPr/>
+        </p:nvGrpSpPr>
+        <p:grpSpPr>
+          <a:xfrm>
+            <a:off x="368614" y="1624045"/>
+            <a:ext cx="2215944" cy="1895217"/>
+            <a:chOff x="5145729" y="1590450"/>
+            <a:chExt cx="2702700" cy="2311523"/>
+          </a:xfrm>
+        </p:grpSpPr>
+        <p:sp>
+          <p:nvSpPr>
+            <p:cNvPr id="158" name="Google Shape;158;p23"/>
+            <p:cNvSpPr/>
+            <p:nvPr/>
+          </p:nvSpPr>
+          <p:spPr>
+            <a:xfrm>
+              <a:off x="5145729" y="2052173"/>
+              <a:ext cx="2702700" cy="1849800"/>
+            </a:xfrm>
+            <a:prstGeom prst="roundRect">
+              <a:avLst>
+                <a:gd fmla="val 16667" name="adj"/>
+              </a:avLst>
+            </a:prstGeom>
+            <a:solidFill>
+              <a:schemeClr val="lt2"/>
+            </a:solidFill>
+            <a:ln cap="flat" cmpd="sng" w="7800">
+              <a:solidFill>
+                <a:schemeClr val="dk2"/>
+              </a:solidFill>
+              <a:prstDash val="solid"/>
+              <a:round/>
+              <a:headEnd len="sm" w="sm" type="none"/>
+              <a:tailEnd len="sm" w="sm" type="none"/>
+            </a:ln>
+          </p:spPr>
+          <p:txBody>
+            <a:bodyPr anchorCtr="0" anchor="ctr" bIns="74975" lIns="74975" spcFirstLastPara="1" rIns="74975" wrap="square" tIns="74975">
+              <a:noAutofit/>
+            </a:bodyPr>
+            <a:lstStyle/>
+            <a:p>
+              <a:pPr indent="-244561" lvl="0" marL="374871" rtl="0" algn="l">
+                <a:spcBef>
+                  <a:spcPts val="0"/>
+                </a:spcBef>
+                <a:spcAft>
+                  <a:spcPts val="0"/>
+                </a:spcAft>
+                <a:buSzPts val="900"/>
+                <a:buFont typeface="Proxima Nova"/>
+                <a:buChar char="●"/>
+              </a:pPr>
+              <a:r>
+                <a:rPr lang="pt-BR" sz="900">
+                  <a:latin typeface="Proxima Nova"/>
+                  <a:ea typeface="Proxima Nova"/>
+                  <a:cs typeface="Proxima Nova"/>
+                  <a:sym typeface="Proxima Nova"/>
+                </a:rPr>
+                <a:t>Trouxe as técnicas na sequência correta de publicação;</a:t>
+              </a:r>
+              <a:endParaRPr sz="900">
+                <a:latin typeface="Proxima Nova"/>
+                <a:ea typeface="Proxima Nova"/>
+                <a:cs typeface="Proxima Nova"/>
+                <a:sym typeface="Proxima Nova"/>
+              </a:endParaRPr>
+            </a:p>
+            <a:p>
+              <a:pPr indent="-244561" lvl="0" marL="374871" rtl="0" algn="l">
+                <a:spcBef>
+                  <a:spcPts val="0"/>
+                </a:spcBef>
+                <a:spcAft>
+                  <a:spcPts val="0"/>
+                </a:spcAft>
+                <a:buSzPts val="900"/>
+                <a:buFont typeface="Proxima Nova"/>
+                <a:buChar char="●"/>
+              </a:pPr>
+              <a:r>
+                <a:rPr b="1" lang="pt-BR" sz="900">
+                  <a:latin typeface="Proxima Nova"/>
+                  <a:ea typeface="Proxima Nova"/>
+                  <a:cs typeface="Proxima Nova"/>
+                  <a:sym typeface="Proxima Nova"/>
+                </a:rPr>
+                <a:t>Não</a:t>
+              </a:r>
+              <a:r>
+                <a:rPr lang="pt-BR" sz="900">
+                  <a:latin typeface="Proxima Nova"/>
+                  <a:ea typeface="Proxima Nova"/>
+                  <a:cs typeface="Proxima Nova"/>
+                  <a:sym typeface="Proxima Nova"/>
+                </a:rPr>
+                <a:t> c</a:t>
+              </a:r>
+              <a:r>
+                <a:rPr lang="pt-BR" sz="900">
+                  <a:latin typeface="Proxima Nova"/>
+                  <a:ea typeface="Proxima Nova"/>
+                  <a:cs typeface="Proxima Nova"/>
+                  <a:sym typeface="Proxima Nova"/>
+                </a:rPr>
+                <a:t>itou os anos de publicação de cada técnica;</a:t>
+              </a:r>
+              <a:endParaRPr sz="900">
+                <a:latin typeface="Proxima Nova"/>
+                <a:ea typeface="Proxima Nova"/>
+                <a:cs typeface="Proxima Nova"/>
+                <a:sym typeface="Proxima Nova"/>
+              </a:endParaRPr>
+            </a:p>
+            <a:p>
+              <a:pPr indent="-244561" lvl="0" marL="374871" rtl="0" algn="l">
+                <a:spcBef>
+                  <a:spcPts val="0"/>
+                </a:spcBef>
+                <a:spcAft>
+                  <a:spcPts val="0"/>
+                </a:spcAft>
+                <a:buSzPts val="900"/>
+                <a:buFont typeface="Proxima Nova"/>
+                <a:buChar char="●"/>
+              </a:pPr>
+              <a:r>
+                <a:rPr lang="pt-BR" sz="900">
+                  <a:latin typeface="Proxima Nova"/>
+                  <a:ea typeface="Proxima Nova"/>
+                  <a:cs typeface="Proxima Nova"/>
+                  <a:sym typeface="Proxima Nova"/>
+                </a:rPr>
+                <a:t>Trouxe referências aglomeradas ao final da resposta.</a:t>
+              </a:r>
+              <a:endParaRPr sz="900">
+                <a:latin typeface="Proxima Nova"/>
+                <a:ea typeface="Proxima Nova"/>
+                <a:cs typeface="Proxima Nova"/>
+                <a:sym typeface="Proxima Nova"/>
+              </a:endParaRPr>
+            </a:p>
+          </p:txBody>
+        </p:sp>
+        <p:sp>
+          <p:nvSpPr>
+            <p:cNvPr id="159" name="Google Shape;159;p23"/>
+            <p:cNvSpPr txBox="1"/>
+            <p:nvPr/>
+          </p:nvSpPr>
+          <p:spPr>
+            <a:xfrm>
+              <a:off x="5587350" y="1590450"/>
+              <a:ext cx="1680600" cy="461700"/>
+            </a:xfrm>
+            <a:prstGeom prst="rect">
+              <a:avLst/>
+            </a:prstGeom>
+            <a:noFill/>
+            <a:ln>
+              <a:noFill/>
+            </a:ln>
+          </p:spPr>
+          <p:txBody>
+            <a:bodyPr anchorCtr="0" anchor="t" bIns="74975" lIns="74975" spcFirstLastPara="1" rIns="74975" wrap="square" tIns="74975">
+              <a:spAutoFit/>
+            </a:bodyPr>
+            <a:lstStyle/>
+            <a:p>
+              <a:pPr indent="0" lvl="0" marL="0" rtl="0" algn="ctr">
+                <a:spcBef>
+                  <a:spcPts val="0"/>
+                </a:spcBef>
+                <a:spcAft>
+                  <a:spcPts val="0"/>
+                </a:spcAft>
+                <a:buNone/>
+              </a:pPr>
+              <a:r>
+                <a:rPr lang="pt-BR" sz="1476">
+                  <a:solidFill>
+                    <a:schemeClr val="accent3"/>
+                  </a:solidFill>
+                  <a:latin typeface="Proxima Nova"/>
+                  <a:ea typeface="Proxima Nova"/>
+                  <a:cs typeface="Proxima Nova"/>
+                  <a:sym typeface="Proxima Nova"/>
+                </a:rPr>
+                <a:t>EdgeQuake</a:t>
+              </a:r>
+              <a:endParaRPr sz="1476">
+                <a:solidFill>
+                  <a:schemeClr val="accent3"/>
+                </a:solidFill>
+                <a:latin typeface="Proxima Nova"/>
+                <a:ea typeface="Proxima Nova"/>
+                <a:cs typeface="Proxima Nova"/>
+                <a:sym typeface="Proxima Nova"/>
+              </a:endParaRPr>
+            </a:p>
+          </p:txBody>
+        </p:sp>
+      </p:grpSp>
+      <p:grpSp>
+        <p:nvGrpSpPr>
+          <p:cNvPr id="160" name="Google Shape;160;p23"/>
+          <p:cNvGrpSpPr/>
+          <p:nvPr/>
+        </p:nvGrpSpPr>
+        <p:grpSpPr>
+          <a:xfrm>
+            <a:off x="6559439" y="1624133"/>
+            <a:ext cx="2215944" cy="1895217"/>
+            <a:chOff x="5145729" y="1590450"/>
+            <a:chExt cx="2702700" cy="2311523"/>
+          </a:xfrm>
+        </p:grpSpPr>
+        <p:sp>
+          <p:nvSpPr>
+            <p:cNvPr id="161" name="Google Shape;161;p23"/>
+            <p:cNvSpPr/>
+            <p:nvPr/>
+          </p:nvSpPr>
+          <p:spPr>
+            <a:xfrm>
+              <a:off x="5145729" y="2052173"/>
+              <a:ext cx="2702700" cy="1849800"/>
+            </a:xfrm>
+            <a:prstGeom prst="roundRect">
+              <a:avLst>
+                <a:gd fmla="val 16667" name="adj"/>
+              </a:avLst>
+            </a:prstGeom>
+            <a:solidFill>
+              <a:schemeClr val="lt2"/>
+            </a:solidFill>
+            <a:ln cap="flat" cmpd="sng" w="7800">
+              <a:solidFill>
+                <a:schemeClr val="dk2"/>
+              </a:solidFill>
+              <a:prstDash val="solid"/>
+              <a:round/>
+              <a:headEnd len="sm" w="sm" type="none"/>
+              <a:tailEnd len="sm" w="sm" type="none"/>
+            </a:ln>
+          </p:spPr>
+          <p:txBody>
+            <a:bodyPr anchorCtr="0" anchor="ctr" bIns="74975" lIns="74975" spcFirstLastPara="1" rIns="74975" wrap="square" tIns="74975">
+              <a:noAutofit/>
+            </a:bodyPr>
+            <a:lstStyle/>
+            <a:p>
+              <a:pPr indent="-244561" lvl="0" marL="374871" rtl="0" algn="l">
+                <a:spcBef>
+                  <a:spcPts val="0"/>
+                </a:spcBef>
+                <a:spcAft>
+                  <a:spcPts val="0"/>
+                </a:spcAft>
+                <a:buSzPts val="900"/>
+                <a:buFont typeface="Proxima Nova"/>
+                <a:buChar char="●"/>
+              </a:pPr>
+              <a:r>
+                <a:rPr lang="pt-BR" sz="900">
+                  <a:latin typeface="Proxima Nova"/>
+                  <a:ea typeface="Proxima Nova"/>
+                  <a:cs typeface="Proxima Nova"/>
+                  <a:sym typeface="Proxima Nova"/>
+                </a:rPr>
+                <a:t>Trouxe as técnicas na sequência correta de publicação;</a:t>
+              </a:r>
+              <a:endParaRPr sz="900">
+                <a:latin typeface="Proxima Nova"/>
+                <a:ea typeface="Proxima Nova"/>
+                <a:cs typeface="Proxima Nova"/>
+                <a:sym typeface="Proxima Nova"/>
+              </a:endParaRPr>
+            </a:p>
+            <a:p>
+              <a:pPr indent="-244561" lvl="0" marL="374871" rtl="0" algn="l">
+                <a:spcBef>
+                  <a:spcPts val="0"/>
+                </a:spcBef>
+                <a:spcAft>
+                  <a:spcPts val="0"/>
+                </a:spcAft>
+                <a:buSzPts val="900"/>
+                <a:buFont typeface="Proxima Nova"/>
+                <a:buChar char="●"/>
+              </a:pPr>
+              <a:r>
+                <a:rPr lang="pt-BR" sz="900">
+                  <a:latin typeface="Proxima Nova"/>
+                  <a:ea typeface="Proxima Nova"/>
+                  <a:cs typeface="Proxima Nova"/>
+                  <a:sym typeface="Proxima Nova"/>
+                </a:rPr>
+                <a:t>Citou os anos de publicação de cada técnica;</a:t>
+              </a:r>
+              <a:endParaRPr sz="900">
+                <a:latin typeface="Proxima Nova"/>
+                <a:ea typeface="Proxima Nova"/>
+                <a:cs typeface="Proxima Nova"/>
+                <a:sym typeface="Proxima Nova"/>
+              </a:endParaRPr>
+            </a:p>
+            <a:p>
+              <a:pPr indent="-244561" lvl="0" marL="374871" rtl="0" algn="l">
+                <a:spcBef>
+                  <a:spcPts val="0"/>
+                </a:spcBef>
+                <a:spcAft>
+                  <a:spcPts val="0"/>
+                </a:spcAft>
+                <a:buSzPts val="900"/>
+                <a:buFont typeface="Proxima Nova"/>
+                <a:buChar char="●"/>
+              </a:pPr>
+              <a:r>
+                <a:rPr lang="pt-BR" sz="900">
+                  <a:latin typeface="Proxima Nova"/>
+                  <a:ea typeface="Proxima Nova"/>
+                  <a:cs typeface="Proxima Nova"/>
+                  <a:sym typeface="Proxima Nova"/>
+                </a:rPr>
+                <a:t>Satisfez os 3 requisitos exigidos no prompt.</a:t>
+              </a:r>
+              <a:endParaRPr sz="900">
+                <a:latin typeface="Proxima Nova"/>
+                <a:ea typeface="Proxima Nova"/>
+                <a:cs typeface="Proxima Nova"/>
+                <a:sym typeface="Proxima Nova"/>
+              </a:endParaRPr>
+            </a:p>
+            <a:p>
+              <a:pPr indent="-244561" lvl="0" marL="374871" rtl="0" algn="l">
+                <a:spcBef>
+                  <a:spcPts val="0"/>
+                </a:spcBef>
+                <a:spcAft>
+                  <a:spcPts val="0"/>
+                </a:spcAft>
+                <a:buSzPts val="900"/>
+                <a:buFont typeface="Proxima Nova"/>
+                <a:buChar char="●"/>
+              </a:pPr>
+              <a:r>
+                <a:rPr lang="pt-BR" sz="900">
+                  <a:latin typeface="Proxima Nova"/>
+                  <a:ea typeface="Proxima Nova"/>
+                  <a:cs typeface="Proxima Nova"/>
+                  <a:sym typeface="Proxima Nova"/>
+                </a:rPr>
+                <a:t>Trouxe referências para cada afirmação feita.</a:t>
+              </a:r>
+              <a:endParaRPr sz="900">
+                <a:latin typeface="Proxima Nova"/>
+                <a:ea typeface="Proxima Nova"/>
+                <a:cs typeface="Proxima Nova"/>
+                <a:sym typeface="Proxima Nova"/>
+              </a:endParaRPr>
+            </a:p>
+          </p:txBody>
+        </p:sp>
+        <p:sp>
+          <p:nvSpPr>
+            <p:cNvPr id="162" name="Google Shape;162;p23"/>
+            <p:cNvSpPr txBox="1"/>
+            <p:nvPr/>
+          </p:nvSpPr>
+          <p:spPr>
+            <a:xfrm>
+              <a:off x="5587350" y="1590450"/>
+              <a:ext cx="1680600" cy="461700"/>
+            </a:xfrm>
+            <a:prstGeom prst="rect">
+              <a:avLst/>
+            </a:prstGeom>
+            <a:noFill/>
+            <a:ln>
+              <a:noFill/>
+            </a:ln>
+          </p:spPr>
+          <p:txBody>
+            <a:bodyPr anchorCtr="0" anchor="t" bIns="74975" lIns="74975" spcFirstLastPara="1" rIns="74975" wrap="square" tIns="74975">
+              <a:spAutoFit/>
+            </a:bodyPr>
+            <a:lstStyle/>
+            <a:p>
+              <a:pPr indent="0" lvl="0" marL="0" rtl="0" algn="ctr">
+                <a:spcBef>
+                  <a:spcPts val="0"/>
+                </a:spcBef>
+                <a:spcAft>
+                  <a:spcPts val="0"/>
+                </a:spcAft>
+                <a:buNone/>
+              </a:pPr>
+              <a:r>
+                <a:rPr lang="pt-BR" sz="1476">
+                  <a:solidFill>
+                    <a:schemeClr val="accent3"/>
+                  </a:solidFill>
+                  <a:latin typeface="Proxima Nova"/>
+                  <a:ea typeface="Proxima Nova"/>
+                  <a:cs typeface="Proxima Nova"/>
+                  <a:sym typeface="Proxima Nova"/>
+                </a:rPr>
+                <a:t>NotebookLM</a:t>
+              </a:r>
+              <a:endParaRPr sz="1476">
+                <a:solidFill>
+                  <a:schemeClr val="accent3"/>
+                </a:solidFill>
+                <a:latin typeface="Proxima Nova"/>
+                <a:ea typeface="Proxima Nova"/>
+                <a:cs typeface="Proxima Nova"/>
+                <a:sym typeface="Proxima Nova"/>
+              </a:endParaRPr>
+            </a:p>
+          </p:txBody>
+        </p:sp>
+      </p:grpSp>
+    </p:spTree>
+  </p:cSld>
+  <p:clrMapOvr>
+    <a:masterClrMapping/>
+  </p:clrMapOvr>
+</p:sld>
+</file>
+
+<file path=ppt/slides/slide12.xml><?xml version="1.0" encoding="utf-8"?>
+<p:sld xmlns:a="http://schemas.openxmlformats.org/drawingml/2006/main" xmlns:r="http://schemas.openxmlformats.org/officeDocument/2006/relationships" xmlns:mc="http://schemas.openxmlformats.org/markup-compatibility/2006" xmlns:mv="urn:schemas-microsoft-com:mac:vml" xmlns:p="http://schemas.openxmlformats.org/presentationml/2006/main" xmlns:c="http://schemas.openxmlformats.org/drawingml/2006/chart" xmlns:dgm="http://schemas.openxmlformats.org/drawingml/2006/diagram" xmlns:o="urn:schemas-microsoft-com:office:office" xmlns:v="urn:schemas-microsoft-com:vml" xmlns:pvml="urn:schemas-microsoft-com:office:powerpoint" xmlns:com="http://schemas.openxmlformats.org/drawingml/2006/compatibility" xmlns:p14="http://schemas.microsoft.com/office/powerpoint/2010/main" xmlns:p15="http://schemas.microsoft.com/office/powerpoint/2012/main" xmlns:ahyp="http://schemas.microsoft.com/office/drawing/2018/hyperlinkcolor">
+  <p:cSld>
+    <p:spTree>
+      <p:nvGrpSpPr>
+        <p:cNvPr id="166" name="Shape 166"/>
+        <p:cNvGrpSpPr/>
+        <p:nvPr/>
+      </p:nvGrpSpPr>
+      <p:grpSpPr>
+        <a:xfrm>
+          <a:off x="0" y="0"/>
+          <a:ext cx="0" cy="0"/>
+          <a:chOff x="0" y="0"/>
+          <a:chExt cx="0" cy="0"/>
+        </a:xfrm>
+      </p:grpSpPr>
+      <p:sp>
+        <p:nvSpPr>
+          <p:cNvPr id="167" name="Google Shape;167;p24"/>
+          <p:cNvSpPr txBox="1"/>
+          <p:nvPr>
+            <p:ph type="title"/>
+          </p:nvPr>
+        </p:nvSpPr>
+        <p:spPr>
+          <a:xfrm>
+            <a:off x="311700" y="445025"/>
+            <a:ext cx="8520600" cy="572700"/>
+          </a:xfrm>
+          <a:prstGeom prst="rect">
+            <a:avLst/>
+          </a:prstGeom>
+        </p:spPr>
+        <p:txBody>
+          <a:bodyPr anchorCtr="0" anchor="t" bIns="91425" lIns="91425" spcFirstLastPara="1" rIns="91425" wrap="square" tIns="91425">
+            <a:normAutofit fontScale="90000"/>
+          </a:bodyPr>
+          <a:lstStyle/>
+          <a:p>
+            <a:pPr indent="0" lvl="0" marL="0" rtl="0" algn="l">
+              <a:spcBef>
+                <a:spcPts val="0"/>
+              </a:spcBef>
+              <a:spcAft>
+                <a:spcPts val="0"/>
+              </a:spcAft>
+              <a:buNone/>
+            </a:pPr>
+            <a:r>
+              <a:rPr lang="pt-BR"/>
+              <a:t>Conclusão</a:t>
+            </a:r>
+            <a:endParaRPr/>
+          </a:p>
+        </p:txBody>
+      </p:sp>
+      <p:sp>
+        <p:nvSpPr>
+          <p:cNvPr id="168" name="Google Shape;168;p24"/>
+          <p:cNvSpPr txBox="1"/>
+          <p:nvPr>
+            <p:ph idx="1" type="body"/>
+          </p:nvPr>
+        </p:nvSpPr>
+        <p:spPr>
+          <a:xfrm>
+            <a:off x="311700" y="1152475"/>
+            <a:ext cx="8520600" cy="3416400"/>
+          </a:xfrm>
+          <a:prstGeom prst="rect">
+            <a:avLst/>
+          </a:prstGeom>
+        </p:spPr>
+        <p:txBody>
+          <a:bodyPr anchorCtr="0" anchor="t" bIns="91425" lIns="91425" spcFirstLastPara="1" rIns="91425" wrap="square" tIns="91425">
+            <a:normAutofit/>
+          </a:bodyPr>
+          <a:lstStyle/>
+          <a:p>
+            <a:pPr indent="0" lvl="0" marL="0" rtl="0" algn="just">
+              <a:spcBef>
+                <a:spcPts val="0"/>
+              </a:spcBef>
+              <a:spcAft>
+                <a:spcPts val="0"/>
+              </a:spcAft>
+              <a:buNone/>
+            </a:pPr>
+            <a:r>
+              <a:rPr lang="pt-BR" sz="1200">
+                <a:solidFill>
+                  <a:schemeClr val="dk1"/>
+                </a:solidFill>
+                <a:latin typeface="Proxima Nova"/>
+                <a:ea typeface="Proxima Nova"/>
+                <a:cs typeface="Proxima Nova"/>
+                <a:sym typeface="Proxima Nova"/>
+              </a:rPr>
+              <a:t>Nosso grupo avaliou as três ferramentas como sendo, no geral, satisfatórias à problemática proposta. Apesar disso, entendemos que o EdgeQuake e o Graphify ainda não tem um nível de maturidade comparável ao do NotebookLM, que traz muitas funcionalidades indisponíveis nas outras ferramentas.</a:t>
+            </a:r>
+            <a:endParaRPr sz="1200">
+              <a:solidFill>
+                <a:schemeClr val="dk1"/>
+              </a:solidFill>
+              <a:latin typeface="Proxima Nova"/>
+              <a:ea typeface="Proxima Nova"/>
+              <a:cs typeface="Proxima Nova"/>
+              <a:sym typeface="Proxima Nova"/>
+            </a:endParaRPr>
+          </a:p>
+          <a:p>
+            <a:pPr indent="0" lvl="0" marL="0" rtl="0" algn="just">
+              <a:spcBef>
+                <a:spcPts val="1200"/>
+              </a:spcBef>
+              <a:spcAft>
+                <a:spcPts val="1200"/>
+              </a:spcAft>
+              <a:buNone/>
+            </a:pPr>
+            <a:r>
+              <a:t/>
+            </a:r>
+            <a:endParaRPr sz="1200">
+              <a:solidFill>
+                <a:schemeClr val="dk1"/>
+              </a:solidFill>
+              <a:latin typeface="Proxima Nova"/>
+              <a:ea typeface="Proxima Nova"/>
+              <a:cs typeface="Proxima Nova"/>
+              <a:sym typeface="Proxima Nova"/>
+            </a:endParaRPr>
+          </a:p>
+        </p:txBody>
+      </p:sp>
+      <p:grpSp>
+        <p:nvGrpSpPr>
+          <p:cNvPr id="169" name="Google Shape;169;p24"/>
+          <p:cNvGrpSpPr/>
+          <p:nvPr/>
+        </p:nvGrpSpPr>
+        <p:grpSpPr>
+          <a:xfrm>
+            <a:off x="3463986" y="2150489"/>
+            <a:ext cx="2216038" cy="1895310"/>
+            <a:chOff x="945914" y="1590632"/>
+            <a:chExt cx="2955900" cy="2528092"/>
+          </a:xfrm>
+        </p:grpSpPr>
+        <p:sp>
+          <p:nvSpPr>
+            <p:cNvPr id="170" name="Google Shape;170;p24"/>
+            <p:cNvSpPr/>
+            <p:nvPr/>
+          </p:nvSpPr>
+          <p:spPr>
+            <a:xfrm>
+              <a:off x="945914" y="2052324"/>
+              <a:ext cx="2955900" cy="2066400"/>
+            </a:xfrm>
+            <a:prstGeom prst="roundRect">
+              <a:avLst>
+                <a:gd fmla="val 16667" name="adj"/>
+              </a:avLst>
+            </a:prstGeom>
+            <a:solidFill>
+              <a:schemeClr val="lt2"/>
+            </a:solidFill>
+            <a:ln cap="flat" cmpd="sng" w="7125">
+              <a:solidFill>
+                <a:schemeClr val="dk2"/>
+              </a:solidFill>
+              <a:prstDash val="solid"/>
+              <a:round/>
+              <a:headEnd len="sm" w="sm" type="none"/>
+              <a:tailEnd len="sm" w="sm" type="none"/>
+            </a:ln>
+          </p:spPr>
+          <p:txBody>
+            <a:bodyPr anchorCtr="0" anchor="ctr" bIns="68550" lIns="68550" spcFirstLastPara="1" rIns="68550" wrap="square" tIns="68550">
+              <a:noAutofit/>
+            </a:bodyPr>
+            <a:lstStyle/>
+            <a:p>
+              <a:pPr indent="0" lvl="0" marL="0" rtl="0" algn="l">
+                <a:spcBef>
+                  <a:spcPts val="0"/>
+                </a:spcBef>
+                <a:spcAft>
+                  <a:spcPts val="0"/>
+                </a:spcAft>
+                <a:buNone/>
+              </a:pPr>
+              <a:r>
+                <a:rPr lang="pt-BR" sz="900">
+                  <a:latin typeface="Proxima Nova"/>
+                  <a:ea typeface="Proxima Nova"/>
+                  <a:cs typeface="Proxima Nova"/>
+                  <a:sym typeface="Proxima Nova"/>
+                </a:rPr>
+                <a:t>Pontos Fortes:</a:t>
+              </a:r>
+              <a:endParaRPr sz="900">
+                <a:latin typeface="Proxima Nova"/>
+                <a:ea typeface="Proxima Nova"/>
+                <a:cs typeface="Proxima Nova"/>
+                <a:sym typeface="Proxima Nova"/>
+              </a:endParaRPr>
+            </a:p>
+            <a:p>
+              <a:pPr indent="-244561" lvl="0" marL="374871" rtl="0" algn="l">
+                <a:spcBef>
+                  <a:spcPts val="0"/>
+                </a:spcBef>
+                <a:spcAft>
+                  <a:spcPts val="0"/>
+                </a:spcAft>
+                <a:buSzPts val="900"/>
+                <a:buFont typeface="Proxima Nova"/>
+                <a:buChar char="●"/>
+              </a:pPr>
+              <a:r>
+                <a:rPr lang="pt-BR" sz="900">
+                  <a:latin typeface="Proxima Nova"/>
+                  <a:ea typeface="Proxima Nova"/>
+                  <a:cs typeface="Proxima Nova"/>
+                  <a:sym typeface="Proxima Nova"/>
+                </a:rPr>
+                <a:t>Integração com assistentes de IA por meio da IDE, sem necessidade da criação de tokens;</a:t>
+              </a:r>
+              <a:endParaRPr sz="900">
+                <a:latin typeface="Proxima Nova"/>
+                <a:ea typeface="Proxima Nova"/>
+                <a:cs typeface="Proxima Nova"/>
+                <a:sym typeface="Proxima Nova"/>
+              </a:endParaRPr>
+            </a:p>
+            <a:p>
+              <a:pPr indent="0" lvl="0" marL="0" rtl="0" algn="l">
+                <a:spcBef>
+                  <a:spcPts val="0"/>
+                </a:spcBef>
+                <a:spcAft>
+                  <a:spcPts val="0"/>
+                </a:spcAft>
+                <a:buNone/>
+              </a:pPr>
+              <a:r>
+                <a:t/>
+              </a:r>
+              <a:endParaRPr sz="900">
+                <a:latin typeface="Proxima Nova"/>
+                <a:ea typeface="Proxima Nova"/>
+                <a:cs typeface="Proxima Nova"/>
+                <a:sym typeface="Proxima Nova"/>
+              </a:endParaRPr>
+            </a:p>
+            <a:p>
+              <a:pPr indent="0" lvl="0" marL="0" rtl="0" algn="l">
+                <a:spcBef>
+                  <a:spcPts val="0"/>
+                </a:spcBef>
+                <a:spcAft>
+                  <a:spcPts val="0"/>
+                </a:spcAft>
+                <a:buNone/>
+              </a:pPr>
+              <a:r>
+                <a:rPr lang="pt-BR" sz="900">
+                  <a:latin typeface="Proxima Nova"/>
+                  <a:ea typeface="Proxima Nova"/>
+                  <a:cs typeface="Proxima Nova"/>
+                  <a:sym typeface="Proxima Nova"/>
+                </a:rPr>
+                <a:t>Pontos Fracos:</a:t>
+              </a:r>
+              <a:endParaRPr sz="900">
+                <a:latin typeface="Proxima Nova"/>
+                <a:ea typeface="Proxima Nova"/>
+                <a:cs typeface="Proxima Nova"/>
+                <a:sym typeface="Proxima Nova"/>
+              </a:endParaRPr>
+            </a:p>
+            <a:p>
+              <a:pPr indent="-285725" lvl="0" marL="457200" rtl="0" algn="l">
+                <a:spcBef>
+                  <a:spcPts val="0"/>
+                </a:spcBef>
+                <a:spcAft>
+                  <a:spcPts val="0"/>
+                </a:spcAft>
+                <a:buSzPts val="900"/>
+                <a:buFont typeface="Proxima Nova"/>
+                <a:buChar char="●"/>
+              </a:pPr>
+              <a:r>
+                <a:rPr lang="pt-BR" sz="900">
+                  <a:latin typeface="Proxima Nova"/>
+                  <a:ea typeface="Proxima Nova"/>
+                  <a:cs typeface="Proxima Nova"/>
+                  <a:sym typeface="Proxima Nova"/>
+                </a:rPr>
+                <a:t>Não trouxe referências ao longo do texto.</a:t>
+              </a:r>
+              <a:endParaRPr sz="900">
+                <a:latin typeface="Proxima Nova"/>
+                <a:ea typeface="Proxima Nova"/>
+                <a:cs typeface="Proxima Nova"/>
+                <a:sym typeface="Proxima Nova"/>
+              </a:endParaRPr>
+            </a:p>
+          </p:txBody>
+        </p:sp>
+        <p:sp>
+          <p:nvSpPr>
+            <p:cNvPr id="171" name="Google Shape;171;p24"/>
+            <p:cNvSpPr txBox="1"/>
+            <p:nvPr/>
+          </p:nvSpPr>
+          <p:spPr>
+            <a:xfrm>
+              <a:off x="1322857" y="1590632"/>
+              <a:ext cx="2202000" cy="461700"/>
+            </a:xfrm>
+            <a:prstGeom prst="rect">
+              <a:avLst/>
+            </a:prstGeom>
+            <a:noFill/>
+            <a:ln>
+              <a:noFill/>
+            </a:ln>
+          </p:spPr>
+          <p:txBody>
+            <a:bodyPr anchorCtr="0" anchor="t" bIns="68550" lIns="68550" spcFirstLastPara="1" rIns="68550" wrap="square" tIns="68550">
+              <a:spAutoFit/>
+            </a:bodyPr>
+            <a:lstStyle/>
+            <a:p>
+              <a:pPr indent="0" lvl="0" marL="0" rtl="0" algn="ctr">
+                <a:spcBef>
+                  <a:spcPts val="0"/>
+                </a:spcBef>
+                <a:spcAft>
+                  <a:spcPts val="0"/>
+                </a:spcAft>
+                <a:buNone/>
+              </a:pPr>
+              <a:r>
+                <a:rPr lang="pt-BR" sz="1349">
+                  <a:solidFill>
+                    <a:schemeClr val="accent3"/>
+                  </a:solidFill>
+                  <a:latin typeface="Proxima Nova"/>
+                  <a:ea typeface="Proxima Nova"/>
+                  <a:cs typeface="Proxima Nova"/>
+                  <a:sym typeface="Proxima Nova"/>
+                </a:rPr>
+                <a:t>Graphify</a:t>
+              </a:r>
+              <a:endParaRPr sz="1349">
+                <a:solidFill>
+                  <a:schemeClr val="accent3"/>
+                </a:solidFill>
+                <a:latin typeface="Proxima Nova"/>
+                <a:ea typeface="Proxima Nova"/>
+                <a:cs typeface="Proxima Nova"/>
+                <a:sym typeface="Proxima Nova"/>
+              </a:endParaRPr>
+            </a:p>
+          </p:txBody>
+        </p:sp>
+      </p:grpSp>
+      <p:grpSp>
+        <p:nvGrpSpPr>
+          <p:cNvPr id="172" name="Google Shape;172;p24"/>
+          <p:cNvGrpSpPr/>
+          <p:nvPr/>
+        </p:nvGrpSpPr>
+        <p:grpSpPr>
+          <a:xfrm>
+            <a:off x="368614" y="2150470"/>
+            <a:ext cx="2215944" cy="1895217"/>
+            <a:chOff x="5145729" y="1590450"/>
+            <a:chExt cx="2702700" cy="2311523"/>
+          </a:xfrm>
+        </p:grpSpPr>
+        <p:sp>
+          <p:nvSpPr>
+            <p:cNvPr id="173" name="Google Shape;173;p24"/>
+            <p:cNvSpPr/>
+            <p:nvPr/>
+          </p:nvSpPr>
+          <p:spPr>
+            <a:xfrm>
+              <a:off x="5145729" y="2052173"/>
+              <a:ext cx="2702700" cy="1849800"/>
+            </a:xfrm>
+            <a:prstGeom prst="roundRect">
+              <a:avLst>
+                <a:gd fmla="val 16667" name="adj"/>
+              </a:avLst>
+            </a:prstGeom>
+            <a:solidFill>
+              <a:schemeClr val="lt2"/>
+            </a:solidFill>
+            <a:ln cap="flat" cmpd="sng" w="7800">
+              <a:solidFill>
+                <a:schemeClr val="dk2"/>
+              </a:solidFill>
+              <a:prstDash val="solid"/>
+              <a:round/>
+              <a:headEnd len="sm" w="sm" type="none"/>
+              <a:tailEnd len="sm" w="sm" type="none"/>
+            </a:ln>
+          </p:spPr>
+          <p:txBody>
+            <a:bodyPr anchorCtr="0" anchor="ctr" bIns="74975" lIns="74975" spcFirstLastPara="1" rIns="74975" wrap="square" tIns="74975">
+              <a:noAutofit/>
+            </a:bodyPr>
+            <a:lstStyle/>
+            <a:p>
+              <a:pPr indent="0" lvl="0" marL="0" rtl="0" algn="l">
+                <a:spcBef>
+                  <a:spcPts val="0"/>
+                </a:spcBef>
+                <a:spcAft>
+                  <a:spcPts val="0"/>
+                </a:spcAft>
+                <a:buNone/>
+              </a:pPr>
+              <a:r>
+                <a:rPr lang="pt-BR" sz="900">
+                  <a:latin typeface="Proxima Nova"/>
+                  <a:ea typeface="Proxima Nova"/>
+                  <a:cs typeface="Proxima Nova"/>
+                  <a:sym typeface="Proxima Nova"/>
+                </a:rPr>
+                <a:t>Pontos Fortes:</a:t>
+              </a:r>
+              <a:endParaRPr sz="900">
+                <a:latin typeface="Proxima Nova"/>
+                <a:ea typeface="Proxima Nova"/>
+                <a:cs typeface="Proxima Nova"/>
+                <a:sym typeface="Proxima Nova"/>
+              </a:endParaRPr>
+            </a:p>
+            <a:p>
+              <a:pPr indent="-244561" lvl="0" marL="374871" rtl="0" algn="l">
+                <a:spcBef>
+                  <a:spcPts val="0"/>
+                </a:spcBef>
+                <a:spcAft>
+                  <a:spcPts val="0"/>
+                </a:spcAft>
+                <a:buSzPts val="900"/>
+                <a:buFont typeface="Proxima Nova"/>
+                <a:buChar char="●"/>
+              </a:pPr>
+              <a:r>
+                <a:rPr lang="pt-BR" sz="900">
+                  <a:latin typeface="Proxima Nova"/>
+                  <a:ea typeface="Proxima Nova"/>
+                  <a:cs typeface="Proxima Nova"/>
+                  <a:sym typeface="Proxima Nova"/>
+                </a:rPr>
+                <a:t>Flexibilidade para integração com outras soluções;</a:t>
+              </a:r>
+              <a:endParaRPr sz="900">
+                <a:latin typeface="Proxima Nova"/>
+                <a:ea typeface="Proxima Nova"/>
+                <a:cs typeface="Proxima Nova"/>
+                <a:sym typeface="Proxima Nova"/>
+              </a:endParaRPr>
+            </a:p>
+            <a:p>
+              <a:pPr indent="-244561" lvl="0" marL="374871" rtl="0" algn="l">
+                <a:spcBef>
+                  <a:spcPts val="0"/>
+                </a:spcBef>
+                <a:spcAft>
+                  <a:spcPts val="0"/>
+                </a:spcAft>
+                <a:buSzPts val="900"/>
+                <a:buFont typeface="Proxima Nova"/>
+                <a:buChar char="●"/>
+              </a:pPr>
+              <a:r>
+                <a:rPr lang="pt-BR" sz="900">
+                  <a:latin typeface="Proxima Nova"/>
+                  <a:ea typeface="Proxima Nova"/>
+                  <a:cs typeface="Proxima Nova"/>
+                  <a:sym typeface="Proxima Nova"/>
+                </a:rPr>
+                <a:t>Facilidade de instalação.</a:t>
+              </a:r>
+              <a:endParaRPr sz="900">
+                <a:latin typeface="Proxima Nova"/>
+                <a:ea typeface="Proxima Nova"/>
+                <a:cs typeface="Proxima Nova"/>
+                <a:sym typeface="Proxima Nova"/>
+              </a:endParaRPr>
+            </a:p>
+            <a:p>
+              <a:pPr indent="0" lvl="0" marL="0" rtl="0" algn="l">
+                <a:spcBef>
+                  <a:spcPts val="0"/>
+                </a:spcBef>
+                <a:spcAft>
+                  <a:spcPts val="0"/>
+                </a:spcAft>
+                <a:buNone/>
+              </a:pPr>
+              <a:r>
+                <a:t/>
+              </a:r>
+              <a:endParaRPr sz="900">
+                <a:latin typeface="Proxima Nova"/>
+                <a:ea typeface="Proxima Nova"/>
+                <a:cs typeface="Proxima Nova"/>
+                <a:sym typeface="Proxima Nova"/>
+              </a:endParaRPr>
+            </a:p>
+            <a:p>
+              <a:pPr indent="0" lvl="0" marL="0" rtl="0" algn="l">
+                <a:spcBef>
+                  <a:spcPts val="0"/>
+                </a:spcBef>
+                <a:spcAft>
+                  <a:spcPts val="0"/>
+                </a:spcAft>
+                <a:buNone/>
+              </a:pPr>
+              <a:r>
+                <a:rPr lang="pt-BR" sz="900">
+                  <a:latin typeface="Proxima Nova"/>
+                  <a:ea typeface="Proxima Nova"/>
+                  <a:cs typeface="Proxima Nova"/>
+                  <a:sym typeface="Proxima Nova"/>
+                </a:rPr>
+                <a:t>Pontos Fracos:</a:t>
+              </a:r>
+              <a:endParaRPr sz="900">
+                <a:latin typeface="Proxima Nova"/>
+                <a:ea typeface="Proxima Nova"/>
+                <a:cs typeface="Proxima Nova"/>
+                <a:sym typeface="Proxima Nova"/>
+              </a:endParaRPr>
+            </a:p>
+            <a:p>
+              <a:pPr indent="-285725" lvl="0" marL="457200" rtl="0" algn="l">
+                <a:spcBef>
+                  <a:spcPts val="0"/>
+                </a:spcBef>
+                <a:spcAft>
+                  <a:spcPts val="0"/>
+                </a:spcAft>
+                <a:buSzPts val="900"/>
+                <a:buFont typeface="Proxima Nova"/>
+                <a:buChar char="●"/>
+              </a:pPr>
+              <a:r>
+                <a:rPr lang="pt-BR" sz="900">
+                  <a:latin typeface="Proxima Nova"/>
+                  <a:ea typeface="Proxima Nova"/>
+                  <a:cs typeface="Proxima Nova"/>
+                  <a:sym typeface="Proxima Nova"/>
+                </a:rPr>
+                <a:t>Não trouxe referências ao longo do texto.</a:t>
+              </a:r>
+              <a:endParaRPr sz="900">
+                <a:latin typeface="Proxima Nova"/>
+                <a:ea typeface="Proxima Nova"/>
+                <a:cs typeface="Proxima Nova"/>
+                <a:sym typeface="Proxima Nova"/>
+              </a:endParaRPr>
+            </a:p>
+          </p:txBody>
+        </p:sp>
+        <p:sp>
+          <p:nvSpPr>
+            <p:cNvPr id="174" name="Google Shape;174;p24"/>
+            <p:cNvSpPr txBox="1"/>
+            <p:nvPr/>
+          </p:nvSpPr>
+          <p:spPr>
+            <a:xfrm>
+              <a:off x="5587350" y="1590450"/>
+              <a:ext cx="1680600" cy="461700"/>
+            </a:xfrm>
+            <a:prstGeom prst="rect">
+              <a:avLst/>
+            </a:prstGeom>
+            <a:noFill/>
+            <a:ln>
+              <a:noFill/>
+            </a:ln>
+          </p:spPr>
+          <p:txBody>
+            <a:bodyPr anchorCtr="0" anchor="t" bIns="74975" lIns="74975" spcFirstLastPara="1" rIns="74975" wrap="square" tIns="74975">
+              <a:spAutoFit/>
+            </a:bodyPr>
+            <a:lstStyle/>
+            <a:p>
+              <a:pPr indent="0" lvl="0" marL="0" rtl="0" algn="ctr">
+                <a:spcBef>
+                  <a:spcPts val="0"/>
+                </a:spcBef>
+                <a:spcAft>
+                  <a:spcPts val="0"/>
+                </a:spcAft>
+                <a:buNone/>
+              </a:pPr>
+              <a:r>
+                <a:rPr lang="pt-BR" sz="1476">
+                  <a:solidFill>
+                    <a:schemeClr val="accent3"/>
+                  </a:solidFill>
+                  <a:latin typeface="Proxima Nova"/>
+                  <a:ea typeface="Proxima Nova"/>
+                  <a:cs typeface="Proxima Nova"/>
+                  <a:sym typeface="Proxima Nova"/>
+                </a:rPr>
+                <a:t>EdgeQuake</a:t>
+              </a:r>
+              <a:endParaRPr sz="1476">
+                <a:solidFill>
+                  <a:schemeClr val="accent3"/>
+                </a:solidFill>
+                <a:latin typeface="Proxima Nova"/>
+                <a:ea typeface="Proxima Nova"/>
+                <a:cs typeface="Proxima Nova"/>
+                <a:sym typeface="Proxima Nova"/>
+              </a:endParaRPr>
+            </a:p>
+          </p:txBody>
+        </p:sp>
+      </p:grpSp>
+      <p:grpSp>
+        <p:nvGrpSpPr>
+          <p:cNvPr id="175" name="Google Shape;175;p24"/>
+          <p:cNvGrpSpPr/>
+          <p:nvPr/>
+        </p:nvGrpSpPr>
+        <p:grpSpPr>
+          <a:xfrm>
+            <a:off x="6559439" y="2150558"/>
+            <a:ext cx="2215944" cy="1895217"/>
+            <a:chOff x="5145729" y="1590450"/>
+            <a:chExt cx="2702700" cy="2311523"/>
+          </a:xfrm>
+        </p:grpSpPr>
+        <p:sp>
+          <p:nvSpPr>
+            <p:cNvPr id="176" name="Google Shape;176;p24"/>
+            <p:cNvSpPr/>
+            <p:nvPr/>
+          </p:nvSpPr>
+          <p:spPr>
+            <a:xfrm>
+              <a:off x="5145729" y="2052173"/>
+              <a:ext cx="2702700" cy="1849800"/>
+            </a:xfrm>
+            <a:prstGeom prst="roundRect">
+              <a:avLst>
+                <a:gd fmla="val 16667" name="adj"/>
+              </a:avLst>
+            </a:prstGeom>
+            <a:solidFill>
+              <a:schemeClr val="lt2"/>
+            </a:solidFill>
+            <a:ln cap="flat" cmpd="sng" w="7800">
+              <a:solidFill>
+                <a:schemeClr val="dk2"/>
+              </a:solidFill>
+              <a:prstDash val="solid"/>
+              <a:round/>
+              <a:headEnd len="sm" w="sm" type="none"/>
+              <a:tailEnd len="sm" w="sm" type="none"/>
+            </a:ln>
+          </p:spPr>
+          <p:txBody>
+            <a:bodyPr anchorCtr="0" anchor="ctr" bIns="74975" lIns="74975" spcFirstLastPara="1" rIns="74975" wrap="square" tIns="74975">
+              <a:noAutofit/>
+            </a:bodyPr>
+            <a:lstStyle/>
+            <a:p>
+              <a:pPr indent="0" lvl="0" marL="0" rtl="0" algn="l">
+                <a:spcBef>
+                  <a:spcPts val="0"/>
+                </a:spcBef>
+                <a:spcAft>
+                  <a:spcPts val="0"/>
+                </a:spcAft>
+                <a:buNone/>
+              </a:pPr>
+              <a:r>
+                <a:rPr lang="pt-BR" sz="900">
+                  <a:latin typeface="Proxima Nova"/>
+                  <a:ea typeface="Proxima Nova"/>
+                  <a:cs typeface="Proxima Nova"/>
+                  <a:sym typeface="Proxima Nova"/>
+                </a:rPr>
+                <a:t>Pontos Fortes:</a:t>
+              </a:r>
+              <a:endParaRPr sz="900">
+                <a:latin typeface="Proxima Nova"/>
+                <a:ea typeface="Proxima Nova"/>
+                <a:cs typeface="Proxima Nova"/>
+                <a:sym typeface="Proxima Nova"/>
+              </a:endParaRPr>
+            </a:p>
+            <a:p>
+              <a:pPr indent="-244561" lvl="0" marL="374871" rtl="0" algn="l">
+                <a:spcBef>
+                  <a:spcPts val="0"/>
+                </a:spcBef>
+                <a:spcAft>
+                  <a:spcPts val="0"/>
+                </a:spcAft>
+                <a:buSzPts val="900"/>
+                <a:buFont typeface="Proxima Nova"/>
+                <a:buChar char="●"/>
+              </a:pPr>
+              <a:r>
+                <a:rPr lang="pt-BR" sz="900">
+                  <a:latin typeface="Proxima Nova"/>
+                  <a:ea typeface="Proxima Nova"/>
+                  <a:cs typeface="Proxima Nova"/>
+                  <a:sym typeface="Proxima Nova"/>
+                </a:rPr>
+                <a:t>Trouxe referências para cada afirmação feita.</a:t>
+              </a:r>
+              <a:endParaRPr sz="900">
+                <a:latin typeface="Proxima Nova"/>
+                <a:ea typeface="Proxima Nova"/>
+                <a:cs typeface="Proxima Nova"/>
+                <a:sym typeface="Proxima Nova"/>
+              </a:endParaRPr>
+            </a:p>
+            <a:p>
+              <a:pPr indent="0" lvl="0" marL="0" rtl="0" algn="l">
+                <a:spcBef>
+                  <a:spcPts val="0"/>
+                </a:spcBef>
+                <a:spcAft>
+                  <a:spcPts val="0"/>
+                </a:spcAft>
+                <a:buNone/>
+              </a:pPr>
+              <a:r>
+                <a:t/>
+              </a:r>
+              <a:endParaRPr sz="900">
+                <a:latin typeface="Proxima Nova"/>
+                <a:ea typeface="Proxima Nova"/>
+                <a:cs typeface="Proxima Nova"/>
+                <a:sym typeface="Proxima Nova"/>
+              </a:endParaRPr>
+            </a:p>
+            <a:p>
+              <a:pPr indent="0" lvl="0" marL="0" rtl="0" algn="l">
+                <a:spcBef>
+                  <a:spcPts val="0"/>
+                </a:spcBef>
+                <a:spcAft>
+                  <a:spcPts val="0"/>
+                </a:spcAft>
+                <a:buNone/>
+              </a:pPr>
+              <a:r>
+                <a:rPr lang="pt-BR" sz="900">
+                  <a:latin typeface="Proxima Nova"/>
+                  <a:ea typeface="Proxima Nova"/>
+                  <a:cs typeface="Proxima Nova"/>
+                  <a:sym typeface="Proxima Nova"/>
+                </a:rPr>
+                <a:t>Pontos Fracos:</a:t>
+              </a:r>
+              <a:endParaRPr sz="900">
+                <a:latin typeface="Proxima Nova"/>
+                <a:ea typeface="Proxima Nova"/>
+                <a:cs typeface="Proxima Nova"/>
+                <a:sym typeface="Proxima Nova"/>
+              </a:endParaRPr>
+            </a:p>
+            <a:p>
+              <a:pPr indent="-285725" lvl="0" marL="457200" rtl="0" algn="l">
+                <a:spcBef>
+                  <a:spcPts val="0"/>
+                </a:spcBef>
+                <a:spcAft>
+                  <a:spcPts val="0"/>
+                </a:spcAft>
+                <a:buSzPts val="900"/>
+                <a:buFont typeface="Proxima Nova"/>
+                <a:buChar char="●"/>
+              </a:pPr>
+              <a:r>
+                <a:rPr lang="pt-BR" sz="900">
+                  <a:latin typeface="Proxima Nova"/>
+                  <a:ea typeface="Proxima Nova"/>
+                  <a:cs typeface="Proxima Nova"/>
+                  <a:sym typeface="Proxima Nova"/>
+                </a:rPr>
+                <a:t>Não deve ser utilizado com informações privadas ou </a:t>
+              </a:r>
+              <a:r>
+                <a:rPr lang="pt-BR" sz="900">
+                  <a:latin typeface="Proxima Nova"/>
+                  <a:ea typeface="Proxima Nova"/>
+                  <a:cs typeface="Proxima Nova"/>
+                  <a:sym typeface="Proxima Nova"/>
+                </a:rPr>
+                <a:t>sigilosas</a:t>
+              </a:r>
+              <a:r>
+                <a:rPr lang="pt-BR" sz="900">
+                  <a:latin typeface="Proxima Nova"/>
+                  <a:ea typeface="Proxima Nova"/>
+                  <a:cs typeface="Proxima Nova"/>
+                  <a:sym typeface="Proxima Nova"/>
+                </a:rPr>
+                <a:t>.</a:t>
+              </a:r>
+              <a:endParaRPr sz="900">
+                <a:latin typeface="Proxima Nova"/>
+                <a:ea typeface="Proxima Nova"/>
+                <a:cs typeface="Proxima Nova"/>
+                <a:sym typeface="Proxima Nova"/>
+              </a:endParaRPr>
+            </a:p>
+          </p:txBody>
+        </p:sp>
+        <p:sp>
+          <p:nvSpPr>
+            <p:cNvPr id="177" name="Google Shape;177;p24"/>
+            <p:cNvSpPr txBox="1"/>
+            <p:nvPr/>
+          </p:nvSpPr>
+          <p:spPr>
+            <a:xfrm>
+              <a:off x="5587350" y="1590450"/>
+              <a:ext cx="1680600" cy="461700"/>
+            </a:xfrm>
+            <a:prstGeom prst="rect">
+              <a:avLst/>
+            </a:prstGeom>
+            <a:noFill/>
+            <a:ln>
+              <a:noFill/>
+            </a:ln>
+          </p:spPr>
+          <p:txBody>
+            <a:bodyPr anchorCtr="0" anchor="t" bIns="74975" lIns="74975" spcFirstLastPara="1" rIns="74975" wrap="square" tIns="74975">
+              <a:spAutoFit/>
+            </a:bodyPr>
+            <a:lstStyle/>
+            <a:p>
+              <a:pPr indent="0" lvl="0" marL="0" rtl="0" algn="ctr">
+                <a:spcBef>
+                  <a:spcPts val="0"/>
+                </a:spcBef>
+                <a:spcAft>
+                  <a:spcPts val="0"/>
+                </a:spcAft>
+                <a:buNone/>
+              </a:pPr>
+              <a:r>
+                <a:rPr lang="pt-BR" sz="1476">
+                  <a:solidFill>
+                    <a:schemeClr val="accent3"/>
+                  </a:solidFill>
+                  <a:latin typeface="Proxima Nova"/>
+                  <a:ea typeface="Proxima Nova"/>
+                  <a:cs typeface="Proxima Nova"/>
+                  <a:sym typeface="Proxima Nova"/>
+                </a:rPr>
+                <a:t>NotebookLM</a:t>
+              </a:r>
+              <a:endParaRPr sz="1476">
+                <a:solidFill>
+                  <a:schemeClr val="accent3"/>
+                </a:solidFill>
+                <a:latin typeface="Proxima Nova"/>
+                <a:ea typeface="Proxima Nova"/>
+                <a:cs typeface="Proxima Nova"/>
+                <a:sym typeface="Proxima Nova"/>
+              </a:endParaRPr>
+            </a:p>
+          </p:txBody>
+        </p:sp>
+      </p:grpSp>
+    </p:spTree>
+  </p:cSld>
+  <p:clrMapOvr>
+    <a:masterClrMapping/>
+  </p:clrMapOvr>
+</p:sld>
+</file>
+
 <file path=ppt/slides/slide2.xml><?xml version="1.0" encoding="utf-8"?>
 <p:sld xmlns:a="http://schemas.openxmlformats.org/drawingml/2006/main" xmlns:r="http://schemas.openxmlformats.org/officeDocument/2006/relationships" xmlns:mc="http://schemas.openxmlformats.org/markup-compatibility/2006" xmlns:mv="urn:schemas-microsoft-com:mac:vml" xmlns:p="http://schemas.openxmlformats.org/presentationml/2006/main" xmlns:c="http://schemas.openxmlformats.org/drawingml/2006/chart" xmlns:dgm="http://schemas.openxmlformats.org/drawingml/2006/diagram" xmlns:o="urn:schemas-microsoft-com:office:office" xmlns:v="urn:schemas-microsoft-com:vml" xmlns:pvml="urn:schemas-microsoft-com:office:powerpoint" xmlns:com="http://schemas.openxmlformats.org/drawingml/2006/compatibility" xmlns:p14="http://schemas.microsoft.com/office/powerpoint/2010/main" xmlns:p15="http://schemas.microsoft.com/office/powerpoint/2012/main" xmlns:ahyp="http://schemas.microsoft.com/office/drawing/2018/hyperlinkcolor">
   <p:cSld>
@@ -6878,7 +9723,7 @@
             </a:pPr>
             <a:r>
               <a:rPr lang="pt-BR"/>
-              <a:t>Problema vs. Tema</a:t>
+              <a:t>Introdução</a:t>
             </a:r>
             <a:endParaRPr/>
           </a:p>
@@ -6892,10 +9737,10 @@
         </p:nvGrpSpPr>
         <p:grpSpPr>
           <a:xfrm>
-            <a:off x="1286550" y="1590625"/>
-            <a:ext cx="2702700" cy="2311500"/>
-            <a:chOff x="945925" y="1590625"/>
-            <a:chExt cx="2702700" cy="2311500"/>
+            <a:off x="3463986" y="1624064"/>
+            <a:ext cx="2216038" cy="1895310"/>
+            <a:chOff x="945914" y="1590632"/>
+            <a:chExt cx="2955900" cy="2528092"/>
           </a:xfrm>
         </p:grpSpPr>
         <p:sp>
@@ -6906,8 +9751,8 @@
           </p:nvSpPr>
           <p:spPr>
             <a:xfrm>
-              <a:off x="945925" y="2052325"/>
-              <a:ext cx="2702700" cy="1849800"/>
+              <a:off x="945914" y="2052324"/>
+              <a:ext cx="2955900" cy="2066400"/>
             </a:xfrm>
             <a:prstGeom prst="roundRect">
               <a:avLst>
@@ -6917,7 +9762,7 @@
             <a:solidFill>
               <a:schemeClr val="lt2"/>
             </a:solidFill>
-            <a:ln cap="flat" cmpd="sng" w="9525">
+            <a:ln cap="flat" cmpd="sng" w="7125">
               <a:solidFill>
                 <a:schemeClr val="dk2"/>
               </a:solidFill>
@@ -6928,7 +9773,7 @@
             </a:ln>
           </p:spPr>
           <p:txBody>
-            <a:bodyPr anchorCtr="0" anchor="ctr" bIns="91425" lIns="91425" spcFirstLastPara="1" rIns="91425" wrap="square" tIns="91425">
+            <a:bodyPr anchorCtr="0" anchor="ctr" bIns="68550" lIns="68550" spcFirstLastPara="1" rIns="68550" wrap="square" tIns="68550">
               <a:noAutofit/>
             </a:bodyPr>
             <a:lstStyle/>
@@ -6943,16 +9788,16 @@
                 <a:buNone/>
               </a:pPr>
               <a:r>
-                <a:rPr lang="pt-BR">
+                <a:rPr lang="pt-BR" sz="1200">
                   <a:latin typeface="Proxima Nova"/>
                   <a:ea typeface="Proxima Nova"/>
                   <a:cs typeface="Proxima Nova"/>
                   <a:sym typeface="Proxima Nova"/>
                 </a:rPr>
-                <a:t>Uma </a:t>
+                <a:t>Obter uma </a:t>
               </a:r>
               <a:r>
-                <a:rPr b="1" lang="pt-BR">
+                <a:rPr b="1" lang="pt-BR" sz="1200">
                   <a:latin typeface="Proxima Nova"/>
                   <a:ea typeface="Proxima Nova"/>
                   <a:cs typeface="Proxima Nova"/>
@@ -6961,33 +9806,15 @@
                 <a:t>visão geral de técnicas</a:t>
               </a:r>
               <a:r>
-                <a:rPr lang="pt-BR">
+                <a:rPr lang="pt-BR" sz="1200">
                   <a:latin typeface="Proxima Nova"/>
                   <a:ea typeface="Proxima Nova"/>
                   <a:cs typeface="Proxima Nova"/>
                   <a:sym typeface="Proxima Nova"/>
                 </a:rPr>
-                <a:t> e requisitos necessários para implementação de métodos de treinamento de </a:t>
+                <a:t> e requisitos necessários para implementação dos diferentes métodos de treinamento eficiente em LLM.</a:t>
               </a:r>
-              <a:r>
-                <a:rPr b="1" lang="pt-BR">
-                  <a:latin typeface="Proxima Nova"/>
-                  <a:ea typeface="Proxima Nova"/>
-                  <a:cs typeface="Proxima Nova"/>
-                  <a:sym typeface="Proxima Nova"/>
-                </a:rPr>
-                <a:t>dados específicos</a:t>
-              </a:r>
-              <a:r>
-                <a:rPr lang="pt-BR">
-                  <a:latin typeface="Proxima Nova"/>
-                  <a:ea typeface="Proxima Nova"/>
-                  <a:cs typeface="Proxima Nova"/>
-                  <a:sym typeface="Proxima Nova"/>
-                </a:rPr>
-                <a:t> em LLM. Qual método utilizar para uma dada natureza de dados ou tarefa?</a:t>
-              </a:r>
-              <a:endParaRPr>
+              <a:endParaRPr sz="1200">
                 <a:latin typeface="Proxima Nova"/>
                 <a:ea typeface="Proxima Nova"/>
                 <a:cs typeface="Proxima Nova"/>
@@ -7004,8 +9831,8 @@
           </p:nvSpPr>
           <p:spPr>
             <a:xfrm>
-              <a:off x="1456975" y="1590625"/>
-              <a:ext cx="1680600" cy="461700"/>
+              <a:off x="1322857" y="1590632"/>
+              <a:ext cx="2202000" cy="461700"/>
             </a:xfrm>
             <a:prstGeom prst="rect">
               <a:avLst/>
@@ -7016,7 +9843,7 @@
             </a:ln>
           </p:spPr>
           <p:txBody>
-            <a:bodyPr anchorCtr="0" anchor="t" bIns="91425" lIns="91425" spcFirstLastPara="1" rIns="91425" wrap="square" tIns="91425">
+            <a:bodyPr anchorCtr="0" anchor="t" bIns="68550" lIns="68550" spcFirstLastPara="1" rIns="68550" wrap="square" tIns="68550">
               <a:spAutoFit/>
             </a:bodyPr>
             <a:lstStyle/>
@@ -7031,7 +9858,7 @@
                 <a:buNone/>
               </a:pPr>
               <a:r>
-                <a:rPr lang="pt-BR" sz="1800">
+                <a:rPr lang="pt-BR" sz="1349">
                   <a:solidFill>
                     <a:schemeClr val="accent3"/>
                   </a:solidFill>
@@ -7040,9 +9867,9 @@
                   <a:cs typeface="Proxima Nova"/>
                   <a:sym typeface="Proxima Nova"/>
                 </a:rPr>
-                <a:t>PROBLEMA</a:t>
+                <a:t>Problemática</a:t>
               </a:r>
-              <a:endParaRPr sz="1800">
+              <a:endParaRPr sz="1349">
                 <a:solidFill>
                   <a:schemeClr val="accent3"/>
                 </a:solidFill>
@@ -7063,10 +9890,10 @@
         </p:nvGrpSpPr>
         <p:grpSpPr>
           <a:xfrm>
-            <a:off x="5247675" y="1590625"/>
-            <a:ext cx="2702700" cy="2311500"/>
-            <a:chOff x="5076300" y="1590625"/>
-            <a:chExt cx="2702700" cy="2311500"/>
+            <a:off x="368614" y="1624045"/>
+            <a:ext cx="2215944" cy="1895217"/>
+            <a:chOff x="5145729" y="1590450"/>
+            <a:chExt cx="2702700" cy="2311523"/>
           </a:xfrm>
         </p:grpSpPr>
         <p:sp>
@@ -7077,7 +9904,7 @@
           </p:nvSpPr>
           <p:spPr>
             <a:xfrm>
-              <a:off x="5076300" y="2052325"/>
+              <a:off x="5145729" y="2052173"/>
               <a:ext cx="2702700" cy="1849800"/>
             </a:xfrm>
             <a:prstGeom prst="roundRect">
@@ -7088,7 +9915,7 @@
             <a:solidFill>
               <a:schemeClr val="lt2"/>
             </a:solidFill>
-            <a:ln cap="flat" cmpd="sng" w="9525">
+            <a:ln cap="flat" cmpd="sng" w="7800">
               <a:solidFill>
                 <a:schemeClr val="dk2"/>
               </a:solidFill>
@@ -7099,7 +9926,7 @@
             </a:ln>
           </p:spPr>
           <p:txBody>
-            <a:bodyPr anchorCtr="0" anchor="ctr" bIns="91425" lIns="91425" spcFirstLastPara="1" rIns="91425" wrap="square" tIns="91425">
+            <a:bodyPr anchorCtr="0" anchor="ctr" bIns="74975" lIns="74975" spcFirstLastPara="1" rIns="74975" wrap="square" tIns="74975">
               <a:noAutofit/>
             </a:bodyPr>
             <a:lstStyle/>
@@ -7114,15 +9941,15 @@
                 <a:buNone/>
               </a:pPr>
               <a:r>
-                <a:rPr lang="pt-BR">
+                <a:rPr lang="pt-BR" sz="1200">
                   <a:latin typeface="Proxima Nova"/>
                   <a:ea typeface="Proxima Nova"/>
                   <a:cs typeface="Proxima Nova"/>
                   <a:sym typeface="Proxima Nova"/>
                 </a:rPr>
-                <a:t>Fine-Tuning e seus diversos métodos e variações.</a:t>
+                <a:t>Fine-tuning e seus diversos métodos e variações.</a:t>
               </a:r>
-              <a:endParaRPr>
+              <a:endParaRPr sz="1200">
                 <a:latin typeface="Proxima Nova"/>
                 <a:ea typeface="Proxima Nova"/>
                 <a:cs typeface="Proxima Nova"/>
@@ -7139,7 +9966,7 @@
           </p:nvSpPr>
           <p:spPr>
             <a:xfrm>
-              <a:off x="5587350" y="1590625"/>
+              <a:off x="5587350" y="1590450"/>
               <a:ext cx="1680600" cy="461700"/>
             </a:xfrm>
             <a:prstGeom prst="rect">
@@ -7151,7 +9978,7 @@
             </a:ln>
           </p:spPr>
           <p:txBody>
-            <a:bodyPr anchorCtr="0" anchor="t" bIns="91425" lIns="91425" spcFirstLastPara="1" rIns="91425" wrap="square" tIns="91425">
+            <a:bodyPr anchorCtr="0" anchor="t" bIns="74975" lIns="74975" spcFirstLastPara="1" rIns="74975" wrap="square" tIns="74975">
               <a:spAutoFit/>
             </a:bodyPr>
             <a:lstStyle/>
@@ -7166,7 +9993,7 @@
                 <a:buNone/>
               </a:pPr>
               <a:r>
-                <a:rPr lang="pt-BR" sz="1800">
+                <a:rPr lang="pt-BR" sz="1476">
                   <a:solidFill>
                     <a:schemeClr val="accent3"/>
                   </a:solidFill>
@@ -7175,9 +10002,171 @@
                   <a:cs typeface="Proxima Nova"/>
                   <a:sym typeface="Proxima Nova"/>
                 </a:rPr>
-                <a:t>TEMA</a:t>
+                <a:t>Tema</a:t>
               </a:r>
-              <a:endParaRPr sz="1800">
+              <a:endParaRPr sz="1476">
+                <a:solidFill>
+                  <a:schemeClr val="accent3"/>
+                </a:solidFill>
+                <a:latin typeface="Proxima Nova"/>
+                <a:ea typeface="Proxima Nova"/>
+                <a:cs typeface="Proxima Nova"/>
+                <a:sym typeface="Proxima Nova"/>
+              </a:endParaRPr>
+            </a:p>
+          </p:txBody>
+        </p:sp>
+      </p:grpSp>
+      <p:grpSp>
+        <p:nvGrpSpPr>
+          <p:cNvPr id="77" name="Google Shape;77;p14"/>
+          <p:cNvGrpSpPr/>
+          <p:nvPr/>
+        </p:nvGrpSpPr>
+        <p:grpSpPr>
+          <a:xfrm>
+            <a:off x="6559439" y="1624133"/>
+            <a:ext cx="2215944" cy="1895217"/>
+            <a:chOff x="5145729" y="1590450"/>
+            <a:chExt cx="2702700" cy="2311523"/>
+          </a:xfrm>
+        </p:grpSpPr>
+        <p:sp>
+          <p:nvSpPr>
+            <p:cNvPr id="78" name="Google Shape;78;p14"/>
+            <p:cNvSpPr/>
+            <p:nvPr/>
+          </p:nvSpPr>
+          <p:spPr>
+            <a:xfrm>
+              <a:off x="5145729" y="2052173"/>
+              <a:ext cx="2702700" cy="1849800"/>
+            </a:xfrm>
+            <a:prstGeom prst="roundRect">
+              <a:avLst>
+                <a:gd fmla="val 16667" name="adj"/>
+              </a:avLst>
+            </a:prstGeom>
+            <a:solidFill>
+              <a:schemeClr val="lt2"/>
+            </a:solidFill>
+            <a:ln cap="flat" cmpd="sng" w="7800">
+              <a:solidFill>
+                <a:schemeClr val="dk2"/>
+              </a:solidFill>
+              <a:prstDash val="solid"/>
+              <a:round/>
+              <a:headEnd len="sm" w="sm" type="none"/>
+              <a:tailEnd len="sm" w="sm" type="none"/>
+            </a:ln>
+          </p:spPr>
+          <p:txBody>
+            <a:bodyPr anchorCtr="0" anchor="ctr" bIns="74975" lIns="74975" spcFirstLastPara="1" rIns="74975" wrap="square" tIns="74975">
+              <a:noAutofit/>
+            </a:bodyPr>
+            <a:lstStyle/>
+            <a:p>
+              <a:pPr indent="0" lvl="0" marL="0" rtl="0" algn="ctr">
+                <a:spcBef>
+                  <a:spcPts val="0"/>
+                </a:spcBef>
+                <a:spcAft>
+                  <a:spcPts val="0"/>
+                </a:spcAft>
+                <a:buNone/>
+              </a:pPr>
+              <a:r>
+                <a:rPr lang="pt-BR" sz="1200">
+                  <a:latin typeface="Proxima Nova"/>
+                  <a:ea typeface="Proxima Nova"/>
+                  <a:cs typeface="Proxima Nova"/>
+                  <a:sym typeface="Proxima Nova"/>
+                </a:rPr>
+                <a:t>Assistir a compreensão das técnicas e </a:t>
+              </a:r>
+              <a:r>
+                <a:rPr b="1" lang="pt-BR" sz="1200">
+                  <a:latin typeface="Proxima Nova"/>
+                  <a:ea typeface="Proxima Nova"/>
+                  <a:cs typeface="Proxima Nova"/>
+                  <a:sym typeface="Proxima Nova"/>
+                </a:rPr>
+                <a:t>agilizar</a:t>
+              </a:r>
+              <a:r>
+                <a:rPr lang="pt-BR" sz="1200">
+                  <a:latin typeface="Proxima Nova"/>
+                  <a:ea typeface="Proxima Nova"/>
+                  <a:cs typeface="Proxima Nova"/>
+                  <a:sym typeface="Proxima Nova"/>
+                </a:rPr>
+                <a:t> a </a:t>
+              </a:r>
+              <a:r>
+                <a:rPr lang="pt-BR" sz="1200">
+                  <a:latin typeface="Proxima Nova"/>
+                  <a:ea typeface="Proxima Nova"/>
+                  <a:cs typeface="Proxima Nova"/>
+                  <a:sym typeface="Proxima Nova"/>
+                </a:rPr>
+                <a:t>tomada de decisões de implementação, considerando especialmente um usuário com pouca experiência.</a:t>
+              </a:r>
+              <a:endParaRPr sz="1200">
+                <a:latin typeface="Proxima Nova"/>
+                <a:ea typeface="Proxima Nova"/>
+                <a:cs typeface="Proxima Nova"/>
+                <a:sym typeface="Proxima Nova"/>
+              </a:endParaRPr>
+            </a:p>
+          </p:txBody>
+        </p:sp>
+        <p:sp>
+          <p:nvSpPr>
+            <p:cNvPr id="79" name="Google Shape;79;p14"/>
+            <p:cNvSpPr txBox="1"/>
+            <p:nvPr/>
+          </p:nvSpPr>
+          <p:spPr>
+            <a:xfrm>
+              <a:off x="5587350" y="1590450"/>
+              <a:ext cx="1680600" cy="461700"/>
+            </a:xfrm>
+            <a:prstGeom prst="rect">
+              <a:avLst/>
+            </a:prstGeom>
+            <a:noFill/>
+            <a:ln>
+              <a:noFill/>
+            </a:ln>
+          </p:spPr>
+          <p:txBody>
+            <a:bodyPr anchorCtr="0" anchor="t" bIns="74975" lIns="74975" spcFirstLastPara="1" rIns="74975" wrap="square" tIns="74975">
+              <a:spAutoFit/>
+            </a:bodyPr>
+            <a:lstStyle/>
+            <a:p>
+              <a:pPr indent="0" lvl="0" marL="0" rtl="0" algn="ctr">
+                <a:spcBef>
+                  <a:spcPts val="0"/>
+                </a:spcBef>
+                <a:spcAft>
+                  <a:spcPts val="0"/>
+                </a:spcAft>
+                <a:buNone/>
+              </a:pPr>
+              <a:r>
+                <a:rPr lang="pt-BR" sz="1476">
+                  <a:solidFill>
+                    <a:schemeClr val="accent3"/>
+                  </a:solidFill>
+                  <a:latin typeface="Proxima Nova"/>
+                  <a:ea typeface="Proxima Nova"/>
+                  <a:cs typeface="Proxima Nova"/>
+                  <a:sym typeface="Proxima Nova"/>
+                </a:rPr>
+                <a:t>Justificativa</a:t>
+              </a:r>
+              <a:endParaRPr sz="1476">
                 <a:solidFill>
                   <a:schemeClr val="accent3"/>
                 </a:solidFill>
@@ -7203,7 +10192,7 @@
   <p:cSld>
     <p:spTree>
       <p:nvGrpSpPr>
-        <p:cNvPr id="80" name="Shape 80"/>
+        <p:cNvPr id="83" name="Shape 83"/>
         <p:cNvGrpSpPr/>
         <p:nvPr/>
       </p:nvGrpSpPr>
@@ -7217,7 +10206,7 @@
       </p:grpSpPr>
       <p:sp>
         <p:nvSpPr>
-          <p:cNvPr id="81" name="Google Shape;81;p15"/>
+          <p:cNvPr id="84" name="Google Shape;84;p15"/>
           <p:cNvSpPr txBox="1"/>
           <p:nvPr>
             <p:ph type="title"/>
@@ -7257,7 +10246,7 @@
       </p:sp>
       <p:sp>
         <p:nvSpPr>
-          <p:cNvPr id="82" name="Google Shape;82;p15"/>
+          <p:cNvPr id="85" name="Google Shape;85;p15"/>
           <p:cNvSpPr txBox="1"/>
           <p:nvPr>
             <p:ph idx="1" type="body"/>
@@ -7278,9 +10267,41 @@
           </a:bodyPr>
           <a:lstStyle/>
           <a:p>
-            <a:pPr indent="-342900" lvl="0" marL="457200" rtl="0" algn="just">
-              <a:spcBef>
-                <a:spcPts val="0"/>
+            <a:pPr indent="0" lvl="0" marL="0" rtl="0" algn="just">
+              <a:spcBef>
+                <a:spcPts val="0"/>
+              </a:spcBef>
+              <a:spcAft>
+                <a:spcPts val="0"/>
+              </a:spcAft>
+              <a:buNone/>
+            </a:pPr>
+            <a:r>
+              <a:rPr lang="pt-BR" sz="1200">
+                <a:solidFill>
+                  <a:schemeClr val="dk1"/>
+                </a:solidFill>
+                <a:latin typeface="Proxima Nova"/>
+                <a:ea typeface="Proxima Nova"/>
+                <a:cs typeface="Proxima Nova"/>
+                <a:sym typeface="Proxima Nova"/>
+              </a:rPr>
+              <a:t>Tendo em vista alcançar a compreensão das técnicas de forma assistida por LLM, planejamos os seguintes passos:</a:t>
+            </a:r>
+            <a:endParaRPr sz="1200">
+              <a:solidFill>
+                <a:schemeClr val="dk1"/>
+              </a:solidFill>
+              <a:latin typeface="Proxima Nova"/>
+              <a:ea typeface="Proxima Nova"/>
+              <a:cs typeface="Proxima Nova"/>
+              <a:sym typeface="Proxima Nova"/>
+            </a:endParaRPr>
+          </a:p>
+          <a:p>
+            <a:pPr indent="-304800" lvl="0" marL="457200" rtl="0" algn="just">
+              <a:spcBef>
+                <a:spcPts val="1200"/>
               </a:spcBef>
               <a:spcAft>
                 <a:spcPts val="0"/>
@@ -7288,12 +10309,12 @@
               <a:buClr>
                 <a:schemeClr val="dk1"/>
               </a:buClr>
-              <a:buSzPts val="1800"/>
+              <a:buSzPts val="1200"/>
               <a:buFont typeface="Proxima Nova"/>
               <a:buAutoNum type="arabicPeriod"/>
             </a:pPr>
             <a:r>
-              <a:rPr lang="pt-BR">
+              <a:rPr lang="pt-BR" sz="1200">
                 <a:solidFill>
                   <a:schemeClr val="dk1"/>
                 </a:solidFill>
@@ -7305,7 +10326,7 @@
               <a:t>Coletar um </a:t>
             </a:r>
             <a:r>
-              <a:rPr b="1" lang="pt-BR">
+              <a:rPr b="1" lang="pt-BR" sz="1200">
                 <a:solidFill>
                   <a:schemeClr val="dk1"/>
                 </a:solidFill>
@@ -7317,7 +10338,7 @@
               <a:t>acervo de materiais</a:t>
             </a:r>
             <a:r>
-              <a:rPr lang="pt-BR">
+              <a:rPr lang="pt-BR" sz="1200">
                 <a:solidFill>
                   <a:schemeClr val="dk1"/>
                 </a:solidFill>
@@ -7329,7 +10350,7 @@
               <a:t> relacionados ao </a:t>
             </a:r>
             <a:r>
-              <a:rPr b="1" lang="pt-BR">
+              <a:rPr b="1" lang="pt-BR" sz="1200">
                 <a:solidFill>
                   <a:schemeClr val="dk1"/>
                 </a:solidFill>
@@ -7341,7 +10362,7 @@
               <a:t>tema de </a:t>
             </a:r>
             <a:r>
-              <a:rPr b="1" i="1" lang="pt-BR">
+              <a:rPr b="1" i="1" lang="pt-BR" sz="1200">
                 <a:solidFill>
                   <a:schemeClr val="dk1"/>
                 </a:solidFill>
@@ -7353,7 +10374,7 @@
               <a:t>Fine-Tuning </a:t>
             </a:r>
             <a:r>
-              <a:rPr b="1" lang="pt-BR">
+              <a:rPr b="1" lang="pt-BR" sz="1200">
                 <a:solidFill>
                   <a:schemeClr val="dk1"/>
                 </a:solidFill>
@@ -7365,7 +10386,7 @@
               <a:t>(FT)</a:t>
             </a:r>
             <a:r>
-              <a:rPr lang="pt-BR">
+              <a:rPr lang="pt-BR" sz="1200">
                 <a:solidFill>
                   <a:schemeClr val="dk1"/>
                 </a:solidFill>
@@ -7376,7 +10397,7 @@
               </a:rPr>
               <a:t> e detalhamento e aplicações de seus métodos;</a:t>
             </a:r>
-            <a:endParaRPr>
+            <a:endParaRPr sz="1200">
               <a:solidFill>
                 <a:schemeClr val="dk1"/>
               </a:solidFill>
@@ -7387,7 +10408,7 @@
             </a:endParaRPr>
           </a:p>
           <a:p>
-            <a:pPr indent="-342900" lvl="0" marL="457200" rtl="0" algn="just">
+            <a:pPr indent="-304800" lvl="0" marL="457200" rtl="0" algn="just">
               <a:spcBef>
                 <a:spcPts val="0"/>
               </a:spcBef>
@@ -7397,12 +10418,12 @@
               <a:buClr>
                 <a:schemeClr val="dk1"/>
               </a:buClr>
-              <a:buSzPts val="1800"/>
+              <a:buSzPts val="1200"/>
               <a:buFont typeface="Proxima Nova"/>
               <a:buAutoNum type="arabicPeriod"/>
             </a:pPr>
             <a:r>
-              <a:rPr lang="pt-BR">
+              <a:rPr lang="pt-BR" sz="1200">
                 <a:solidFill>
                   <a:schemeClr val="dk1"/>
                 </a:solidFill>
@@ -7411,10 +10432,10 @@
                 <a:cs typeface="Proxima Nova"/>
                 <a:sym typeface="Proxima Nova"/>
               </a:rPr>
-              <a:t>Injetar acervo em ferramenta de </a:t>
+              <a:t>Injetar acervo nas ferramentas de </a:t>
             </a:r>
             <a:r>
-              <a:rPr b="1" lang="pt-BR">
+              <a:rPr b="1" lang="pt-BR" sz="1200">
                 <a:solidFill>
                   <a:schemeClr val="dk1"/>
                 </a:solidFill>
@@ -7423,10 +10444,10 @@
                 <a:cs typeface="Proxima Nova"/>
                 <a:sym typeface="Proxima Nova"/>
               </a:rPr>
-              <a:t>GraphRAG (EdgeQuake)</a:t>
+              <a:t>GraphRAG</a:t>
             </a:r>
             <a:r>
-              <a:rPr lang="pt-BR">
+              <a:rPr lang="pt-BR" sz="1200">
                 <a:solidFill>
                   <a:schemeClr val="dk1"/>
                 </a:solidFill>
@@ -7435,81 +10456,9 @@
                 <a:cs typeface="Proxima Nova"/>
                 <a:sym typeface="Proxima Nova"/>
               </a:rPr>
-              <a:t> para </a:t>
+              <a:t>.</a:t>
             </a:r>
-            <a:r>
-              <a:rPr b="1" lang="pt-BR">
-                <a:solidFill>
-                  <a:schemeClr val="dk1"/>
-                </a:solidFill>
-                <a:latin typeface="Proxima Nova"/>
-                <a:ea typeface="Proxima Nova"/>
-                <a:cs typeface="Proxima Nova"/>
-                <a:sym typeface="Proxima Nova"/>
-              </a:rPr>
-              <a:t>visão geral</a:t>
-            </a:r>
-            <a:r>
-              <a:rPr lang="pt-BR">
-                <a:solidFill>
-                  <a:schemeClr val="dk1"/>
-                </a:solidFill>
-                <a:latin typeface="Proxima Nova"/>
-                <a:ea typeface="Proxima Nova"/>
-                <a:cs typeface="Proxima Nova"/>
-                <a:sym typeface="Proxima Nova"/>
-              </a:rPr>
-              <a:t> do tema e facilidade de </a:t>
-            </a:r>
-            <a:r>
-              <a:rPr b="1" lang="pt-BR">
-                <a:solidFill>
-                  <a:schemeClr val="dk1"/>
-                </a:solidFill>
-                <a:latin typeface="Proxima Nova"/>
-                <a:ea typeface="Proxima Nova"/>
-                <a:cs typeface="Proxima Nova"/>
-                <a:sym typeface="Proxima Nova"/>
-              </a:rPr>
-              <a:t>parametrização de métodos</a:t>
-            </a:r>
-            <a:r>
-              <a:rPr lang="pt-BR">
-                <a:solidFill>
-                  <a:schemeClr val="dk1"/>
-                </a:solidFill>
-                <a:latin typeface="Proxima Nova"/>
-                <a:ea typeface="Proxima Nova"/>
-                <a:cs typeface="Proxima Nova"/>
-                <a:sym typeface="Proxima Nova"/>
-              </a:rPr>
-              <a:t> e seus </a:t>
-            </a:r>
-            <a:r>
-              <a:rPr b="1" lang="pt-BR">
-                <a:solidFill>
-                  <a:schemeClr val="dk1"/>
-                </a:solidFill>
-                <a:latin typeface="Proxima Nova"/>
-                <a:ea typeface="Proxima Nova"/>
-                <a:cs typeface="Proxima Nova"/>
-                <a:sym typeface="Proxima Nova"/>
-              </a:rPr>
-              <a:t>relacionamentos</a:t>
-            </a:r>
-            <a:r>
-              <a:rPr lang="pt-BR">
-                <a:solidFill>
-                  <a:schemeClr val="dk1"/>
-                </a:solidFill>
-                <a:latin typeface="Proxima Nova"/>
-                <a:ea typeface="Proxima Nova"/>
-                <a:cs typeface="Proxima Nova"/>
-                <a:sym typeface="Proxima Nova"/>
-              </a:rPr>
-              <a:t>;</a:t>
-            </a:r>
-            <a:endParaRPr>
+            <a:endParaRPr sz="1200">
               <a:solidFill>
                 <a:schemeClr val="dk1"/>
               </a:solidFill>
@@ -7520,7 +10469,7 @@
             </a:endParaRPr>
           </a:p>
           <a:p>
-            <a:pPr indent="-342900" lvl="0" marL="457200" rtl="0" algn="just">
+            <a:pPr indent="-304800" lvl="0" marL="457200" rtl="0" algn="just">
               <a:spcBef>
                 <a:spcPts val="0"/>
               </a:spcBef>
@@ -7530,12 +10479,12 @@
               <a:buClr>
                 <a:schemeClr val="dk1"/>
               </a:buClr>
-              <a:buSzPts val="1800"/>
+              <a:buSzPts val="1200"/>
               <a:buFont typeface="Proxima Nova"/>
               <a:buAutoNum type="arabicPeriod"/>
             </a:pPr>
             <a:r>
-              <a:rPr lang="pt-BR">
+              <a:rPr lang="pt-BR" sz="1200">
                 <a:solidFill>
                   <a:schemeClr val="dk1"/>
                 </a:solidFill>
@@ -7547,7 +10496,7 @@
               <a:t>Utilizar </a:t>
             </a:r>
             <a:r>
-              <a:rPr b="1" lang="pt-BR">
+              <a:rPr b="1" lang="pt-BR" sz="1200">
                 <a:solidFill>
                   <a:schemeClr val="dk1"/>
                 </a:solidFill>
@@ -7559,7 +10508,7 @@
               <a:t>GraphRAG + LLM</a:t>
             </a:r>
             <a:r>
-              <a:rPr lang="pt-BR">
+              <a:rPr lang="pt-BR" sz="1200">
                 <a:solidFill>
                   <a:schemeClr val="dk1"/>
                 </a:solidFill>
@@ -7571,7 +10520,7 @@
               <a:t> para esclarecimentos e geração de </a:t>
             </a:r>
             <a:r>
-              <a:rPr b="1" lang="pt-BR">
+              <a:rPr b="1" lang="pt-BR" sz="1200">
                 <a:solidFill>
                   <a:schemeClr val="dk1"/>
                 </a:solidFill>
@@ -7583,7 +10532,7 @@
               <a:t>informações agregadas</a:t>
             </a:r>
             <a:r>
-              <a:rPr lang="pt-BR">
+              <a:rPr lang="pt-BR" sz="1200">
                 <a:solidFill>
                   <a:schemeClr val="dk1"/>
                 </a:solidFill>
@@ -7592,9 +10541,46 @@
                 <a:cs typeface="Proxima Nova"/>
                 <a:sym typeface="Proxima Nova"/>
               </a:rPr>
-              <a:t> sobre o tema.</a:t>
+              <a:t> sobre o tema, avaliando vantagens, desvantagens, aplicabilidade e relacionamentos das técnicas de fine-tuning;</a:t>
             </a:r>
-            <a:endParaRPr>
+            <a:endParaRPr sz="1200">
+              <a:solidFill>
+                <a:schemeClr val="dk1"/>
+              </a:solidFill>
+              <a:latin typeface="Proxima Nova"/>
+              <a:ea typeface="Proxima Nova"/>
+              <a:cs typeface="Proxima Nova"/>
+              <a:sym typeface="Proxima Nova"/>
+            </a:endParaRPr>
+          </a:p>
+          <a:p>
+            <a:pPr indent="-304800" lvl="0" marL="457200" rtl="0" algn="just">
+              <a:spcBef>
+                <a:spcPts val="0"/>
+              </a:spcBef>
+              <a:spcAft>
+                <a:spcPts val="0"/>
+              </a:spcAft>
+              <a:buClr>
+                <a:schemeClr val="dk1"/>
+              </a:buClr>
+              <a:buSzPts val="1200"/>
+              <a:buFont typeface="Proxima Nova"/>
+              <a:buAutoNum type="arabicPeriod"/>
+            </a:pPr>
+            <a:r>
+              <a:rPr lang="pt-BR" sz="1200">
+                <a:solidFill>
+                  <a:schemeClr val="dk1"/>
+                </a:solidFill>
+                <a:latin typeface="Proxima Nova"/>
+                <a:ea typeface="Proxima Nova"/>
+                <a:cs typeface="Proxima Nova"/>
+                <a:sym typeface="Proxima Nova"/>
+              </a:rPr>
+              <a:t>Comparação da qualidade de resposta das diferentes ferramentas.</a:t>
+            </a:r>
+            <a:endParaRPr sz="1200">
               <a:solidFill>
                 <a:schemeClr val="dk1"/>
               </a:solidFill>
@@ -7610,51 +10596,14 @@
                 <a:spcPts val="1200"/>
               </a:spcBef>
               <a:spcAft>
-                <a:spcPts val="0"/>
+                <a:spcPts val="1200"/>
               </a:spcAft>
               <a:buNone/>
             </a:pPr>
             <a:r>
               <a:t/>
             </a:r>
-            <a:endParaRPr>
-              <a:solidFill>
-                <a:schemeClr val="dk1"/>
-              </a:solidFill>
-              <a:latin typeface="Proxima Nova"/>
-              <a:ea typeface="Proxima Nova"/>
-              <a:cs typeface="Proxima Nova"/>
-              <a:sym typeface="Proxima Nova"/>
-            </a:endParaRPr>
-          </a:p>
-          <a:p>
-            <a:pPr indent="-317500" lvl="0" marL="457200" rtl="0" algn="just">
-              <a:spcBef>
-                <a:spcPts val="1200"/>
-              </a:spcBef>
-              <a:spcAft>
-                <a:spcPts val="0"/>
-              </a:spcAft>
-              <a:buClr>
-                <a:schemeClr val="dk1"/>
-              </a:buClr>
-              <a:buSzPts val="1400"/>
-              <a:buFont typeface="Proxima Nova"/>
-              <a:buChar char="●"/>
-            </a:pPr>
-            <a:r>
-              <a:rPr i="1" lang="pt-BR" sz="1400">
-                <a:solidFill>
-                  <a:schemeClr val="dk1"/>
-                </a:solidFill>
-                <a:latin typeface="Proxima Nova"/>
-                <a:ea typeface="Proxima Nova"/>
-                <a:cs typeface="Proxima Nova"/>
-                <a:sym typeface="Proxima Nova"/>
-              </a:rPr>
-              <a:t>Avaliar aplicabilidade de métodos de FT em natureza de dados e tarefa específicas.</a:t>
-            </a:r>
-            <a:endParaRPr i="1" sz="1400">
+            <a:endParaRPr i="1" sz="1200">
               <a:solidFill>
                 <a:schemeClr val="dk1"/>
               </a:solidFill>
@@ -7679,7 +10628,7 @@
   <p:cSld>
     <p:spTree>
       <p:nvGrpSpPr>
-        <p:cNvPr id="86" name="Shape 86"/>
+        <p:cNvPr id="89" name="Shape 89"/>
         <p:cNvGrpSpPr/>
         <p:nvPr/>
       </p:nvGrpSpPr>
@@ -7693,7 +10642,7 @@
       </p:grpSpPr>
       <p:sp>
         <p:nvSpPr>
-          <p:cNvPr id="87" name="Google Shape;87;p16"/>
+          <p:cNvPr id="90" name="Google Shape;90;p16"/>
           <p:cNvSpPr txBox="1"/>
           <p:nvPr>
             <p:ph type="title"/>
@@ -7725,7 +10674,7 @@
             </a:pPr>
             <a:r>
               <a:rPr lang="pt-BR"/>
-              <a:t>Considerações gerais</a:t>
+              <a:t>Base de Conhecimento</a:t>
             </a:r>
             <a:endParaRPr/>
           </a:p>
@@ -7733,7 +10682,7 @@
       </p:sp>
       <p:sp>
         <p:nvSpPr>
-          <p:cNvPr id="88" name="Google Shape;88;p16"/>
+          <p:cNvPr id="91" name="Google Shape;91;p16"/>
           <p:cNvSpPr txBox="1"/>
           <p:nvPr>
             <p:ph idx="1" type="body"/>
@@ -7754,22 +10703,17 @@
           </a:bodyPr>
           <a:lstStyle/>
           <a:p>
-            <a:pPr indent="-342900" lvl="0" marL="457200" rtl="0" algn="l">
-              <a:spcBef>
-                <a:spcPts val="0"/>
-              </a:spcBef>
-              <a:spcAft>
-                <a:spcPts val="0"/>
-              </a:spcAft>
-              <a:buClr>
-                <a:schemeClr val="dk1"/>
-              </a:buClr>
-              <a:buSzPts val="1800"/>
-              <a:buFont typeface="Proxima Nova"/>
-              <a:buChar char="●"/>
+            <a:pPr indent="0" lvl="0" marL="0" rtl="0" algn="l">
+              <a:spcBef>
+                <a:spcPts val="0"/>
+              </a:spcBef>
+              <a:spcAft>
+                <a:spcPts val="0"/>
+              </a:spcAft>
+              <a:buNone/>
             </a:pPr>
             <a:r>
-              <a:rPr lang="pt-BR">
+              <a:rPr lang="pt-BR" sz="1200">
                 <a:solidFill>
                   <a:schemeClr val="dk1"/>
                 </a:solidFill>
@@ -7778,9 +10722,33 @@
                 <a:cs typeface="Proxima Nova"/>
                 <a:sym typeface="Proxima Nova"/>
               </a:rPr>
-              <a:t>Acervo com 12 documentos (artigos e sites);</a:t>
+              <a:t>A base de conhecimento utilizada para ancorar as ferramentas consistiu em um acervo com 12 documentos (textos acadêmicos e artigos da internet). Isso gerou um </a:t>
             </a:r>
-            <a:endParaRPr>
+            <a:r>
+              <a:rPr lang="pt-BR" sz="1200">
+                <a:solidFill>
+                  <a:schemeClr val="dk1"/>
+                </a:solidFill>
+                <a:latin typeface="Proxima Nova"/>
+                <a:ea typeface="Proxima Nova"/>
+                <a:cs typeface="Proxima Nova"/>
+                <a:sym typeface="Proxima Nova"/>
+              </a:rPr>
+              <a:t>Knowledge</a:t>
+            </a:r>
+            <a:r>
+              <a:rPr lang="pt-BR" sz="1200">
+                <a:solidFill>
+                  <a:schemeClr val="dk1"/>
+                </a:solidFill>
+                <a:latin typeface="Proxima Nova"/>
+                <a:ea typeface="Proxima Nova"/>
+                <a:cs typeface="Proxima Nova"/>
+                <a:sym typeface="Proxima Nova"/>
+              </a:rPr>
+              <a:t> Graph com:</a:t>
+            </a:r>
+            <a:endParaRPr sz="1200">
               <a:solidFill>
                 <a:schemeClr val="dk1"/>
               </a:solidFill>
@@ -7791,9 +10759,9 @@
             </a:endParaRPr>
           </a:p>
           <a:p>
-            <a:pPr indent="-342900" lvl="0" marL="457200" rtl="0" algn="l">
-              <a:spcBef>
-                <a:spcPts val="0"/>
+            <a:pPr indent="-304800" lvl="0" marL="457200" rtl="0" algn="l">
+              <a:spcBef>
+                <a:spcPts val="1200"/>
               </a:spcBef>
               <a:spcAft>
                 <a:spcPts val="0"/>
@@ -7801,12 +10769,12 @@
               <a:buClr>
                 <a:schemeClr val="dk1"/>
               </a:buClr>
-              <a:buSzPts val="1800"/>
+              <a:buSzPts val="1200"/>
               <a:buFont typeface="Proxima Nova"/>
               <a:buChar char="●"/>
             </a:pPr>
             <a:r>
-              <a:rPr lang="pt-BR">
+              <a:rPr lang="pt-BR" sz="1200">
                 <a:solidFill>
                   <a:schemeClr val="dk1"/>
                 </a:solidFill>
@@ -7817,7 +10785,7 @@
               </a:rPr>
               <a:t>3k+ entidades;</a:t>
             </a:r>
-            <a:endParaRPr>
+            <a:endParaRPr sz="1200">
               <a:solidFill>
                 <a:schemeClr val="dk1"/>
               </a:solidFill>
@@ -7828,7 +10796,7 @@
             </a:endParaRPr>
           </a:p>
           <a:p>
-            <a:pPr indent="-342900" lvl="0" marL="457200" rtl="0" algn="l">
+            <a:pPr indent="-304800" lvl="0" marL="457200" rtl="0" algn="l">
               <a:spcBef>
                 <a:spcPts val="0"/>
               </a:spcBef>
@@ -7838,12 +10806,12 @@
               <a:buClr>
                 <a:schemeClr val="dk1"/>
               </a:buClr>
-              <a:buSzPts val="1800"/>
+              <a:buSzPts val="1200"/>
               <a:buFont typeface="Proxima Nova"/>
               <a:buChar char="●"/>
             </a:pPr>
             <a:r>
-              <a:rPr lang="pt-BR">
+              <a:rPr lang="pt-BR" sz="1200">
                 <a:solidFill>
                   <a:schemeClr val="dk1"/>
                 </a:solidFill>
@@ -7854,7 +10822,7 @@
               </a:rPr>
               <a:t>4k+ relacionamentos;</a:t>
             </a:r>
-            <a:endParaRPr>
+            <a:endParaRPr sz="1200">
               <a:solidFill>
                 <a:schemeClr val="dk1"/>
               </a:solidFill>
@@ -7865,7 +10833,7 @@
             </a:endParaRPr>
           </a:p>
           <a:p>
-            <a:pPr indent="-342900" lvl="0" marL="457200" rtl="0" algn="l">
+            <a:pPr indent="-304800" lvl="0" marL="457200" rtl="0" algn="l">
               <a:spcBef>
                 <a:spcPts val="0"/>
               </a:spcBef>
@@ -7875,12 +10843,12 @@
               <a:buClr>
                 <a:schemeClr val="dk1"/>
               </a:buClr>
-              <a:buSzPts val="1800"/>
+              <a:buSzPts val="1200"/>
               <a:buFont typeface="Proxima Nova"/>
               <a:buChar char="●"/>
             </a:pPr>
             <a:r>
-              <a:rPr lang="pt-BR">
+              <a:rPr lang="pt-BR" sz="1200">
                 <a:solidFill>
                   <a:schemeClr val="dk1"/>
                 </a:solidFill>
@@ -7889,9 +10857,9 @@
                 <a:cs typeface="Proxima Nova"/>
                 <a:sym typeface="Proxima Nova"/>
               </a:rPr>
-              <a:t>Principais entidades extraída: LoRA, QLoRA, PEFT etc;</a:t>
+              <a:t>Principais entidades extraídas foram: LoRA, QLoRA, PEFT etc.</a:t>
             </a:r>
-            <a:endParaRPr>
+            <a:endParaRPr sz="1200">
               <a:solidFill>
                 <a:schemeClr val="dk1"/>
               </a:solidFill>
@@ -7905,7 +10873,7 @@
       </p:sp>
       <p:pic>
         <p:nvPicPr>
-          <p:cNvPr id="89" name="Google Shape;89;p16"/>
+          <p:cNvPr id="92" name="Google Shape;92;p16"/>
           <p:cNvPicPr preferRelativeResize="0"/>
           <p:nvPr/>
         </p:nvPicPr>
@@ -7943,7 +10911,7 @@
   <p:cSld>
     <p:spTree>
       <p:nvGrpSpPr>
-        <p:cNvPr id="93" name="Shape 93"/>
+        <p:cNvPr id="96" name="Shape 96"/>
         <p:cNvGrpSpPr/>
         <p:nvPr/>
       </p:nvGrpSpPr>
@@ -7957,7 +10925,7 @@
       </p:grpSpPr>
       <p:sp>
         <p:nvSpPr>
-          <p:cNvPr id="94" name="Google Shape;94;p17"/>
+          <p:cNvPr id="97" name="Google Shape;97;p17"/>
           <p:cNvSpPr txBox="1"/>
           <p:nvPr>
             <p:ph type="title"/>
@@ -7989,7 +10957,492 @@
             </a:pPr>
             <a:r>
               <a:rPr lang="pt-BR"/>
-              <a:t>Considerações gerais</a:t>
+              <a:t>Primeiro Teste: Sumarização das Técnicas de FT</a:t>
+            </a:r>
+            <a:endParaRPr/>
+          </a:p>
+        </p:txBody>
+      </p:sp>
+      <p:grpSp>
+        <p:nvGrpSpPr>
+          <p:cNvPr id="98" name="Google Shape;98;p17"/>
+          <p:cNvGrpSpPr/>
+          <p:nvPr/>
+        </p:nvGrpSpPr>
+        <p:grpSpPr>
+          <a:xfrm>
+            <a:off x="5247649" y="1590600"/>
+            <a:ext cx="2702579" cy="2311434"/>
+            <a:chOff x="945914" y="1590632"/>
+            <a:chExt cx="2955900" cy="2528092"/>
+          </a:xfrm>
+        </p:grpSpPr>
+        <p:sp>
+          <p:nvSpPr>
+            <p:cNvPr id="99" name="Google Shape;99;p17"/>
+            <p:cNvSpPr/>
+            <p:nvPr/>
+          </p:nvSpPr>
+          <p:spPr>
+            <a:xfrm>
+              <a:off x="945914" y="2052324"/>
+              <a:ext cx="2955900" cy="2066400"/>
+            </a:xfrm>
+            <a:prstGeom prst="roundRect">
+              <a:avLst>
+                <a:gd fmla="val 16667" name="adj"/>
+              </a:avLst>
+            </a:prstGeom>
+            <a:solidFill>
+              <a:schemeClr val="lt2"/>
+            </a:solidFill>
+            <a:ln cap="flat" cmpd="sng" w="8700">
+              <a:solidFill>
+                <a:schemeClr val="dk2"/>
+              </a:solidFill>
+              <a:prstDash val="solid"/>
+              <a:round/>
+              <a:headEnd len="sm" w="sm" type="none"/>
+              <a:tailEnd len="sm" w="sm" type="none"/>
+            </a:ln>
+          </p:spPr>
+          <p:txBody>
+            <a:bodyPr anchorCtr="0" anchor="ctr" bIns="83600" lIns="83600" spcFirstLastPara="1" rIns="83600" wrap="square" tIns="83600">
+              <a:noAutofit/>
+            </a:bodyPr>
+            <a:lstStyle/>
+            <a:p>
+              <a:pPr indent="-304800" lvl="0" marL="457200" rtl="0" algn="l">
+                <a:spcBef>
+                  <a:spcPts val="0"/>
+                </a:spcBef>
+                <a:spcAft>
+                  <a:spcPts val="0"/>
+                </a:spcAft>
+                <a:buSzPts val="1200"/>
+                <a:buFont typeface="Proxima Nova"/>
+                <a:buChar char="●"/>
+              </a:pPr>
+              <a:r>
+                <a:rPr lang="pt-BR" sz="1200">
+                  <a:latin typeface="Proxima Nova"/>
+                  <a:ea typeface="Proxima Nova"/>
+                  <a:cs typeface="Proxima Nova"/>
+                  <a:sym typeface="Proxima Nova"/>
+                </a:rPr>
+                <a:t>Tabela estruturada;</a:t>
+              </a:r>
+              <a:endParaRPr sz="1200">
+                <a:latin typeface="Proxima Nova"/>
+                <a:ea typeface="Proxima Nova"/>
+                <a:cs typeface="Proxima Nova"/>
+                <a:sym typeface="Proxima Nova"/>
+              </a:endParaRPr>
+            </a:p>
+            <a:p>
+              <a:pPr indent="-304800" lvl="0" marL="457200" rtl="0" algn="l">
+                <a:spcBef>
+                  <a:spcPts val="0"/>
+                </a:spcBef>
+                <a:spcAft>
+                  <a:spcPts val="0"/>
+                </a:spcAft>
+                <a:buSzPts val="1200"/>
+                <a:buFont typeface="Proxima Nova"/>
+                <a:buChar char="●"/>
+              </a:pPr>
+              <a:r>
+                <a:rPr lang="pt-BR" sz="1200">
+                  <a:latin typeface="Proxima Nova"/>
+                  <a:ea typeface="Proxima Nova"/>
+                  <a:cs typeface="Proxima Nova"/>
+                  <a:sym typeface="Proxima Nova"/>
+                </a:rPr>
+                <a:t>Descrição de cada método;</a:t>
+              </a:r>
+              <a:endParaRPr sz="1200">
+                <a:latin typeface="Proxima Nova"/>
+                <a:ea typeface="Proxima Nova"/>
+                <a:cs typeface="Proxima Nova"/>
+                <a:sym typeface="Proxima Nova"/>
+              </a:endParaRPr>
+            </a:p>
+            <a:p>
+              <a:pPr indent="-304800" lvl="0" marL="457200" rtl="0" algn="l">
+                <a:spcBef>
+                  <a:spcPts val="0"/>
+                </a:spcBef>
+                <a:spcAft>
+                  <a:spcPts val="0"/>
+                </a:spcAft>
+                <a:buSzPts val="1200"/>
+                <a:buFont typeface="Proxima Nova"/>
+                <a:buChar char="●"/>
+              </a:pPr>
+              <a:r>
+                <a:rPr lang="pt-BR" sz="1200">
+                  <a:latin typeface="Proxima Nova"/>
+                  <a:ea typeface="Proxima Nova"/>
+                  <a:cs typeface="Proxima Nova"/>
+                  <a:sym typeface="Proxima Nova"/>
+                </a:rPr>
+                <a:t>Explicação das </a:t>
+              </a:r>
+              <a:r>
+                <a:rPr lang="pt-BR" sz="1200">
+                  <a:latin typeface="Proxima Nova"/>
+                  <a:ea typeface="Proxima Nova"/>
+                  <a:cs typeface="Proxima Nova"/>
+                  <a:sym typeface="Proxima Nova"/>
+                </a:rPr>
+                <a:t>diferenças</a:t>
+              </a:r>
+              <a:r>
+                <a:rPr lang="pt-BR" sz="1200">
+                  <a:latin typeface="Proxima Nova"/>
+                  <a:ea typeface="Proxima Nova"/>
+                  <a:cs typeface="Proxima Nova"/>
+                  <a:sym typeface="Proxima Nova"/>
+                </a:rPr>
+                <a:t> entre cada método;</a:t>
+              </a:r>
+              <a:endParaRPr sz="1200">
+                <a:latin typeface="Proxima Nova"/>
+                <a:ea typeface="Proxima Nova"/>
+                <a:cs typeface="Proxima Nova"/>
+                <a:sym typeface="Proxima Nova"/>
+              </a:endParaRPr>
+            </a:p>
+            <a:p>
+              <a:pPr indent="-304800" lvl="0" marL="457200" rtl="0" algn="l">
+                <a:spcBef>
+                  <a:spcPts val="0"/>
+                </a:spcBef>
+                <a:spcAft>
+                  <a:spcPts val="0"/>
+                </a:spcAft>
+                <a:buSzPts val="1200"/>
+                <a:buFont typeface="Proxima Nova"/>
+                <a:buChar char="●"/>
+              </a:pPr>
+              <a:r>
+                <a:rPr lang="pt-BR" sz="1200">
+                  <a:latin typeface="Proxima Nova"/>
+                  <a:ea typeface="Proxima Nova"/>
+                  <a:cs typeface="Proxima Nova"/>
+                  <a:sym typeface="Proxima Nova"/>
+                </a:rPr>
+                <a:t>Citar a aplicabilidade de cada método;</a:t>
+              </a:r>
+              <a:endParaRPr sz="1200">
+                <a:latin typeface="Proxima Nova"/>
+                <a:ea typeface="Proxima Nova"/>
+                <a:cs typeface="Proxima Nova"/>
+                <a:sym typeface="Proxima Nova"/>
+              </a:endParaRPr>
+            </a:p>
+            <a:p>
+              <a:pPr indent="-304800" lvl="0" marL="457200" rtl="0" algn="l">
+                <a:spcBef>
+                  <a:spcPts val="0"/>
+                </a:spcBef>
+                <a:spcAft>
+                  <a:spcPts val="0"/>
+                </a:spcAft>
+                <a:buSzPts val="1200"/>
+                <a:buFont typeface="Proxima Nova"/>
+                <a:buChar char="●"/>
+              </a:pPr>
+              <a:r>
+                <a:rPr lang="pt-BR" sz="1200">
+                  <a:latin typeface="Proxima Nova"/>
+                  <a:ea typeface="Proxima Nova"/>
+                  <a:cs typeface="Proxima Nova"/>
+                  <a:sym typeface="Proxima Nova"/>
+                </a:rPr>
+                <a:t>Fundamentar as afirmações com base nas referências fornecidas.</a:t>
+              </a:r>
+              <a:endParaRPr sz="1200">
+                <a:latin typeface="Proxima Nova"/>
+                <a:ea typeface="Proxima Nova"/>
+                <a:cs typeface="Proxima Nova"/>
+                <a:sym typeface="Proxima Nova"/>
+              </a:endParaRPr>
+            </a:p>
+          </p:txBody>
+        </p:sp>
+        <p:sp>
+          <p:nvSpPr>
+            <p:cNvPr id="100" name="Google Shape;100;p17"/>
+            <p:cNvSpPr txBox="1"/>
+            <p:nvPr/>
+          </p:nvSpPr>
+          <p:spPr>
+            <a:xfrm>
+              <a:off x="1322857" y="1590632"/>
+              <a:ext cx="2202000" cy="461700"/>
+            </a:xfrm>
+            <a:prstGeom prst="rect">
+              <a:avLst/>
+            </a:prstGeom>
+            <a:noFill/>
+            <a:ln>
+              <a:noFill/>
+            </a:ln>
+          </p:spPr>
+          <p:txBody>
+            <a:bodyPr anchorCtr="0" anchor="t" bIns="83600" lIns="83600" spcFirstLastPara="1" rIns="83600" wrap="square" tIns="83600">
+              <a:spAutoFit/>
+            </a:bodyPr>
+            <a:lstStyle/>
+            <a:p>
+              <a:pPr indent="0" lvl="0" marL="0" rtl="0" algn="ctr">
+                <a:spcBef>
+                  <a:spcPts val="0"/>
+                </a:spcBef>
+                <a:spcAft>
+                  <a:spcPts val="0"/>
+                </a:spcAft>
+                <a:buNone/>
+              </a:pPr>
+              <a:r>
+                <a:rPr lang="pt-BR" sz="1646">
+                  <a:solidFill>
+                    <a:schemeClr val="accent3"/>
+                  </a:solidFill>
+                  <a:latin typeface="Proxima Nova"/>
+                  <a:ea typeface="Proxima Nova"/>
+                  <a:cs typeface="Proxima Nova"/>
+                  <a:sym typeface="Proxima Nova"/>
+                </a:rPr>
+                <a:t>Resultado Esperado</a:t>
+              </a:r>
+              <a:endParaRPr sz="1646">
+                <a:solidFill>
+                  <a:schemeClr val="accent3"/>
+                </a:solidFill>
+                <a:latin typeface="Proxima Nova"/>
+                <a:ea typeface="Proxima Nova"/>
+                <a:cs typeface="Proxima Nova"/>
+                <a:sym typeface="Proxima Nova"/>
+              </a:endParaRPr>
+            </a:p>
+          </p:txBody>
+        </p:sp>
+      </p:grpSp>
+      <p:grpSp>
+        <p:nvGrpSpPr>
+          <p:cNvPr id="101" name="Google Shape;101;p17"/>
+          <p:cNvGrpSpPr/>
+          <p:nvPr/>
+        </p:nvGrpSpPr>
+        <p:grpSpPr>
+          <a:xfrm>
+            <a:off x="1287035" y="1590604"/>
+            <a:ext cx="2702700" cy="2311675"/>
+            <a:chOff x="5076300" y="1590450"/>
+            <a:chExt cx="2702700" cy="2311675"/>
+          </a:xfrm>
+        </p:grpSpPr>
+        <p:sp>
+          <p:nvSpPr>
+            <p:cNvPr id="102" name="Google Shape;102;p17"/>
+            <p:cNvSpPr/>
+            <p:nvPr/>
+          </p:nvSpPr>
+          <p:spPr>
+            <a:xfrm>
+              <a:off x="5076300" y="2052325"/>
+              <a:ext cx="2702700" cy="1849800"/>
+            </a:xfrm>
+            <a:prstGeom prst="roundRect">
+              <a:avLst>
+                <a:gd fmla="val 16667" name="adj"/>
+              </a:avLst>
+            </a:prstGeom>
+            <a:solidFill>
+              <a:schemeClr val="lt2"/>
+            </a:solidFill>
+            <a:ln cap="flat" cmpd="sng" w="9525">
+              <a:solidFill>
+                <a:schemeClr val="dk2"/>
+              </a:solidFill>
+              <a:prstDash val="solid"/>
+              <a:round/>
+              <a:headEnd len="sm" w="sm" type="none"/>
+              <a:tailEnd len="sm" w="sm" type="none"/>
+            </a:ln>
+          </p:spPr>
+          <p:txBody>
+            <a:bodyPr anchorCtr="0" anchor="ctr" bIns="91425" lIns="91425" spcFirstLastPara="1" rIns="91425" wrap="square" tIns="91425">
+              <a:noAutofit/>
+            </a:bodyPr>
+            <a:lstStyle/>
+            <a:p>
+              <a:pPr indent="0" lvl="0" marL="0" rtl="0" algn="ctr">
+                <a:spcBef>
+                  <a:spcPts val="0"/>
+                </a:spcBef>
+                <a:spcAft>
+                  <a:spcPts val="0"/>
+                </a:spcAft>
+                <a:buNone/>
+              </a:pPr>
+              <a:r>
+                <a:rPr lang="pt-BR" sz="1200">
+                  <a:latin typeface="Proxima Nova"/>
+                  <a:ea typeface="Proxima Nova"/>
+                  <a:cs typeface="Proxima Nova"/>
+                  <a:sym typeface="Proxima Nova"/>
+                </a:rPr>
+                <a:t>“Resuma os métodos de fine-tuning e a relação entre comparativa entre eles. </a:t>
+              </a:r>
+              <a:r>
+                <a:rPr lang="pt-BR" sz="1200">
+                  <a:latin typeface="Proxima Nova"/>
+                  <a:ea typeface="Proxima Nova"/>
+                  <a:cs typeface="Proxima Nova"/>
+                  <a:sym typeface="Proxima Nova"/>
+                </a:rPr>
+                <a:t>Sumarize</a:t>
+              </a:r>
+              <a:r>
+                <a:rPr lang="pt-BR" sz="1200">
+                  <a:latin typeface="Proxima Nova"/>
+                  <a:ea typeface="Proxima Nova"/>
+                  <a:cs typeface="Proxima Nova"/>
+                  <a:sym typeface="Proxima Nova"/>
+                </a:rPr>
+                <a:t> isso em formato de tabela comparativa.”</a:t>
+              </a:r>
+              <a:endParaRPr sz="1200">
+                <a:latin typeface="Proxima Nova"/>
+                <a:ea typeface="Proxima Nova"/>
+                <a:cs typeface="Proxima Nova"/>
+                <a:sym typeface="Proxima Nova"/>
+              </a:endParaRPr>
+            </a:p>
+          </p:txBody>
+        </p:sp>
+        <p:sp>
+          <p:nvSpPr>
+            <p:cNvPr id="103" name="Google Shape;103;p17"/>
+            <p:cNvSpPr txBox="1"/>
+            <p:nvPr/>
+          </p:nvSpPr>
+          <p:spPr>
+            <a:xfrm>
+              <a:off x="5587350" y="1590450"/>
+              <a:ext cx="1680600" cy="461700"/>
+            </a:xfrm>
+            <a:prstGeom prst="rect">
+              <a:avLst/>
+            </a:prstGeom>
+            <a:noFill/>
+            <a:ln>
+              <a:noFill/>
+            </a:ln>
+          </p:spPr>
+          <p:txBody>
+            <a:bodyPr anchorCtr="0" anchor="t" bIns="91425" lIns="91425" spcFirstLastPara="1" rIns="91425" wrap="square" tIns="91425">
+              <a:spAutoFit/>
+            </a:bodyPr>
+            <a:lstStyle/>
+            <a:p>
+              <a:pPr indent="0" lvl="0" marL="0" rtl="0" algn="ctr">
+                <a:spcBef>
+                  <a:spcPts val="0"/>
+                </a:spcBef>
+                <a:spcAft>
+                  <a:spcPts val="0"/>
+                </a:spcAft>
+                <a:buNone/>
+              </a:pPr>
+              <a:r>
+                <a:rPr lang="pt-BR" sz="1800">
+                  <a:solidFill>
+                    <a:schemeClr val="accent3"/>
+                  </a:solidFill>
+                  <a:latin typeface="Proxima Nova"/>
+                  <a:ea typeface="Proxima Nova"/>
+                  <a:cs typeface="Proxima Nova"/>
+                  <a:sym typeface="Proxima Nova"/>
+                </a:rPr>
+                <a:t>Prompt</a:t>
+              </a:r>
+              <a:endParaRPr sz="1800">
+                <a:solidFill>
+                  <a:schemeClr val="accent3"/>
+                </a:solidFill>
+                <a:latin typeface="Proxima Nova"/>
+                <a:ea typeface="Proxima Nova"/>
+                <a:cs typeface="Proxima Nova"/>
+                <a:sym typeface="Proxima Nova"/>
+              </a:endParaRPr>
+            </a:p>
+          </p:txBody>
+        </p:sp>
+      </p:grpSp>
+    </p:spTree>
+  </p:cSld>
+  <p:clrMapOvr>
+    <a:masterClrMapping/>
+  </p:clrMapOvr>
+</p:sld>
+</file>
+
+<file path=ppt/slides/slide6.xml><?xml version="1.0" encoding="utf-8"?>
+<p:sld xmlns:a="http://schemas.openxmlformats.org/drawingml/2006/main" xmlns:r="http://schemas.openxmlformats.org/officeDocument/2006/relationships" xmlns:mc="http://schemas.openxmlformats.org/markup-compatibility/2006" xmlns:mv="urn:schemas-microsoft-com:mac:vml" xmlns:p="http://schemas.openxmlformats.org/presentationml/2006/main" xmlns:c="http://schemas.openxmlformats.org/drawingml/2006/chart" xmlns:dgm="http://schemas.openxmlformats.org/drawingml/2006/diagram" xmlns:o="urn:schemas-microsoft-com:office:office" xmlns:v="urn:schemas-microsoft-com:vml" xmlns:pvml="urn:schemas-microsoft-com:office:powerpoint" xmlns:com="http://schemas.openxmlformats.org/drawingml/2006/compatibility" xmlns:p14="http://schemas.microsoft.com/office/powerpoint/2010/main" xmlns:p15="http://schemas.microsoft.com/office/powerpoint/2012/main" xmlns:ahyp="http://schemas.microsoft.com/office/drawing/2018/hyperlinkcolor">
+  <p:cSld>
+    <p:spTree>
+      <p:nvGrpSpPr>
+        <p:cNvPr id="107" name="Shape 107"/>
+        <p:cNvGrpSpPr/>
+        <p:nvPr/>
+      </p:nvGrpSpPr>
+      <p:grpSpPr>
+        <a:xfrm>
+          <a:off x="0" y="0"/>
+          <a:ext cx="0" cy="0"/>
+          <a:chOff x="0" y="0"/>
+          <a:chExt cx="0" cy="0"/>
+        </a:xfrm>
+      </p:grpSpPr>
+      <p:sp>
+        <p:nvSpPr>
+          <p:cNvPr id="108" name="Google Shape;108;p18"/>
+          <p:cNvSpPr txBox="1"/>
+          <p:nvPr>
+            <p:ph type="title"/>
+          </p:nvPr>
+        </p:nvSpPr>
+        <p:spPr>
+          <a:xfrm>
+            <a:off x="311700" y="445025"/>
+            <a:ext cx="8520600" cy="572700"/>
+          </a:xfrm>
+          <a:prstGeom prst="rect">
+            <a:avLst/>
+          </a:prstGeom>
+        </p:spPr>
+        <p:txBody>
+          <a:bodyPr anchorCtr="0" anchor="t" bIns="91425" lIns="91425" spcFirstLastPara="1" rIns="91425" wrap="square" tIns="91425">
+            <a:normAutofit fontScale="90000"/>
+          </a:bodyPr>
+          <a:lstStyle/>
+          <a:p>
+            <a:pPr indent="0" lvl="0" marL="0" rtl="0" algn="l">
+              <a:spcBef>
+                <a:spcPts val="0"/>
+              </a:spcBef>
+              <a:spcAft>
+                <a:spcPts val="0"/>
+              </a:spcAft>
+              <a:buNone/>
+            </a:pPr>
+            <a:r>
+              <a:rPr lang="pt-BR"/>
+              <a:t>Primeiro Teste: EdgeQuake</a:t>
             </a:r>
             <a:endParaRPr/>
           </a:p>
@@ -7997,7 +11450,7 @@
       </p:sp>
       <p:pic>
         <p:nvPicPr>
-          <p:cNvPr id="95" name="Google Shape;95;p17"/>
+          <p:cNvPr id="109" name="Google Shape;109;p18"/>
           <p:cNvPicPr preferRelativeResize="0"/>
           <p:nvPr/>
         </p:nvPicPr>
@@ -8025,7 +11478,7 @@
       </p:pic>
       <p:sp>
         <p:nvSpPr>
-          <p:cNvPr id="96" name="Google Shape;96;p17"/>
+          <p:cNvPr id="110" name="Google Shape;110;p18"/>
           <p:cNvSpPr txBox="1"/>
           <p:nvPr/>
         </p:nvSpPr>
@@ -8072,7 +11525,7 @@
                 <a:cs typeface="Proxima Nova"/>
                 <a:sym typeface="Proxima Nova"/>
               </a:rPr>
-              <a:t>PEFT, LoRA, QLoRA e IA³ maior aderência para treinamento em geração de código;</a:t>
+              <a:t>Métodos PEFT: LoRA, QLoRA e IA³; Maior aderência para treinamento em geração de código;</a:t>
             </a:r>
             <a:endParaRPr sz="1500">
               <a:solidFill>
@@ -8131,7 +11584,1200 @@
 </p:sld>
 </file>
 
+<file path=ppt/slides/slide7.xml><?xml version="1.0" encoding="utf-8"?>
+<p:sld xmlns:a="http://schemas.openxmlformats.org/drawingml/2006/main" xmlns:r="http://schemas.openxmlformats.org/officeDocument/2006/relationships" xmlns:mc="http://schemas.openxmlformats.org/markup-compatibility/2006" xmlns:mv="urn:schemas-microsoft-com:mac:vml" xmlns:p="http://schemas.openxmlformats.org/presentationml/2006/main" xmlns:c="http://schemas.openxmlformats.org/drawingml/2006/chart" xmlns:dgm="http://schemas.openxmlformats.org/drawingml/2006/diagram" xmlns:o="urn:schemas-microsoft-com:office:office" xmlns:v="urn:schemas-microsoft-com:vml" xmlns:pvml="urn:schemas-microsoft-com:office:powerpoint" xmlns:com="http://schemas.openxmlformats.org/drawingml/2006/compatibility" xmlns:p14="http://schemas.microsoft.com/office/powerpoint/2010/main" xmlns:p15="http://schemas.microsoft.com/office/powerpoint/2012/main" xmlns:ahyp="http://schemas.microsoft.com/office/drawing/2018/hyperlinkcolor">
+  <p:cSld>
+    <p:spTree>
+      <p:nvGrpSpPr>
+        <p:cNvPr id="114" name="Shape 114"/>
+        <p:cNvGrpSpPr/>
+        <p:nvPr/>
+      </p:nvGrpSpPr>
+      <p:grpSpPr>
+        <a:xfrm>
+          <a:off x="0" y="0"/>
+          <a:ext cx="0" cy="0"/>
+          <a:chOff x="0" y="0"/>
+          <a:chExt cx="0" cy="0"/>
+        </a:xfrm>
+      </p:grpSpPr>
+      <p:sp>
+        <p:nvSpPr>
+          <p:cNvPr id="115" name="Google Shape;115;p19"/>
+          <p:cNvSpPr txBox="1"/>
+          <p:nvPr/>
+        </p:nvSpPr>
+        <p:spPr>
+          <a:xfrm>
+            <a:off x="372200" y="4213725"/>
+            <a:ext cx="8520600" cy="1087800"/>
+          </a:xfrm>
+          <a:prstGeom prst="rect">
+            <a:avLst/>
+          </a:prstGeom>
+          <a:noFill/>
+          <a:ln>
+            <a:noFill/>
+          </a:ln>
+        </p:spPr>
+        <p:txBody>
+          <a:bodyPr anchorCtr="0" anchor="t" bIns="91425" lIns="91425" spcFirstLastPara="1" rIns="91425" wrap="square" tIns="91425">
+            <a:spAutoFit/>
+          </a:bodyPr>
+          <a:lstStyle/>
+          <a:p>
+            <a:pPr indent="0" lvl="0" marL="0" rtl="0" algn="l">
+              <a:lnSpc>
+                <a:spcPct val="115000"/>
+              </a:lnSpc>
+              <a:spcBef>
+                <a:spcPts val="1800"/>
+              </a:spcBef>
+              <a:spcAft>
+                <a:spcPts val="0"/>
+              </a:spcAft>
+              <a:buNone/>
+            </a:pPr>
+            <a:r>
+              <a:rPr lang="pt-BR" sz="1500">
+                <a:solidFill>
+                  <a:schemeClr val="dk1"/>
+                </a:solidFill>
+                <a:latin typeface="Proxima Nova"/>
+                <a:ea typeface="Proxima Nova"/>
+                <a:cs typeface="Proxima Nova"/>
+                <a:sym typeface="Proxima Nova"/>
+              </a:rPr>
+              <a:t>Recomendação Final: QLoRA ( 18x menos memória, 99% qualidade retida, LLaMA-65B viável em GPU 48GB, Versatilidade para qualquer cenário)</a:t>
+            </a:r>
+            <a:endParaRPr sz="1500">
+              <a:solidFill>
+                <a:schemeClr val="dk1"/>
+              </a:solidFill>
+              <a:latin typeface="Proxima Nova"/>
+              <a:ea typeface="Proxima Nova"/>
+              <a:cs typeface="Proxima Nova"/>
+              <a:sym typeface="Proxima Nova"/>
+            </a:endParaRPr>
+          </a:p>
+          <a:p>
+            <a:pPr indent="0" lvl="0" marL="457200" rtl="0" algn="l">
+              <a:spcBef>
+                <a:spcPts val="1100"/>
+              </a:spcBef>
+              <a:spcAft>
+                <a:spcPts val="0"/>
+              </a:spcAft>
+              <a:buNone/>
+            </a:pPr>
+            <a:r>
+              <a:t/>
+            </a:r>
+            <a:endParaRPr sz="1500">
+              <a:solidFill>
+                <a:schemeClr val="dk1"/>
+              </a:solidFill>
+              <a:latin typeface="Proxima Nova"/>
+              <a:ea typeface="Proxima Nova"/>
+              <a:cs typeface="Proxima Nova"/>
+              <a:sym typeface="Proxima Nova"/>
+            </a:endParaRPr>
+          </a:p>
+        </p:txBody>
+      </p:sp>
+      <p:pic>
+        <p:nvPicPr>
+          <p:cNvPr id="116" name="Google Shape;116;p19"/>
+          <p:cNvPicPr preferRelativeResize="0"/>
+          <p:nvPr/>
+        </p:nvPicPr>
+        <p:blipFill>
+          <a:blip r:embed="rId3">
+            <a:alphaModFix/>
+          </a:blip>
+          <a:stretch>
+            <a:fillRect/>
+          </a:stretch>
+        </p:blipFill>
+        <p:spPr>
+          <a:xfrm>
+            <a:off x="1880525" y="1110325"/>
+            <a:ext cx="5382951" cy="3010799"/>
+          </a:xfrm>
+          <a:prstGeom prst="rect">
+            <a:avLst/>
+          </a:prstGeom>
+          <a:noFill/>
+          <a:ln>
+            <a:noFill/>
+          </a:ln>
+        </p:spPr>
+      </p:pic>
+      <p:sp>
+        <p:nvSpPr>
+          <p:cNvPr id="117" name="Google Shape;117;p19"/>
+          <p:cNvSpPr txBox="1"/>
+          <p:nvPr>
+            <p:ph type="title"/>
+          </p:nvPr>
+        </p:nvSpPr>
+        <p:spPr>
+          <a:xfrm>
+            <a:off x="311700" y="445025"/>
+            <a:ext cx="8520600" cy="572700"/>
+          </a:xfrm>
+          <a:prstGeom prst="rect">
+            <a:avLst/>
+          </a:prstGeom>
+        </p:spPr>
+        <p:txBody>
+          <a:bodyPr anchorCtr="0" anchor="t" bIns="91425" lIns="91425" spcFirstLastPara="1" rIns="91425" wrap="square" tIns="91425">
+            <a:normAutofit fontScale="90000"/>
+          </a:bodyPr>
+          <a:lstStyle/>
+          <a:p>
+            <a:pPr indent="0" lvl="0" marL="0" rtl="0" algn="l">
+              <a:spcBef>
+                <a:spcPts val="0"/>
+              </a:spcBef>
+              <a:spcAft>
+                <a:spcPts val="0"/>
+              </a:spcAft>
+              <a:buNone/>
+            </a:pPr>
+            <a:r>
+              <a:rPr lang="pt-BR"/>
+              <a:t>Primeiro Teste: Graphify</a:t>
+            </a:r>
+            <a:endParaRPr/>
+          </a:p>
+        </p:txBody>
+      </p:sp>
+    </p:spTree>
+  </p:cSld>
+  <p:clrMapOvr>
+    <a:masterClrMapping/>
+  </p:clrMapOvr>
+</p:sld>
+</file>
+
+<file path=ppt/slides/slide8.xml><?xml version="1.0" encoding="utf-8"?>
+<p:sld xmlns:a="http://schemas.openxmlformats.org/drawingml/2006/main" xmlns:r="http://schemas.openxmlformats.org/officeDocument/2006/relationships" xmlns:mc="http://schemas.openxmlformats.org/markup-compatibility/2006" xmlns:mv="urn:schemas-microsoft-com:mac:vml" xmlns:p="http://schemas.openxmlformats.org/presentationml/2006/main" xmlns:c="http://schemas.openxmlformats.org/drawingml/2006/chart" xmlns:dgm="http://schemas.openxmlformats.org/drawingml/2006/diagram" xmlns:o="urn:schemas-microsoft-com:office:office" xmlns:v="urn:schemas-microsoft-com:vml" xmlns:pvml="urn:schemas-microsoft-com:office:powerpoint" xmlns:com="http://schemas.openxmlformats.org/drawingml/2006/compatibility" xmlns:p14="http://schemas.microsoft.com/office/powerpoint/2010/main" xmlns:p15="http://schemas.microsoft.com/office/powerpoint/2012/main" xmlns:ahyp="http://schemas.microsoft.com/office/drawing/2018/hyperlinkcolor">
+  <p:cSld>
+    <p:spTree>
+      <p:nvGrpSpPr>
+        <p:cNvPr id="121" name="Shape 121"/>
+        <p:cNvGrpSpPr/>
+        <p:nvPr/>
+      </p:nvGrpSpPr>
+      <p:grpSpPr>
+        <a:xfrm>
+          <a:off x="0" y="0"/>
+          <a:ext cx="0" cy="0"/>
+          <a:chOff x="0" y="0"/>
+          <a:chExt cx="0" cy="0"/>
+        </a:xfrm>
+      </p:grpSpPr>
+      <p:sp>
+        <p:nvSpPr>
+          <p:cNvPr id="122" name="Google Shape;122;p20"/>
+          <p:cNvSpPr txBox="1"/>
+          <p:nvPr>
+            <p:ph type="title"/>
+          </p:nvPr>
+        </p:nvSpPr>
+        <p:spPr>
+          <a:xfrm>
+            <a:off x="311700" y="445025"/>
+            <a:ext cx="8520600" cy="572700"/>
+          </a:xfrm>
+          <a:prstGeom prst="rect">
+            <a:avLst/>
+          </a:prstGeom>
+        </p:spPr>
+        <p:txBody>
+          <a:bodyPr anchorCtr="0" anchor="t" bIns="91425" lIns="91425" spcFirstLastPara="1" rIns="91425" wrap="square" tIns="91425">
+            <a:normAutofit fontScale="90000"/>
+          </a:bodyPr>
+          <a:lstStyle/>
+          <a:p>
+            <a:pPr indent="0" lvl="0" marL="0" rtl="0" algn="l">
+              <a:spcBef>
+                <a:spcPts val="0"/>
+              </a:spcBef>
+              <a:spcAft>
+                <a:spcPts val="0"/>
+              </a:spcAft>
+              <a:buNone/>
+            </a:pPr>
+            <a:r>
+              <a:rPr lang="pt-BR"/>
+              <a:t>Primeiro Teste: NotebookLM</a:t>
+            </a:r>
+            <a:endParaRPr/>
+          </a:p>
+        </p:txBody>
+      </p:sp>
+      <p:pic>
+        <p:nvPicPr>
+          <p:cNvPr id="123" name="Google Shape;123;p20"/>
+          <p:cNvPicPr preferRelativeResize="0"/>
+          <p:nvPr/>
+        </p:nvPicPr>
+        <p:blipFill>
+          <a:blip r:embed="rId3">
+            <a:alphaModFix/>
+          </a:blip>
+          <a:stretch>
+            <a:fillRect/>
+          </a:stretch>
+        </p:blipFill>
+        <p:spPr>
+          <a:xfrm>
+            <a:off x="2619575" y="1198763"/>
+            <a:ext cx="3904856" cy="2745974"/>
+          </a:xfrm>
+          <a:prstGeom prst="rect">
+            <a:avLst/>
+          </a:prstGeom>
+          <a:noFill/>
+          <a:ln>
+            <a:noFill/>
+          </a:ln>
+        </p:spPr>
+      </p:pic>
+    </p:spTree>
+  </p:cSld>
+  <p:clrMapOvr>
+    <a:masterClrMapping/>
+  </p:clrMapOvr>
+</p:sld>
+</file>
+
+<file path=ppt/slides/slide9.xml><?xml version="1.0" encoding="utf-8"?>
+<p:sld xmlns:a="http://schemas.openxmlformats.org/drawingml/2006/main" xmlns:r="http://schemas.openxmlformats.org/officeDocument/2006/relationships" xmlns:mc="http://schemas.openxmlformats.org/markup-compatibility/2006" xmlns:mv="urn:schemas-microsoft-com:mac:vml" xmlns:p="http://schemas.openxmlformats.org/presentationml/2006/main" xmlns:c="http://schemas.openxmlformats.org/drawingml/2006/chart" xmlns:dgm="http://schemas.openxmlformats.org/drawingml/2006/diagram" xmlns:o="urn:schemas-microsoft-com:office:office" xmlns:v="urn:schemas-microsoft-com:vml" xmlns:pvml="urn:schemas-microsoft-com:office:powerpoint" xmlns:com="http://schemas.openxmlformats.org/drawingml/2006/compatibility" xmlns:p14="http://schemas.microsoft.com/office/powerpoint/2010/main" xmlns:p15="http://schemas.microsoft.com/office/powerpoint/2012/main" xmlns:ahyp="http://schemas.microsoft.com/office/drawing/2018/hyperlinkcolor">
+  <p:cSld>
+    <p:spTree>
+      <p:nvGrpSpPr>
+        <p:cNvPr id="127" name="Shape 127"/>
+        <p:cNvGrpSpPr/>
+        <p:nvPr/>
+      </p:nvGrpSpPr>
+      <p:grpSpPr>
+        <a:xfrm>
+          <a:off x="0" y="0"/>
+          <a:ext cx="0" cy="0"/>
+          <a:chOff x="0" y="0"/>
+          <a:chExt cx="0" cy="0"/>
+        </a:xfrm>
+      </p:grpSpPr>
+      <p:sp>
+        <p:nvSpPr>
+          <p:cNvPr id="128" name="Google Shape;128;p21"/>
+          <p:cNvSpPr txBox="1"/>
+          <p:nvPr>
+            <p:ph type="title"/>
+          </p:nvPr>
+        </p:nvSpPr>
+        <p:spPr>
+          <a:xfrm>
+            <a:off x="311700" y="445025"/>
+            <a:ext cx="8520600" cy="572700"/>
+          </a:xfrm>
+          <a:prstGeom prst="rect">
+            <a:avLst/>
+          </a:prstGeom>
+        </p:spPr>
+        <p:txBody>
+          <a:bodyPr anchorCtr="0" anchor="t" bIns="91425" lIns="91425" spcFirstLastPara="1" rIns="91425" wrap="square" tIns="91425">
+            <a:normAutofit fontScale="90000"/>
+          </a:bodyPr>
+          <a:lstStyle/>
+          <a:p>
+            <a:pPr indent="0" lvl="0" marL="0" rtl="0" algn="l">
+              <a:spcBef>
+                <a:spcPts val="0"/>
+              </a:spcBef>
+              <a:spcAft>
+                <a:spcPts val="0"/>
+              </a:spcAft>
+              <a:buNone/>
+            </a:pPr>
+            <a:r>
+              <a:rPr lang="pt-BR"/>
+              <a:t>Primeiro Teste: Resultados</a:t>
+            </a:r>
+            <a:endParaRPr/>
+          </a:p>
+        </p:txBody>
+      </p:sp>
+      <p:grpSp>
+        <p:nvGrpSpPr>
+          <p:cNvPr id="129" name="Google Shape;129;p21"/>
+          <p:cNvGrpSpPr/>
+          <p:nvPr/>
+        </p:nvGrpSpPr>
+        <p:grpSpPr>
+          <a:xfrm>
+            <a:off x="3463986" y="1624064"/>
+            <a:ext cx="2216038" cy="1895310"/>
+            <a:chOff x="945914" y="1590632"/>
+            <a:chExt cx="2955900" cy="2528092"/>
+          </a:xfrm>
+        </p:grpSpPr>
+        <p:sp>
+          <p:nvSpPr>
+            <p:cNvPr id="130" name="Google Shape;130;p21"/>
+            <p:cNvSpPr/>
+            <p:nvPr/>
+          </p:nvSpPr>
+          <p:spPr>
+            <a:xfrm>
+              <a:off x="945914" y="2052324"/>
+              <a:ext cx="2955900" cy="2066400"/>
+            </a:xfrm>
+            <a:prstGeom prst="roundRect">
+              <a:avLst>
+                <a:gd fmla="val 16667" name="adj"/>
+              </a:avLst>
+            </a:prstGeom>
+            <a:solidFill>
+              <a:schemeClr val="lt2"/>
+            </a:solidFill>
+            <a:ln cap="flat" cmpd="sng" w="7125">
+              <a:solidFill>
+                <a:schemeClr val="dk2"/>
+              </a:solidFill>
+              <a:prstDash val="solid"/>
+              <a:round/>
+              <a:headEnd len="sm" w="sm" type="none"/>
+              <a:tailEnd len="sm" w="sm" type="none"/>
+            </a:ln>
+          </p:spPr>
+          <p:txBody>
+            <a:bodyPr anchorCtr="0" anchor="ctr" bIns="68550" lIns="68550" spcFirstLastPara="1" rIns="68550" wrap="square" tIns="68550">
+              <a:noAutofit/>
+            </a:bodyPr>
+            <a:lstStyle/>
+            <a:p>
+              <a:pPr indent="-244561" lvl="0" marL="374871" rtl="0" algn="l">
+                <a:spcBef>
+                  <a:spcPts val="0"/>
+                </a:spcBef>
+                <a:spcAft>
+                  <a:spcPts val="0"/>
+                </a:spcAft>
+                <a:buSzPts val="900"/>
+                <a:buFont typeface="Proxima Nova"/>
+                <a:buChar char="●"/>
+              </a:pPr>
+              <a:r>
+                <a:rPr lang="pt-BR" sz="900">
+                  <a:latin typeface="Proxima Nova"/>
+                  <a:ea typeface="Proxima Nova"/>
+                  <a:cs typeface="Proxima Nova"/>
+                  <a:sym typeface="Proxima Nova"/>
+                </a:rPr>
+                <a:t>Criou analogias e pseudocódigo para facilitar a compreensão;</a:t>
+              </a:r>
+              <a:endParaRPr sz="900">
+                <a:latin typeface="Proxima Nova"/>
+                <a:ea typeface="Proxima Nova"/>
+                <a:cs typeface="Proxima Nova"/>
+                <a:sym typeface="Proxima Nova"/>
+              </a:endParaRPr>
+            </a:p>
+            <a:p>
+              <a:pPr indent="-244561" lvl="0" marL="374871" rtl="0" algn="l">
+                <a:spcBef>
+                  <a:spcPts val="0"/>
+                </a:spcBef>
+                <a:spcAft>
+                  <a:spcPts val="0"/>
+                </a:spcAft>
+                <a:buSzPts val="900"/>
+                <a:buFont typeface="Proxima Nova"/>
+                <a:buChar char="●"/>
+              </a:pPr>
+              <a:r>
+                <a:rPr lang="pt-BR" sz="900">
+                  <a:latin typeface="Proxima Nova"/>
+                  <a:ea typeface="Proxima Nova"/>
+                  <a:cs typeface="Proxima Nova"/>
+                  <a:sym typeface="Proxima Nova"/>
+                </a:rPr>
+                <a:t>Trouxe recomendações de qual técnica utilizar dadas as suas prioridades (ex. tempo de inferência, RAM disponível…);</a:t>
+              </a:r>
+              <a:endParaRPr sz="900">
+                <a:latin typeface="Proxima Nova"/>
+                <a:ea typeface="Proxima Nova"/>
+                <a:cs typeface="Proxima Nova"/>
+                <a:sym typeface="Proxima Nova"/>
+              </a:endParaRPr>
+            </a:p>
+            <a:p>
+              <a:pPr indent="-244561" lvl="0" marL="374871" rtl="0" algn="l">
+                <a:spcBef>
+                  <a:spcPts val="0"/>
+                </a:spcBef>
+                <a:spcAft>
+                  <a:spcPts val="0"/>
+                </a:spcAft>
+                <a:buSzPts val="900"/>
+                <a:buFont typeface="Proxima Nova"/>
+                <a:buChar char="●"/>
+              </a:pPr>
+              <a:r>
+                <a:rPr lang="pt-BR" sz="900">
+                  <a:latin typeface="Proxima Nova"/>
+                  <a:ea typeface="Proxima Nova"/>
+                  <a:cs typeface="Proxima Nova"/>
+                  <a:sym typeface="Proxima Nova"/>
+                </a:rPr>
+                <a:t>Trouxe referências aos nós do grafo aglomeradas ao final da resposta.</a:t>
+              </a:r>
+              <a:endParaRPr sz="900">
+                <a:latin typeface="Proxima Nova"/>
+                <a:ea typeface="Proxima Nova"/>
+                <a:cs typeface="Proxima Nova"/>
+                <a:sym typeface="Proxima Nova"/>
+              </a:endParaRPr>
+            </a:p>
+          </p:txBody>
+        </p:sp>
+        <p:sp>
+          <p:nvSpPr>
+            <p:cNvPr id="131" name="Google Shape;131;p21"/>
+            <p:cNvSpPr txBox="1"/>
+            <p:nvPr/>
+          </p:nvSpPr>
+          <p:spPr>
+            <a:xfrm>
+              <a:off x="1322857" y="1590632"/>
+              <a:ext cx="2202000" cy="461700"/>
+            </a:xfrm>
+            <a:prstGeom prst="rect">
+              <a:avLst/>
+            </a:prstGeom>
+            <a:noFill/>
+            <a:ln>
+              <a:noFill/>
+            </a:ln>
+          </p:spPr>
+          <p:txBody>
+            <a:bodyPr anchorCtr="0" anchor="t" bIns="68550" lIns="68550" spcFirstLastPara="1" rIns="68550" wrap="square" tIns="68550">
+              <a:spAutoFit/>
+            </a:bodyPr>
+            <a:lstStyle/>
+            <a:p>
+              <a:pPr indent="0" lvl="0" marL="0" rtl="0" algn="ctr">
+                <a:spcBef>
+                  <a:spcPts val="0"/>
+                </a:spcBef>
+                <a:spcAft>
+                  <a:spcPts val="0"/>
+                </a:spcAft>
+                <a:buNone/>
+              </a:pPr>
+              <a:r>
+                <a:rPr lang="pt-BR" sz="1349">
+                  <a:solidFill>
+                    <a:schemeClr val="accent3"/>
+                  </a:solidFill>
+                  <a:latin typeface="Proxima Nova"/>
+                  <a:ea typeface="Proxima Nova"/>
+                  <a:cs typeface="Proxima Nova"/>
+                  <a:sym typeface="Proxima Nova"/>
+                </a:rPr>
+                <a:t>Graphify</a:t>
+              </a:r>
+              <a:endParaRPr sz="1349">
+                <a:solidFill>
+                  <a:schemeClr val="accent3"/>
+                </a:solidFill>
+                <a:latin typeface="Proxima Nova"/>
+                <a:ea typeface="Proxima Nova"/>
+                <a:cs typeface="Proxima Nova"/>
+                <a:sym typeface="Proxima Nova"/>
+              </a:endParaRPr>
+            </a:p>
+          </p:txBody>
+        </p:sp>
+      </p:grpSp>
+      <p:grpSp>
+        <p:nvGrpSpPr>
+          <p:cNvPr id="132" name="Google Shape;132;p21"/>
+          <p:cNvGrpSpPr/>
+          <p:nvPr/>
+        </p:nvGrpSpPr>
+        <p:grpSpPr>
+          <a:xfrm>
+            <a:off x="368614" y="1624045"/>
+            <a:ext cx="2215944" cy="1895217"/>
+            <a:chOff x="5145729" y="1590450"/>
+            <a:chExt cx="2702700" cy="2311523"/>
+          </a:xfrm>
+        </p:grpSpPr>
+        <p:sp>
+          <p:nvSpPr>
+            <p:cNvPr id="133" name="Google Shape;133;p21"/>
+            <p:cNvSpPr/>
+            <p:nvPr/>
+          </p:nvSpPr>
+          <p:spPr>
+            <a:xfrm>
+              <a:off x="5145729" y="2052173"/>
+              <a:ext cx="2702700" cy="1849800"/>
+            </a:xfrm>
+            <a:prstGeom prst="roundRect">
+              <a:avLst>
+                <a:gd fmla="val 16667" name="adj"/>
+              </a:avLst>
+            </a:prstGeom>
+            <a:solidFill>
+              <a:schemeClr val="lt2"/>
+            </a:solidFill>
+            <a:ln cap="flat" cmpd="sng" w="7800">
+              <a:solidFill>
+                <a:schemeClr val="dk2"/>
+              </a:solidFill>
+              <a:prstDash val="solid"/>
+              <a:round/>
+              <a:headEnd len="sm" w="sm" type="none"/>
+              <a:tailEnd len="sm" w="sm" type="none"/>
+            </a:ln>
+          </p:spPr>
+          <p:txBody>
+            <a:bodyPr anchorCtr="0" anchor="ctr" bIns="74975" lIns="74975" spcFirstLastPara="1" rIns="74975" wrap="square" tIns="74975">
+              <a:noAutofit/>
+            </a:bodyPr>
+            <a:lstStyle/>
+            <a:p>
+              <a:pPr indent="-244561" lvl="0" marL="374871" rtl="0" algn="l">
+                <a:spcBef>
+                  <a:spcPts val="0"/>
+                </a:spcBef>
+                <a:spcAft>
+                  <a:spcPts val="0"/>
+                </a:spcAft>
+                <a:buSzPts val="900"/>
+                <a:buFont typeface="Proxima Nova"/>
+                <a:buChar char="●"/>
+              </a:pPr>
+              <a:r>
+                <a:rPr lang="pt-BR" sz="900">
+                  <a:latin typeface="Proxima Nova"/>
+                  <a:ea typeface="Proxima Nova"/>
+                  <a:cs typeface="Proxima Nova"/>
+                  <a:sym typeface="Proxima Nova"/>
+                </a:rPr>
+                <a:t>Trouxe porcentagem de parâmetros treináveis;</a:t>
+              </a:r>
+              <a:endParaRPr sz="900">
+                <a:latin typeface="Proxima Nova"/>
+                <a:ea typeface="Proxima Nova"/>
+                <a:cs typeface="Proxima Nova"/>
+                <a:sym typeface="Proxima Nova"/>
+              </a:endParaRPr>
+            </a:p>
+            <a:p>
+              <a:pPr indent="-244561" lvl="0" marL="374871" rtl="0" algn="l">
+                <a:spcBef>
+                  <a:spcPts val="0"/>
+                </a:spcBef>
+                <a:spcAft>
+                  <a:spcPts val="0"/>
+                </a:spcAft>
+                <a:buSzPts val="900"/>
+                <a:buFont typeface="Proxima Nova"/>
+                <a:buChar char="●"/>
+              </a:pPr>
+              <a:r>
+                <a:rPr lang="pt-BR" sz="900">
+                  <a:latin typeface="Proxima Nova"/>
+                  <a:ea typeface="Proxima Nova"/>
+                  <a:cs typeface="Proxima Nova"/>
+                  <a:sym typeface="Proxima Nova"/>
+                </a:rPr>
+                <a:t>Citou modelos que utilizaram cada método.</a:t>
+              </a:r>
+              <a:endParaRPr sz="900">
+                <a:latin typeface="Proxima Nova"/>
+                <a:ea typeface="Proxima Nova"/>
+                <a:cs typeface="Proxima Nova"/>
+                <a:sym typeface="Proxima Nova"/>
+              </a:endParaRPr>
+            </a:p>
+            <a:p>
+              <a:pPr indent="-244561" lvl="0" marL="374871" rtl="0" algn="l">
+                <a:spcBef>
+                  <a:spcPts val="0"/>
+                </a:spcBef>
+                <a:spcAft>
+                  <a:spcPts val="0"/>
+                </a:spcAft>
+                <a:buSzPts val="900"/>
+                <a:buFont typeface="Proxima Nova"/>
+                <a:buChar char="●"/>
+              </a:pPr>
+              <a:r>
+                <a:rPr lang="pt-BR" sz="900">
+                  <a:latin typeface="Proxima Nova"/>
+                  <a:ea typeface="Proxima Nova"/>
+                  <a:cs typeface="Proxima Nova"/>
+                  <a:sym typeface="Proxima Nova"/>
+                </a:rPr>
+                <a:t>Trouxe referências aglomeradas ao final da resposta.</a:t>
+              </a:r>
+              <a:endParaRPr sz="900">
+                <a:latin typeface="Proxima Nova"/>
+                <a:ea typeface="Proxima Nova"/>
+                <a:cs typeface="Proxima Nova"/>
+                <a:sym typeface="Proxima Nova"/>
+              </a:endParaRPr>
+            </a:p>
+          </p:txBody>
+        </p:sp>
+        <p:sp>
+          <p:nvSpPr>
+            <p:cNvPr id="134" name="Google Shape;134;p21"/>
+            <p:cNvSpPr txBox="1"/>
+            <p:nvPr/>
+          </p:nvSpPr>
+          <p:spPr>
+            <a:xfrm>
+              <a:off x="5587350" y="1590450"/>
+              <a:ext cx="1680600" cy="461700"/>
+            </a:xfrm>
+            <a:prstGeom prst="rect">
+              <a:avLst/>
+            </a:prstGeom>
+            <a:noFill/>
+            <a:ln>
+              <a:noFill/>
+            </a:ln>
+          </p:spPr>
+          <p:txBody>
+            <a:bodyPr anchorCtr="0" anchor="t" bIns="74975" lIns="74975" spcFirstLastPara="1" rIns="74975" wrap="square" tIns="74975">
+              <a:spAutoFit/>
+            </a:bodyPr>
+            <a:lstStyle/>
+            <a:p>
+              <a:pPr indent="0" lvl="0" marL="0" rtl="0" algn="ctr">
+                <a:spcBef>
+                  <a:spcPts val="0"/>
+                </a:spcBef>
+                <a:spcAft>
+                  <a:spcPts val="0"/>
+                </a:spcAft>
+                <a:buNone/>
+              </a:pPr>
+              <a:r>
+                <a:rPr lang="pt-BR" sz="1476">
+                  <a:solidFill>
+                    <a:schemeClr val="accent3"/>
+                  </a:solidFill>
+                  <a:latin typeface="Proxima Nova"/>
+                  <a:ea typeface="Proxima Nova"/>
+                  <a:cs typeface="Proxima Nova"/>
+                  <a:sym typeface="Proxima Nova"/>
+                </a:rPr>
+                <a:t>EdgeQuake</a:t>
+              </a:r>
+              <a:endParaRPr sz="1476">
+                <a:solidFill>
+                  <a:schemeClr val="accent3"/>
+                </a:solidFill>
+                <a:latin typeface="Proxima Nova"/>
+                <a:ea typeface="Proxima Nova"/>
+                <a:cs typeface="Proxima Nova"/>
+                <a:sym typeface="Proxima Nova"/>
+              </a:endParaRPr>
+            </a:p>
+          </p:txBody>
+        </p:sp>
+      </p:grpSp>
+      <p:grpSp>
+        <p:nvGrpSpPr>
+          <p:cNvPr id="135" name="Google Shape;135;p21"/>
+          <p:cNvGrpSpPr/>
+          <p:nvPr/>
+        </p:nvGrpSpPr>
+        <p:grpSpPr>
+          <a:xfrm>
+            <a:off x="6559439" y="1624133"/>
+            <a:ext cx="2215944" cy="1895217"/>
+            <a:chOff x="5145729" y="1590450"/>
+            <a:chExt cx="2702700" cy="2311523"/>
+          </a:xfrm>
+        </p:grpSpPr>
+        <p:sp>
+          <p:nvSpPr>
+            <p:cNvPr id="136" name="Google Shape;136;p21"/>
+            <p:cNvSpPr/>
+            <p:nvPr/>
+          </p:nvSpPr>
+          <p:spPr>
+            <a:xfrm>
+              <a:off x="5145729" y="2052173"/>
+              <a:ext cx="2702700" cy="1849800"/>
+            </a:xfrm>
+            <a:prstGeom prst="roundRect">
+              <a:avLst>
+                <a:gd fmla="val 16667" name="adj"/>
+              </a:avLst>
+            </a:prstGeom>
+            <a:solidFill>
+              <a:schemeClr val="lt2"/>
+            </a:solidFill>
+            <a:ln cap="flat" cmpd="sng" w="7800">
+              <a:solidFill>
+                <a:schemeClr val="dk2"/>
+              </a:solidFill>
+              <a:prstDash val="solid"/>
+              <a:round/>
+              <a:headEnd len="sm" w="sm" type="none"/>
+              <a:tailEnd len="sm" w="sm" type="none"/>
+            </a:ln>
+          </p:spPr>
+          <p:txBody>
+            <a:bodyPr anchorCtr="0" anchor="ctr" bIns="74975" lIns="74975" spcFirstLastPara="1" rIns="74975" wrap="square" tIns="74975">
+              <a:noAutofit/>
+            </a:bodyPr>
+            <a:lstStyle/>
+            <a:p>
+              <a:pPr indent="-244561" lvl="0" marL="374871" rtl="0" algn="l">
+                <a:spcBef>
+                  <a:spcPts val="0"/>
+                </a:spcBef>
+                <a:spcAft>
+                  <a:spcPts val="0"/>
+                </a:spcAft>
+                <a:buSzPts val="900"/>
+                <a:buFont typeface="Proxima Nova"/>
+                <a:buChar char="●"/>
+              </a:pPr>
+              <a:r>
+                <a:rPr lang="pt-BR" sz="900">
+                  <a:latin typeface="Proxima Nova"/>
+                  <a:ea typeface="Proxima Nova"/>
+                  <a:cs typeface="Proxima Nova"/>
+                  <a:sym typeface="Proxima Nova"/>
+                </a:rPr>
+                <a:t>Trouxe porcentagem de parâmetros treináveis;</a:t>
+              </a:r>
+              <a:endParaRPr sz="900">
+                <a:latin typeface="Proxima Nova"/>
+                <a:ea typeface="Proxima Nova"/>
+                <a:cs typeface="Proxima Nova"/>
+                <a:sym typeface="Proxima Nova"/>
+              </a:endParaRPr>
+            </a:p>
+            <a:p>
+              <a:pPr indent="-244561" lvl="0" marL="374871" rtl="0" algn="l">
+                <a:spcBef>
+                  <a:spcPts val="0"/>
+                </a:spcBef>
+                <a:spcAft>
+                  <a:spcPts val="0"/>
+                </a:spcAft>
+                <a:buSzPts val="900"/>
+                <a:buFont typeface="Proxima Nova"/>
+                <a:buChar char="●"/>
+              </a:pPr>
+              <a:r>
+                <a:rPr lang="pt-BR" sz="900">
+                  <a:latin typeface="Proxima Nova"/>
+                  <a:ea typeface="Proxima Nova"/>
+                  <a:cs typeface="Proxima Nova"/>
+                  <a:sym typeface="Proxima Nova"/>
+                </a:rPr>
+                <a:t>Citou impactos que cada técnica poderia apresentar no tempo de inferência;</a:t>
+              </a:r>
+              <a:endParaRPr sz="900">
+                <a:latin typeface="Proxima Nova"/>
+                <a:ea typeface="Proxima Nova"/>
+                <a:cs typeface="Proxima Nova"/>
+                <a:sym typeface="Proxima Nova"/>
+              </a:endParaRPr>
+            </a:p>
+            <a:p>
+              <a:pPr indent="-244561" lvl="0" marL="374871" rtl="0" algn="l">
+                <a:spcBef>
+                  <a:spcPts val="0"/>
+                </a:spcBef>
+                <a:spcAft>
+                  <a:spcPts val="0"/>
+                </a:spcAft>
+                <a:buSzPts val="900"/>
+                <a:buFont typeface="Proxima Nova"/>
+                <a:buChar char="●"/>
+              </a:pPr>
+              <a:r>
+                <a:rPr lang="pt-BR" sz="900">
+                  <a:latin typeface="Proxima Nova"/>
+                  <a:ea typeface="Proxima Nova"/>
+                  <a:cs typeface="Proxima Nova"/>
+                  <a:sym typeface="Proxima Nova"/>
+                </a:rPr>
+                <a:t>Trouxe referências para cada afirmação feita.</a:t>
+              </a:r>
+              <a:endParaRPr sz="900">
+                <a:latin typeface="Proxima Nova"/>
+                <a:ea typeface="Proxima Nova"/>
+                <a:cs typeface="Proxima Nova"/>
+                <a:sym typeface="Proxima Nova"/>
+              </a:endParaRPr>
+            </a:p>
+          </p:txBody>
+        </p:sp>
+        <p:sp>
+          <p:nvSpPr>
+            <p:cNvPr id="137" name="Google Shape;137;p21"/>
+            <p:cNvSpPr txBox="1"/>
+            <p:nvPr/>
+          </p:nvSpPr>
+          <p:spPr>
+            <a:xfrm>
+              <a:off x="5587350" y="1590450"/>
+              <a:ext cx="1680600" cy="461700"/>
+            </a:xfrm>
+            <a:prstGeom prst="rect">
+              <a:avLst/>
+            </a:prstGeom>
+            <a:noFill/>
+            <a:ln>
+              <a:noFill/>
+            </a:ln>
+          </p:spPr>
+          <p:txBody>
+            <a:bodyPr anchorCtr="0" anchor="t" bIns="74975" lIns="74975" spcFirstLastPara="1" rIns="74975" wrap="square" tIns="74975">
+              <a:spAutoFit/>
+            </a:bodyPr>
+            <a:lstStyle/>
+            <a:p>
+              <a:pPr indent="0" lvl="0" marL="0" rtl="0" algn="ctr">
+                <a:spcBef>
+                  <a:spcPts val="0"/>
+                </a:spcBef>
+                <a:spcAft>
+                  <a:spcPts val="0"/>
+                </a:spcAft>
+                <a:buNone/>
+              </a:pPr>
+              <a:r>
+                <a:rPr lang="pt-BR" sz="1476">
+                  <a:solidFill>
+                    <a:schemeClr val="accent3"/>
+                  </a:solidFill>
+                  <a:latin typeface="Proxima Nova"/>
+                  <a:ea typeface="Proxima Nova"/>
+                  <a:cs typeface="Proxima Nova"/>
+                  <a:sym typeface="Proxima Nova"/>
+                </a:rPr>
+                <a:t>NotebookLM</a:t>
+              </a:r>
+              <a:endParaRPr sz="1476">
+                <a:solidFill>
+                  <a:schemeClr val="accent3"/>
+                </a:solidFill>
+                <a:latin typeface="Proxima Nova"/>
+                <a:ea typeface="Proxima Nova"/>
+                <a:cs typeface="Proxima Nova"/>
+                <a:sym typeface="Proxima Nova"/>
+              </a:endParaRPr>
+            </a:p>
+          </p:txBody>
+        </p:sp>
+      </p:grpSp>
+    </p:spTree>
+  </p:cSld>
+  <p:clrMapOvr>
+    <a:masterClrMapping/>
+  </p:clrMapOvr>
+</p:sld>
+</file>
+
 <file path=ppt/theme/theme1.xml><?xml version="1.0" encoding="utf-8"?>
+<a:theme xmlns:a="http://schemas.openxmlformats.org/drawingml/2006/main" xmlns:r="http://schemas.openxmlformats.org/officeDocument/2006/relationships">
+  <a:themeElements>
+    <a:clrScheme name="Default">
+      <a:dk1>
+        <a:srgbClr val="000000"/>
+      </a:dk1>
+      <a:lt1>
+        <a:srgbClr val="FFFFFF"/>
+      </a:lt1>
+      <a:dk2>
+        <a:srgbClr val="158158"/>
+      </a:dk2>
+      <a:lt2>
+        <a:srgbClr val="F3F3F3"/>
+      </a:lt2>
+      <a:accent1>
+        <a:srgbClr val="058DC7"/>
+      </a:accent1>
+      <a:accent2>
+        <a:srgbClr val="50B432"/>
+      </a:accent2>
+      <a:accent3>
+        <a:srgbClr val="ED561B"/>
+      </a:accent3>
+      <a:accent4>
+        <a:srgbClr val="EDEF00"/>
+      </a:accent4>
+      <a:accent5>
+        <a:srgbClr val="24CBE5"/>
+      </a:accent5>
+      <a:accent6>
+        <a:srgbClr val="64E572"/>
+      </a:accent6>
+      <a:hlink>
+        <a:srgbClr val="2200CC"/>
+      </a:hlink>
+      <a:folHlink>
+        <a:srgbClr val="551A8B"/>
+      </a:folHlink>
+    </a:clrScheme>
+    <a:fontScheme name="Office">
+      <a:majorFont>
+        <a:latin typeface="Arial"/>
+        <a:ea typeface=""/>
+        <a:cs typeface=""/>
+        <a:font script="Jpan" typeface="ＭＳ Ｐゴシック"/>
+        <a:font script="Hang" typeface="맑은 고딕"/>
+        <a:font script="Hans" typeface="宋体"/>
+        <a:font script="Hant" typeface="新細明體"/>
+        <a:font script="Arab" typeface="Times New Roman"/>
+        <a:font script="Hebr" typeface="Times New Roman"/>
+        <a:font script="Thai" typeface="Angsana New"/>
+        <a:font script="Ethi" typeface="Nyala"/>
+        <a:font script="Beng" typeface="Vrinda"/>
+        <a:font script="Gujr" typeface="Shruti"/>
+        <a:font script="Khmr" typeface="MoolBoran"/>
+        <a:font script="Knda" typeface="Tunga"/>
+        <a:font script="Guru" typeface="Raavi"/>
+        <a:font script="Cans" typeface="Euphemia"/>
+        <a:font script="Cher" typeface="Plantagenet Cherokee"/>
+        <a:font script="Yiii" typeface="Microsoft Yi Baiti"/>
+        <a:font script="Tibt" typeface="Microsoft Himalaya"/>
+        <a:font script="Thaa" typeface="MV Boli"/>
+        <a:font script="Deva" typeface="Mangal"/>
+        <a:font script="Telu" typeface="Gautami"/>
+        <a:font script="Taml" typeface="Latha"/>
+        <a:font script="Syrc" typeface="Estrangelo Edessa"/>
+        <a:font script="Orya" typeface="Kalinga"/>
+        <a:font script="Mlym" typeface="Kartika"/>
+        <a:font script="Laoo" typeface="DokChampa"/>
+        <a:font script="Sinh" typeface="Iskoola Pota"/>
+        <a:font script="Mong" typeface="Mongolian Baiti"/>
+        <a:font script="Viet" typeface="Times New Roman"/>
+        <a:font script="Uigh" typeface="Microsoft Uighur"/>
+        <a:font script="Geor" typeface="Sylfaen"/>
+      </a:majorFont>
+      <a:minorFont>
+        <a:latin typeface="Arial"/>
+        <a:ea typeface=""/>
+        <a:cs typeface=""/>
+        <a:font script="Jpan" typeface="ＭＳ Ｐゴシック"/>
+        <a:font script="Hang" typeface="맑은 고딕"/>
+        <a:font script="Hans" typeface="宋体"/>
+        <a:font script="Hant" typeface="新細明體"/>
+        <a:font script="Arab" typeface="Arial"/>
+        <a:font script="Hebr" typeface="Arial"/>
+        <a:font script="Thai" typeface="Cordia New"/>
+        <a:font script="Ethi" typeface="Nyala"/>
+        <a:font script="Beng" typeface="Vrinda"/>
+        <a:font script="Gujr" typeface="Shruti"/>
+        <a:font script="Khmr" typeface="DaunPenh"/>
+        <a:font script="Knda" typeface="Tunga"/>
+        <a:font script="Guru" typeface="Raavi"/>
+        <a:font script="Cans" typeface="Euphemia"/>
+        <a:font script="Cher" typeface="Plantagenet Cherokee"/>
+        <a:font script="Yiii" typeface="Microsoft Yi Baiti"/>
+        <a:font script="Tibt" typeface="Microsoft Himalaya"/>
+        <a:font script="Thaa" typeface="MV Boli"/>
+        <a:font script="Deva" typeface="Mangal"/>
+        <a:font script="Telu" typeface="Gautami"/>
+        <a:font script="Taml" typeface="Latha"/>
+        <a:font script="Syrc" typeface="Estrangelo Edessa"/>
+        <a:font script="Orya" typeface="Kalinga"/>
+        <a:font script="Mlym" typeface="Kartika"/>
+        <a:font script="Laoo" typeface="DokChampa"/>
+        <a:font script="Sinh" typeface="Iskoola Pota"/>
+        <a:font script="Mong" typeface="Mongolian Baiti"/>
+        <a:font script="Viet" typeface="Arial"/>
+        <a:font script="Uigh" typeface="Microsoft Uighur"/>
+        <a:font script="Geor" typeface="Sylfaen"/>
+      </a:minorFont>
+    </a:fontScheme>
+    <a:fmtScheme name="Office">
+      <a:fillStyleLst>
+        <a:solidFill>
+          <a:schemeClr val="phClr"/>
+        </a:solidFill>
+        <a:gradFill rotWithShape="1">
+          <a:gsLst>
+            <a:gs pos="0">
+              <a:schemeClr val="phClr">
+                <a:tint val="50000"/>
+                <a:satMod val="300000"/>
+              </a:schemeClr>
+            </a:gs>
+            <a:gs pos="35000">
+              <a:schemeClr val="phClr">
+                <a:tint val="37000"/>
+                <a:satMod val="300000"/>
+              </a:schemeClr>
+            </a:gs>
+            <a:gs pos="100000">
+              <a:schemeClr val="phClr">
+                <a:tint val="15000"/>
+                <a:satMod val="350000"/>
+              </a:schemeClr>
+            </a:gs>
+          </a:gsLst>
+          <a:lin ang="16200000" scaled="1"/>
+        </a:gradFill>
+        <a:gradFill rotWithShape="1">
+          <a:gsLst>
+            <a:gs pos="0">
+              <a:schemeClr val="phClr">
+                <a:tint val="100000"/>
+                <a:shade val="100000"/>
+                <a:satMod val="130000"/>
+              </a:schemeClr>
+            </a:gs>
+            <a:gs pos="100000">
+              <a:schemeClr val="phClr">
+                <a:tint val="50000"/>
+                <a:shade val="100000"/>
+                <a:satMod val="350000"/>
+              </a:schemeClr>
+            </a:gs>
+          </a:gsLst>
+          <a:lin ang="16200000" scaled="0"/>
+        </a:gradFill>
+      </a:fillStyleLst>
+      <a:lnStyleLst>
+        <a:ln w="9525" cap="flat" cmpd="sng" algn="ctr">
+          <a:solidFill>
+            <a:schemeClr val="phClr">
+              <a:shade val="95000"/>
+              <a:satMod val="105000"/>
+            </a:schemeClr>
+          </a:solidFill>
+          <a:prstDash val="solid"/>
+        </a:ln>
+        <a:ln w="25400" cap="flat" cmpd="sng" algn="ctr">
+          <a:solidFill>
+            <a:schemeClr val="phClr"/>
+          </a:solidFill>
+          <a:prstDash val="solid"/>
+        </a:ln>
+        <a:ln w="38100" cap="flat" cmpd="sng" algn="ctr">
+          <a:solidFill>
+            <a:schemeClr val="phClr"/>
+          </a:solidFill>
+          <a:prstDash val="solid"/>
+        </a:ln>
+      </a:lnStyleLst>
+      <a:effectStyleLst>
+        <a:effectStyle>
+          <a:effectLst>
+            <a:outerShdw blurRad="40000" dist="20000" dir="5400000" rotWithShape="0">
+              <a:srgbClr val="000000">
+                <a:alpha val="38000"/>
+              </a:srgbClr>
+            </a:outerShdw>
+          </a:effectLst>
+        </a:effectStyle>
+        <a:effectStyle>
+          <a:effectLst>
+            <a:outerShdw blurRad="40000" dist="23000" dir="5400000" rotWithShape="0">
+              <a:srgbClr val="000000">
+                <a:alpha val="35000"/>
+              </a:srgbClr>
+            </a:outerShdw>
+          </a:effectLst>
+        </a:effectStyle>
+        <a:effectStyle>
+          <a:effectLst>
+            <a:outerShdw blurRad="40000" dist="23000" dir="5400000" rotWithShape="0">
+              <a:srgbClr val="000000">
+                <a:alpha val="35000"/>
+              </a:srgbClr>
+            </a:outerShdw>
+          </a:effectLst>
+          <a:scene3d>
+            <a:camera prst="orthographicFront">
+              <a:rot lat="0" lon="0" rev="0"/>
+            </a:camera>
+            <a:lightRig rig="threePt" dir="t">
+              <a:rot lat="0" lon="0" rev="1200000"/>
+            </a:lightRig>
+          </a:scene3d>
+          <a:sp3d>
+            <a:bevelT w="63500" h="25400"/>
+          </a:sp3d>
+        </a:effectStyle>
+      </a:effectStyleLst>
+      <a:bgFillStyleLst>
+        <a:solidFill>
+          <a:schemeClr val="phClr"/>
+        </a:solidFill>
+        <a:gradFill rotWithShape="1">
+          <a:gsLst>
+            <a:gs pos="0">
+              <a:schemeClr val="phClr">
+                <a:tint val="40000"/>
+                <a:satMod val="350000"/>
+              </a:schemeClr>
+            </a:gs>
+            <a:gs pos="40000">
+              <a:schemeClr val="phClr">
+                <a:tint val="45000"/>
+                <a:shade val="99000"/>
+                <a:satMod val="350000"/>
+              </a:schemeClr>
+            </a:gs>
+            <a:gs pos="100000">
+              <a:schemeClr val="phClr">
+                <a:shade val="20000"/>
+                <a:satMod val="255000"/>
+              </a:schemeClr>
+            </a:gs>
+          </a:gsLst>
+          <a:path path="circle">
+            <a:fillToRect l="50000" t="-80000" r="50000" b="180000"/>
+          </a:path>
+        </a:gradFill>
+        <a:gradFill rotWithShape="1">
+          <a:gsLst>
+            <a:gs pos="0">
+              <a:schemeClr val="phClr">
+                <a:tint val="80000"/>
+                <a:satMod val="300000"/>
+              </a:schemeClr>
+            </a:gs>
+            <a:gs pos="100000">
+              <a:schemeClr val="phClr">
+                <a:shade val="30000"/>
+                <a:satMod val="200000"/>
+              </a:schemeClr>
+            </a:gs>
+          </a:gsLst>
+          <a:path path="circle">
+            <a:fillToRect l="50000" t="50000" r="50000" b="50000"/>
+          </a:path>
+        </a:gradFill>
+      </a:bgFillStyleLst>
+    </a:fmtScheme>
+  </a:themeElements>
+</a:theme>
+</file>
+
+<file path=ppt/theme/theme2.xml><?xml version="1.0" encoding="utf-8"?>
 <a:theme xmlns:a="http://schemas.openxmlformats.org/drawingml/2006/main" xmlns:r="http://schemas.openxmlformats.org/officeDocument/2006/relationships" name="Slate">
   <a:themeElements>
     <a:clrScheme name="Slate">
@@ -8408,283 +13054,4 @@
     </a:fmtScheme>
   </a:themeElements>
 </a:theme>
-</file>
-
-<file path=ppt/theme/theme2.xml><?xml version="1.0" encoding="utf-8"?>
-<a:theme xmlns:a="http://schemas.openxmlformats.org/drawingml/2006/main" xmlns:r="http://schemas.openxmlformats.org/officeDocument/2006/relationships">
-  <a:themeElements>
-    <a:clrScheme name="Default">
-      <a:dk1>
-        <a:srgbClr val="000000"/>
-      </a:dk1>
-      <a:lt1>
-        <a:srgbClr val="FFFFFF"/>
-      </a:lt1>
-      <a:dk2>
-        <a:srgbClr val="158158"/>
-      </a:dk2>
-      <a:lt2>
-        <a:srgbClr val="F3F3F3"/>
-      </a:lt2>
-      <a:accent1>
-        <a:srgbClr val="058DC7"/>
-      </a:accent1>
-      <a:accent2>
-        <a:srgbClr val="50B432"/>
-      </a:accent2>
-      <a:accent3>
-        <a:srgbClr val="ED561B"/>
-      </a:accent3>
-      <a:accent4>
-        <a:srgbClr val="EDEF00"/>
-      </a:accent4>
-      <a:accent5>
-        <a:srgbClr val="24CBE5"/>
-      </a:accent5>
-      <a:accent6>
-        <a:srgbClr val="64E572"/>
-      </a:accent6>
-      <a:hlink>
-        <a:srgbClr val="2200CC"/>
-      </a:hlink>
-      <a:folHlink>
-        <a:srgbClr val="551A8B"/>
-      </a:folHlink>
-    </a:clrScheme>
-    <a:fontScheme name="Office">
-      <a:majorFont>
-        <a:latin typeface="Arial"/>
-        <a:ea typeface=""/>
-        <a:cs typeface=""/>
-        <a:font script="Jpan" typeface="ＭＳ Ｐゴシック"/>
-        <a:font script="Hang" typeface="맑은 고딕"/>
-        <a:font script="Hans" typeface="宋体"/>
-        <a:font script="Hant" typeface="新細明體"/>
-        <a:font script="Arab" typeface="Times New Roman"/>
-        <a:font script="Hebr" typeface="Times New Roman"/>
-        <a:font script="Thai" typeface="Angsana New"/>
-        <a:font script="Ethi" typeface="Nyala"/>
-        <a:font script="Beng" typeface="Vrinda"/>
-        <a:font script="Gujr" typeface="Shruti"/>
-        <a:font script="Khmr" typeface="MoolBoran"/>
-        <a:font script="Knda" typeface="Tunga"/>
-        <a:font script="Guru" typeface="Raavi"/>
-        <a:font script="Cans" typeface="Euphemia"/>
-        <a:font script="Cher" typeface="Plantagenet Cherokee"/>
-        <a:font script="Yiii" typeface="Microsoft Yi Baiti"/>
-        <a:font script="Tibt" typeface="Microsoft Himalaya"/>
-        <a:font script="Thaa" typeface="MV Boli"/>
-        <a:font script="Deva" typeface="Mangal"/>
-        <a:font script="Telu" typeface="Gautami"/>
-        <a:font script="Taml" typeface="Latha"/>
-        <a:font script="Syrc" typeface="Estrangelo Edessa"/>
-        <a:font script="Orya" typeface="Kalinga"/>
-        <a:font script="Mlym" typeface="Kartika"/>
-        <a:font script="Laoo" typeface="DokChampa"/>
-        <a:font script="Sinh" typeface="Iskoola Pota"/>
-        <a:font script="Mong" typeface="Mongolian Baiti"/>
-        <a:font script="Viet" typeface="Times New Roman"/>
-        <a:font script="Uigh" typeface="Microsoft Uighur"/>
-        <a:font script="Geor" typeface="Sylfaen"/>
-      </a:majorFont>
-      <a:minorFont>
-        <a:latin typeface="Arial"/>
-        <a:ea typeface=""/>
-        <a:cs typeface=""/>
-        <a:font script="Jpan" typeface="ＭＳ Ｐゴシック"/>
-        <a:font script="Hang" typeface="맑은 고딕"/>
-        <a:font script="Hans" typeface="宋体"/>
-        <a:font script="Hant" typeface="新細明體"/>
-        <a:font script="Arab" typeface="Arial"/>
-        <a:font script="Hebr" typeface="Arial"/>
-        <a:font script="Thai" typeface="Cordia New"/>
-        <a:font script="Ethi" typeface="Nyala"/>
-        <a:font script="Beng" typeface="Vrinda"/>
-        <a:font script="Gujr" typeface="Shruti"/>
-        <a:font script="Khmr" typeface="DaunPenh"/>
-        <a:font script="Knda" typeface="Tunga"/>
-        <a:font script="Guru" typeface="Raavi"/>
-        <a:font script="Cans" typeface="Euphemia"/>
-        <a:font script="Cher" typeface="Plantagenet Cherokee"/>
-        <a:font script="Yiii" typeface="Microsoft Yi Baiti"/>
-        <a:font script="Tibt" typeface="Microsoft Himalaya"/>
-        <a:font script="Thaa" typeface="MV Boli"/>
-        <a:font script="Deva" typeface="Mangal"/>
-        <a:font script="Telu" typeface="Gautami"/>
-        <a:font script="Taml" typeface="Latha"/>
-        <a:font script="Syrc" typeface="Estrangelo Edessa"/>
-        <a:font script="Orya" typeface="Kalinga"/>
-        <a:font script="Mlym" typeface="Kartika"/>
-        <a:font script="Laoo" typeface="DokChampa"/>
-        <a:font script="Sinh" typeface="Iskoola Pota"/>
-        <a:font script="Mong" typeface="Mongolian Baiti"/>
-        <a:font script="Viet" typeface="Arial"/>
-        <a:font script="Uigh" typeface="Microsoft Uighur"/>
-        <a:font script="Geor" typeface="Sylfaen"/>
-      </a:minorFont>
-    </a:fontScheme>
-    <a:fmtScheme name="Office">
-      <a:fillStyleLst>
-        <a:solidFill>
-          <a:schemeClr val="phClr"/>
-        </a:solidFill>
-        <a:gradFill rotWithShape="1">
-          <a:gsLst>
-            <a:gs pos="0">
-              <a:schemeClr val="phClr">
-                <a:tint val="50000"/>
-                <a:satMod val="300000"/>
-              </a:schemeClr>
-            </a:gs>
-            <a:gs pos="35000">
-              <a:schemeClr val="phClr">
-                <a:tint val="37000"/>
-                <a:satMod val="300000"/>
-              </a:schemeClr>
-            </a:gs>
-            <a:gs pos="100000">
-              <a:schemeClr val="phClr">
-                <a:tint val="15000"/>
-                <a:satMod val="350000"/>
-              </a:schemeClr>
-            </a:gs>
-          </a:gsLst>
-          <a:lin ang="16200000" scaled="1"/>
-        </a:gradFill>
-        <a:gradFill rotWithShape="1">
-          <a:gsLst>
-            <a:gs pos="0">
-              <a:schemeClr val="phClr">
-                <a:tint val="100000"/>
-                <a:shade val="100000"/>
-                <a:satMod val="130000"/>
-              </a:schemeClr>
-            </a:gs>
-            <a:gs pos="100000">
-              <a:schemeClr val="phClr">
-                <a:tint val="50000"/>
-                <a:shade val="100000"/>
-                <a:satMod val="350000"/>
-              </a:schemeClr>
-            </a:gs>
-          </a:gsLst>
-          <a:lin ang="16200000" scaled="0"/>
-        </a:gradFill>
-      </a:fillStyleLst>
-      <a:lnStyleLst>
-        <a:ln w="9525" cap="flat" cmpd="sng" algn="ctr">
-          <a:solidFill>
-            <a:schemeClr val="phClr">
-              <a:shade val="95000"/>
-              <a:satMod val="105000"/>
-            </a:schemeClr>
-          </a:solidFill>
-          <a:prstDash val="solid"/>
-        </a:ln>
-        <a:ln w="25400" cap="flat" cmpd="sng" algn="ctr">
-          <a:solidFill>
-            <a:schemeClr val="phClr"/>
-          </a:solidFill>
-          <a:prstDash val="solid"/>
-        </a:ln>
-        <a:ln w="38100" cap="flat" cmpd="sng" algn="ctr">
-          <a:solidFill>
-            <a:schemeClr val="phClr"/>
-          </a:solidFill>
-          <a:prstDash val="solid"/>
-        </a:ln>
-      </a:lnStyleLst>
-      <a:effectStyleLst>
-        <a:effectStyle>
-          <a:effectLst>
-            <a:outerShdw blurRad="40000" dist="20000" dir="5400000" rotWithShape="0">
-              <a:srgbClr val="000000">
-                <a:alpha val="38000"/>
-              </a:srgbClr>
-            </a:outerShdw>
-          </a:effectLst>
-        </a:effectStyle>
-        <a:effectStyle>
-          <a:effectLst>
-            <a:outerShdw blurRad="40000" dist="23000" dir="5400000" rotWithShape="0">
-              <a:srgbClr val="000000">
-                <a:alpha val="35000"/>
-              </a:srgbClr>
-            </a:outerShdw>
-          </a:effectLst>
-        </a:effectStyle>
-        <a:effectStyle>
-          <a:effectLst>
-            <a:outerShdw blurRad="40000" dist="23000" dir="5400000" rotWithShape="0">
-              <a:srgbClr val="000000">
-                <a:alpha val="35000"/>
-              </a:srgbClr>
-            </a:outerShdw>
-          </a:effectLst>
-          <a:scene3d>
-            <a:camera prst="orthographicFront">
-              <a:rot lat="0" lon="0" rev="0"/>
-            </a:camera>
-            <a:lightRig rig="threePt" dir="t">
-              <a:rot lat="0" lon="0" rev="1200000"/>
-            </a:lightRig>
-          </a:scene3d>
-          <a:sp3d>
-            <a:bevelT w="63500" h="25400"/>
-          </a:sp3d>
-        </a:effectStyle>
-      </a:effectStyleLst>
-      <a:bgFillStyleLst>
-        <a:solidFill>
-          <a:schemeClr val="phClr"/>
-        </a:solidFill>
-        <a:gradFill rotWithShape="1">
-          <a:gsLst>
-            <a:gs pos="0">
-              <a:schemeClr val="phClr">
-                <a:tint val="40000"/>
-                <a:satMod val="350000"/>
-              </a:schemeClr>
-            </a:gs>
-            <a:gs pos="40000">
-              <a:schemeClr val="phClr">
-                <a:tint val="45000"/>
-                <a:shade val="99000"/>
-                <a:satMod val="350000"/>
-              </a:schemeClr>
-            </a:gs>
-            <a:gs pos="100000">
-              <a:schemeClr val="phClr">
-                <a:shade val="20000"/>
-                <a:satMod val="255000"/>
-              </a:schemeClr>
-            </a:gs>
-          </a:gsLst>
-          <a:path path="circle">
-            <a:fillToRect l="50000" t="-80000" r="50000" b="180000"/>
-          </a:path>
-        </a:gradFill>
-        <a:gradFill rotWithShape="1">
-          <a:gsLst>
-            <a:gs pos="0">
-              <a:schemeClr val="phClr">
-                <a:tint val="80000"/>
-                <a:satMod val="300000"/>
-              </a:schemeClr>
-            </a:gs>
-            <a:gs pos="100000">
-              <a:schemeClr val="phClr">
-                <a:shade val="30000"/>
-                <a:satMod val="200000"/>
-              </a:schemeClr>
-            </a:gs>
-          </a:gsLst>
-          <a:path path="circle">
-            <a:fillToRect l="50000" t="50000" r="50000" b="50000"/>
-          </a:path>
-        </a:gradFill>
-      </a:bgFillStyleLst>
-    </a:fmtScheme>
-  </a:themeElements>
-</a:theme>
 </file>